--- a/Capstone/2026/CS480W_481_Capstone_Kickoff_2.pptx
+++ b/Capstone/2026/CS480W_481_Capstone_Kickoff_2.pptx
@@ -4,6 +4,9 @@
   <p:sldMasterIdLst>
     <p:sldMasterId id="2147483648" r:id="rId1"/>
   </p:sldMasterIdLst>
+  <p:notesMasterIdLst>
+    <p:notesMasterId r:id="rId16"/>
+  </p:notesMasterIdLst>
   <p:sldIdLst>
     <p:sldId id="256" r:id="rId2"/>
     <p:sldId id="257" r:id="rId3"/>
@@ -20,9 +23,6 @@
     <p:sldId id="268" r:id="rId14"/>
     <p:sldId id="269" r:id="rId15"/>
   </p:sldIdLst>
-  <p:notesMasterIdLst>
-    <p:notesMasterId r:id="rId16"/>
-  </p:notesMasterIdLst>
   <p:sldSz cx="12192000" cy="6858000"/>
   <p:notesSz cx="6858000" cy="12192000"/>
   <p:defaultTextStyle>
@@ -117,13 +117,20 @@
       </a:defRPr>
     </a:lvl9pPr>
   </p:defaultTextStyle>
+  <p:extLst>
+    <p:ext uri="{EFAFB233-063F-42B5-8137-9DF3F51BA10A}">
+      <p15:sldGuideLst xmlns:p15="http://schemas.microsoft.com/office/powerpoint/2012/main"/>
+    </p:ext>
+  </p:extLst>
 </p:presentation>
 </file>
 
 <file path=ppt/charts/chart1.xml><?xml version="1.0" encoding="utf-8"?>
-<c:chartSpace xmlns:c="http://schemas.openxmlformats.org/drawingml/2006/chart" xmlns:a="http://schemas.openxmlformats.org/drawingml/2006/main" xmlns:r="http://schemas.openxmlformats.org/officeDocument/2006/relationships">
+<c:chartSpace xmlns:c="http://schemas.openxmlformats.org/drawingml/2006/chart" xmlns:a="http://schemas.openxmlformats.org/drawingml/2006/main" xmlns:r="http://schemas.openxmlformats.org/officeDocument/2006/relationships" xmlns:c16r2="http://schemas.microsoft.com/office/drawing/2015/06/chart">
   <c:date1904 val="0"/>
+  <c:lang val="en-US"/>
   <c:roundedCorners val="1"/>
+  <c:style val="2"/>
   <c:chart>
     <c:autoTitleDeleted val="1"/>
     <c:plotArea>
@@ -155,18 +162,26 @@
           <c:invertIfNegative val="0"/>
           <c:dLbls>
             <c:numFmt formatCode="#,##0" sourceLinked="0"/>
+            <c:spPr>
+              <a:noFill/>
+              <a:ln>
+                <a:noFill/>
+              </a:ln>
+              <a:effectLst/>
+            </c:spPr>
             <c:txPr>
               <a:bodyPr/>
               <a:lstStyle/>
               <a:p>
                 <a:pPr>
-                  <a:defRPr b="0" i="0" strike="noStrike" sz="1000" u="none">
+                  <a:defRPr sz="1000" b="0" i="0" u="none" strike="noStrike">
                     <a:solidFill>
                       <a:srgbClr val="2A2321"/>
                     </a:solidFill>
                     <a:latin typeface="Arial"/>
                   </a:defRPr>
                 </a:pPr>
+                <a:endParaRPr lang="en-US"/>
               </a:p>
             </c:txPr>
             <c:showLegendKey val="0"/>
@@ -176,37 +191,40 @@
             <c:showPercent val="0"/>
             <c:showBubbleSize val="0"/>
             <c:showLeaderLines val="0"/>
+            <c:extLst>
+              <c:ext xmlns:c15="http://schemas.microsoft.com/office/drawing/2012/chart" uri="{CE6537A1-D6FC-4f65-9D91-7224C49458BB}">
+                <c15:showLeaderLines val="0"/>
+              </c:ext>
+            </c:extLst>
           </c:dLbls>
           <c:cat>
-            <c:multiLvlStrRef>
+            <c:strRef>
               <c:f>Sheet1!$A$2:$A$8</c:f>
-              <c:multiLvlStrCache>
+              <c:strCache>
                 <c:ptCount val="7"/>
-                <c:lvl>
-                  <c:pt idx="0">
-                    <c:v>Proposal</c:v>
-                  </c:pt>
-                  <c:pt idx="1">
-                    <c:v>Design Docs</c:v>
-                  </c:pt>
-                  <c:pt idx="2">
-                    <c:v>Weekly Prog.</c:v>
-                  </c:pt>
-                  <c:pt idx="3">
-                    <c:v>Mid-Sem.</c:v>
-                  </c:pt>
-                  <c:pt idx="4">
-                    <c:v>Prototype</c:v>
-                  </c:pt>
-                  <c:pt idx="5">
-                    <c:v>Final Pres.</c:v>
-                  </c:pt>
-                  <c:pt idx="6">
-                    <c:v>Peer Rev.</c:v>
-                  </c:pt>
-                </c:lvl>
-              </c:multiLvlStrCache>
-            </c:multiLvlStrRef>
+                <c:pt idx="0">
+                  <c:v>Proposal</c:v>
+                </c:pt>
+                <c:pt idx="1">
+                  <c:v>Design Docs</c:v>
+                </c:pt>
+                <c:pt idx="2">
+                  <c:v>Weekly Prog.</c:v>
+                </c:pt>
+                <c:pt idx="3">
+                  <c:v>Mid-Sem.</c:v>
+                </c:pt>
+                <c:pt idx="4">
+                  <c:v>Prototype</c:v>
+                </c:pt>
+                <c:pt idx="5">
+                  <c:v>Final Pres.</c:v>
+                </c:pt>
+                <c:pt idx="6">
+                  <c:v>Peer Rev.</c:v>
+                </c:pt>
+              </c:strCache>
+            </c:strRef>
           </c:cat>
           <c:val>
             <c:numRef>
@@ -238,36 +256,23 @@
               </c:numCache>
             </c:numRef>
           </c:val>
+          <c:extLst>
+            <c:ext xmlns:c16="http://schemas.microsoft.com/office/drawing/2014/chart" uri="{C3380CC4-5D6E-409C-BE32-E72D297353CC}">
+              <c16:uniqueId val="{00000000-6766-2341-B738-938B00578135}"/>
+            </c:ext>
+          </c:extLst>
         </c:ser>
         <c:dLbls>
-          <c:numFmt formatCode="#,##0" sourceLinked="0"/>
-          <c:txPr>
-            <a:bodyPr/>
-            <a:lstStyle/>
-            <a:p>
-              <a:pPr>
-                <a:defRPr b="0" i="0" strike="noStrike" sz="1000" u="none">
-                  <a:solidFill>
-                    <a:srgbClr val="2A2321"/>
-                  </a:solidFill>
-                  <a:latin typeface="Arial"/>
-                </a:defRPr>
-              </a:pPr>
-            </a:p>
-          </c:txPr>
           <c:showLegendKey val="0"/>
           <c:showVal val="1"/>
           <c:showCatName val="0"/>
           <c:showSerName val="0"/>
           <c:showPercent val="0"/>
           <c:showBubbleSize val="0"/>
-          <c:showLeaderLines val="0"/>
         </c:dLbls>
         <c:gapWidth val="35"/>
-        <c:overlap val="0"/>
         <c:axId val="2094734554"/>
         <c:axId val="2094734552"/>
-        <c:axId val="2094734556"/>
       </c:barChart>
       <c:catAx>
         <c:axId val="2094734554"/>
@@ -308,6 +313,7 @@
         <c:crosses val="autoZero"/>
         <c:auto val="1"/>
         <c:lblAlgn val="ctr"/>
+        <c:lblOffset val="100"/>
         <c:noMultiLvlLbl val="1"/>
       </c:catAx>
       <c:valAx>
@@ -321,30 +327,6 @@
         <c:majorTickMark val="out"/>
         <c:minorTickMark val="none"/>
         <c:tickLblPos val="low"/>
-        <c:spPr>
-          <a:ln w="12700" cap="flat">
-            <a:solidFill>
-              <a:srgbClr val="888888"/>
-            </a:solidFill>
-            <a:prstDash val="solid"/>
-            <a:round/>
-          </a:ln>
-        </c:spPr>
-        <c:txPr>
-          <a:bodyPr/>
-          <a:lstStyle/>
-          <a:p>
-            <a:pPr>
-              <a:defRPr sz="1200" b="0" i="0" u="none" strike="noStrike">
-                <a:solidFill>
-                  <a:srgbClr val="000000"/>
-                </a:solidFill>
-                <a:latin typeface="Arial"/>
-              </a:defRPr>
-            </a:pPr>
-            <a:endParaRPr lang="en-US"/>
-          </a:p>
-        </c:txPr>
         <c:crossAx val="2094734554"/>
         <c:crosses val="autoZero"/>
         <c:crossBetween val="between"/>
@@ -361,6 +343,7 @@
     </c:plotArea>
     <c:plotVisOnly val="1"/>
     <c:dispBlanksAs val="span"/>
+    <c:showDLblsOverMax val="1"/>
   </c:chart>
   <c:spPr>
     <a:noFill/>
@@ -376,9 +359,11 @@
 </file>
 
 <file path=ppt/charts/chart2.xml><?xml version="1.0" encoding="utf-8"?>
-<c:chartSpace xmlns:c="http://schemas.openxmlformats.org/drawingml/2006/chart" xmlns:a="http://schemas.openxmlformats.org/drawingml/2006/main" xmlns:r="http://schemas.openxmlformats.org/officeDocument/2006/relationships">
+<c:chartSpace xmlns:c="http://schemas.openxmlformats.org/drawingml/2006/chart" xmlns:a="http://schemas.openxmlformats.org/drawingml/2006/main" xmlns:r="http://schemas.openxmlformats.org/officeDocument/2006/relationships" xmlns:c16r2="http://schemas.microsoft.com/office/drawing/2015/06/chart">
   <c:date1904 val="0"/>
+  <c:lang val="en-US"/>
   <c:roundedCorners val="1"/>
+  <c:style val="2"/>
   <c:chart>
     <c:autoTitleDeleted val="1"/>
     <c:plotArea>
@@ -410,18 +395,26 @@
           <c:invertIfNegative val="0"/>
           <c:dLbls>
             <c:numFmt formatCode="#,##0" sourceLinked="0"/>
+            <c:spPr>
+              <a:noFill/>
+              <a:ln>
+                <a:noFill/>
+              </a:ln>
+              <a:effectLst/>
+            </c:spPr>
             <c:txPr>
               <a:bodyPr/>
               <a:lstStyle/>
               <a:p>
                 <a:pPr>
-                  <a:defRPr b="0" i="0" strike="noStrike" sz="1000" u="none">
+                  <a:defRPr sz="1000" b="0" i="0" u="none" strike="noStrike">
                     <a:solidFill>
                       <a:srgbClr val="2A2321"/>
                     </a:solidFill>
                     <a:latin typeface="Arial"/>
                   </a:defRPr>
                 </a:pPr>
+                <a:endParaRPr lang="en-US"/>
               </a:p>
             </c:txPr>
             <c:showLegendKey val="0"/>
@@ -431,37 +424,40 @@
             <c:showPercent val="0"/>
             <c:showBubbleSize val="0"/>
             <c:showLeaderLines val="0"/>
+            <c:extLst>
+              <c:ext xmlns:c15="http://schemas.microsoft.com/office/drawing/2012/chart" uri="{CE6537A1-D6FC-4f65-9D91-7224C49458BB}">
+                <c15:showLeaderLines val="0"/>
+              </c:ext>
+            </c:extLst>
           </c:dLbls>
           <c:cat>
-            <c:multiLvlStrRef>
+            <c:strRef>
               <c:f>Sheet1!$A$2:$A$8</c:f>
-              <c:multiLvlStrCache>
+              <c:strCache>
                 <c:ptCount val="7"/>
-                <c:lvl>
-                  <c:pt idx="0">
-                    <c:v>Features</c:v>
-                  </c:pt>
-                  <c:pt idx="1">
-                    <c:v>Testing</c:v>
-                  </c:pt>
-                  <c:pt idx="2">
-                    <c:v>Deploy</c:v>
-                  </c:pt>
-                  <c:pt idx="3">
-                    <c:v>Docs</c:v>
-                  </c:pt>
-                  <c:pt idx="4">
-                    <c:v>Weekly Prog.</c:v>
-                  </c:pt>
-                  <c:pt idx="5">
-                    <c:v>Final Pres.</c:v>
-                  </c:pt>
-                  <c:pt idx="6">
-                    <c:v>Peer Rev.</c:v>
-                  </c:pt>
-                </c:lvl>
-              </c:multiLvlStrCache>
-            </c:multiLvlStrRef>
+                <c:pt idx="0">
+                  <c:v>Features</c:v>
+                </c:pt>
+                <c:pt idx="1">
+                  <c:v>Testing</c:v>
+                </c:pt>
+                <c:pt idx="2">
+                  <c:v>Deploy</c:v>
+                </c:pt>
+                <c:pt idx="3">
+                  <c:v>Docs</c:v>
+                </c:pt>
+                <c:pt idx="4">
+                  <c:v>Weekly Prog.</c:v>
+                </c:pt>
+                <c:pt idx="5">
+                  <c:v>Final Pres.</c:v>
+                </c:pt>
+                <c:pt idx="6">
+                  <c:v>Peer Rev.</c:v>
+                </c:pt>
+              </c:strCache>
+            </c:strRef>
           </c:cat>
           <c:val>
             <c:numRef>
@@ -493,36 +489,23 @@
               </c:numCache>
             </c:numRef>
           </c:val>
+          <c:extLst>
+            <c:ext xmlns:c16="http://schemas.microsoft.com/office/drawing/2014/chart" uri="{C3380CC4-5D6E-409C-BE32-E72D297353CC}">
+              <c16:uniqueId val="{00000000-17B8-114D-AE68-0711A2C92833}"/>
+            </c:ext>
+          </c:extLst>
         </c:ser>
         <c:dLbls>
-          <c:numFmt formatCode="#,##0" sourceLinked="0"/>
-          <c:txPr>
-            <a:bodyPr/>
-            <a:lstStyle/>
-            <a:p>
-              <a:pPr>
-                <a:defRPr b="0" i="0" strike="noStrike" sz="1000" u="none">
-                  <a:solidFill>
-                    <a:srgbClr val="2A2321"/>
-                  </a:solidFill>
-                  <a:latin typeface="Arial"/>
-                </a:defRPr>
-              </a:pPr>
-            </a:p>
-          </c:txPr>
           <c:showLegendKey val="0"/>
           <c:showVal val="1"/>
           <c:showCatName val="0"/>
           <c:showSerName val="0"/>
           <c:showPercent val="0"/>
           <c:showBubbleSize val="0"/>
-          <c:showLeaderLines val="0"/>
         </c:dLbls>
         <c:gapWidth val="35"/>
-        <c:overlap val="0"/>
         <c:axId val="2094734554"/>
         <c:axId val="2094734552"/>
-        <c:axId val="2094734556"/>
       </c:barChart>
       <c:catAx>
         <c:axId val="2094734554"/>
@@ -563,6 +546,7 @@
         <c:crosses val="autoZero"/>
         <c:auto val="1"/>
         <c:lblAlgn val="ctr"/>
+        <c:lblOffset val="100"/>
         <c:noMultiLvlLbl val="1"/>
       </c:catAx>
       <c:valAx>
@@ -576,30 +560,6 @@
         <c:majorTickMark val="out"/>
         <c:minorTickMark val="none"/>
         <c:tickLblPos val="low"/>
-        <c:spPr>
-          <a:ln w="12700" cap="flat">
-            <a:solidFill>
-              <a:srgbClr val="888888"/>
-            </a:solidFill>
-            <a:prstDash val="solid"/>
-            <a:round/>
-          </a:ln>
-        </c:spPr>
-        <c:txPr>
-          <a:bodyPr/>
-          <a:lstStyle/>
-          <a:p>
-            <a:pPr>
-              <a:defRPr sz="1200" b="0" i="0" u="none" strike="noStrike">
-                <a:solidFill>
-                  <a:srgbClr val="000000"/>
-                </a:solidFill>
-                <a:latin typeface="Arial"/>
-              </a:defRPr>
-            </a:pPr>
-            <a:endParaRPr lang="en-US"/>
-          </a:p>
-        </c:txPr>
         <c:crossAx val="2094734554"/>
         <c:crosses val="autoZero"/>
         <c:crossBetween val="between"/>
@@ -616,6 +576,7 @@
     </c:plotArea>
     <c:plotVisOnly val="1"/>
     <c:dispBlanksAs val="span"/>
+    <c:showDLblsOverMax val="1"/>
   </c:chart>
   <c:spPr>
     <a:noFill/>
@@ -652,234 +613,10 @@
           <a:chExt cx="0" cy="0"/>
         </a:xfrm>
       </p:grpSpPr>
-      <p:sp>
-        <p:nvSpPr>
-          <p:cNvPr id="2" name="Header Placeholder 1"/>
-          <p:cNvSpPr>
-            <a:spLocks noGrp="1"/>
-          </p:cNvSpPr>
-          <p:nvPr>
-            <p:ph type="hdr" sz="quarter"/>
-          </p:nvPr>
-        </p:nvSpPr>
-        <p:spPr>
-          <a:xfrm>
-            <a:off x="0" y="0"/>
-            <a:ext cx="2971800" cy="458788"/>
-          </a:xfrm>
-          <a:prstGeom prst="rect">
-            <a:avLst/>
-          </a:prstGeom>
-        </p:spPr>
-        <p:txBody>
-          <a:bodyPr vert="horz" lIns="91440" tIns="45720" rIns="91440" bIns="45720" rtlCol="0"/>
-          <a:lstStyle>
-            <a:lvl1pPr algn="l">
-              <a:defRPr sz="1200"/>
-            </a:lvl1pPr>
-          </a:lstStyle>
-          <a:p>
-            <a:endParaRPr lang="en-US"/>
-          </a:p>
-        </p:txBody>
-      </p:sp>
-      <p:sp>
-        <p:nvSpPr>
-          <p:cNvPr id="3" name="Date Placeholder 2"/>
-          <p:cNvSpPr>
-            <a:spLocks noGrp="1"/>
-          </p:cNvSpPr>
-          <p:nvPr>
-            <p:ph type="dt" idx="1"/>
-          </p:nvPr>
-        </p:nvSpPr>
-        <p:spPr>
-          <a:xfrm>
-            <a:off x="3884613" y="0"/>
-            <a:ext cx="2971800" cy="458788"/>
-          </a:xfrm>
-          <a:prstGeom prst="rect">
-            <a:avLst/>
-          </a:prstGeom>
-        </p:spPr>
-        <p:txBody>
-          <a:bodyPr vert="horz" lIns="91440" tIns="45720" rIns="91440" bIns="45720" rtlCol="0"/>
-          <a:lstStyle>
-            <a:lvl1pPr algn="r">
-              <a:defRPr sz="1200"/>
-            </a:lvl1pPr>
-          </a:lstStyle>
-          <a:p>
-            <a:fld id="{5282F153-3F37-0F45-9E97-73ACFA13230C}" type="datetimeFigureOut">
-              <a:rPr lang="en-US"/>
-              <a:t>7/23/19</a:t>
-            </a:fld>
-            <a:endParaRPr lang="en-US"/>
-          </a:p>
-        </p:txBody>
-      </p:sp>
-      <p:sp>
-        <p:nvSpPr>
-          <p:cNvPr id="4" name="Slide Image Placeholder 3"/>
-          <p:cNvSpPr>
-            <a:spLocks noGrp="1" noRot="1" noChangeAspect="1"/>
-          </p:cNvSpPr>
-          <p:nvPr>
-            <p:ph type="sldImg" idx="2"/>
-          </p:nvPr>
-        </p:nvSpPr>
-        <p:spPr>
-          <a:xfrm>
-            <a:off x="685800" y="1143000"/>
-            <a:ext cx="5486400" cy="3086100"/>
-          </a:xfrm>
-          <a:prstGeom prst="rect">
-            <a:avLst/>
-          </a:prstGeom>
-          <a:noFill/>
-          <a:ln w="12700">
-            <a:solidFill>
-              <a:prstClr val="black"/>
-            </a:solidFill>
-          </a:ln>
-        </p:spPr>
-        <p:txBody>
-          <a:bodyPr vert="horz" lIns="91440" tIns="45720" rIns="91440" bIns="45720" rtlCol="0" anchor="ctr"/>
-          <a:lstStyle/>
-          <a:p>
-            <a:endParaRPr lang="en-US"/>
-          </a:p>
-        </p:txBody>
-      </p:sp>
-      <p:sp>
-        <p:nvSpPr>
-          <p:cNvPr id="5" name="Notes Placeholder 4"/>
-          <p:cNvSpPr>
-            <a:spLocks noGrp="1"/>
-          </p:cNvSpPr>
-          <p:nvPr>
-            <p:ph type="body" sz="quarter" idx="3"/>
-          </p:nvPr>
-        </p:nvSpPr>
-        <p:spPr>
-          <a:xfrm>
-            <a:off x="685800" y="4400550"/>
-            <a:ext cx="5486400" cy="3600450"/>
-          </a:xfrm>
-          <a:prstGeom prst="rect">
-            <a:avLst/>
-          </a:prstGeom>
-        </p:spPr>
-        <p:txBody>
-          <a:bodyPr vert="horz" lIns="91440" tIns="45720" rIns="91440" bIns="45720" rtlCol="0"/>
-          <a:lstStyle/>
-          <a:p>
-            <a:pPr lvl="0"/>
-            <a:r>
-              <a:rPr lang="en-US"/>
-              <a:t>Click to edit Master text styles</a:t>
-            </a:r>
-          </a:p>
-          <a:p>
-            <a:pPr lvl="1"/>
-            <a:r>
-              <a:rPr lang="en-US"/>
-              <a:t>Second level</a:t>
-            </a:r>
-          </a:p>
-          <a:p>
-            <a:pPr lvl="2"/>
-            <a:r>
-              <a:rPr lang="en-US"/>
-              <a:t>Third level</a:t>
-            </a:r>
-          </a:p>
-          <a:p>
-            <a:pPr lvl="3"/>
-            <a:r>
-              <a:rPr lang="en-US"/>
-              <a:t>Fourth level</a:t>
-            </a:r>
-          </a:p>
-          <a:p>
-            <a:pPr lvl="4"/>
-            <a:r>
-              <a:rPr lang="en-US"/>
-              <a:t>Fifth level</a:t>
-            </a:r>
-          </a:p>
-        </p:txBody>
-      </p:sp>
-      <p:sp>
-        <p:nvSpPr>
-          <p:cNvPr id="6" name="Footer Placeholder 5"/>
-          <p:cNvSpPr>
-            <a:spLocks noGrp="1"/>
-          </p:cNvSpPr>
-          <p:nvPr>
-            <p:ph type="ftr" sz="quarter" idx="4"/>
-          </p:nvPr>
-        </p:nvSpPr>
-        <p:spPr>
-          <a:xfrm>
-            <a:off x="0" y="8685213"/>
-            <a:ext cx="2971800" cy="458787"/>
-          </a:xfrm>
-          <a:prstGeom prst="rect">
-            <a:avLst/>
-          </a:prstGeom>
-        </p:spPr>
-        <p:txBody>
-          <a:bodyPr vert="horz" lIns="91440" tIns="45720" rIns="91440" bIns="45720" rtlCol="0" anchor="b"/>
-          <a:lstStyle>
-            <a:lvl1pPr algn="l">
-              <a:defRPr sz="1200"/>
-            </a:lvl1pPr>
-          </a:lstStyle>
-          <a:p>
-            <a:endParaRPr lang="en-US"/>
-          </a:p>
-        </p:txBody>
-      </p:sp>
-      <p:sp>
-        <p:nvSpPr>
-          <p:cNvPr id="7" name="Slide Number Placeholder 6"/>
-          <p:cNvSpPr>
-            <a:spLocks noGrp="1"/>
-          </p:cNvSpPr>
-          <p:nvPr>
-            <p:ph type="sldNum" sz="quarter" idx="5"/>
-          </p:nvPr>
-        </p:nvSpPr>
-        <p:spPr>
-          <a:xfrm>
-            <a:off x="3884613" y="8685213"/>
-            <a:ext cx="2971800" cy="458787"/>
-          </a:xfrm>
-          <a:prstGeom prst="rect">
-            <a:avLst/>
-          </a:prstGeom>
-        </p:spPr>
-        <p:txBody>
-          <a:bodyPr vert="horz" lIns="91440" tIns="45720" rIns="91440" bIns="45720" rtlCol="0" anchor="b"/>
-          <a:lstStyle>
-            <a:lvl1pPr algn="r">
-              <a:defRPr sz="1200"/>
-            </a:lvl1pPr>
-          </a:lstStyle>
-          <a:p>
-            <a:fld id="{CE5E9CC1-C706-0F49-92D6-E571CC5EEA8F}" type="slidenum">
-              <a:rPr lang="en-US"/>
-              <a:t>‹#›</a:t>
-            </a:fld>
-            <a:endParaRPr lang="en-US"/>
-          </a:p>
-        </p:txBody>
-      </p:sp>
     </p:spTree>
     <p:extLst>
       <p:ext uri="{BB962C8B-B14F-4D97-AF65-F5344CB8AC3E}">
-        <p14:creationId xmlns:p14="http://schemas.microsoft.com/office/powerpoint/2010/main" val="1024086991"/>
+        <p14:creationId xmlns:p14="http://schemas.microsoft.com/office/powerpoint/2010/main" val="1524791864"/>
       </p:ext>
     </p:extLst>
   </p:cSld>
@@ -1023,10 +760,6 @@
           <a:bodyPr/>
           <a:lstStyle/>
           <a:p>
-            <a:r>
-              <a:rPr lang="en-US" dirty="0"/>
-              <a:t/>
-            </a:r>
             <a:endParaRPr lang="en-US" dirty="0"/>
           </a:p>
         </p:txBody>
@@ -1111,10 +844,6 @@
           <a:bodyPr/>
           <a:lstStyle/>
           <a:p>
-            <a:r>
-              <a:rPr lang="en-US" dirty="0"/>
-              <a:t/>
-            </a:r>
             <a:endParaRPr lang="en-US" dirty="0"/>
           </a:p>
         </p:txBody>
@@ -1199,10 +928,6 @@
           <a:bodyPr/>
           <a:lstStyle/>
           <a:p>
-            <a:r>
-              <a:rPr lang="en-US" dirty="0"/>
-              <a:t/>
-            </a:r>
             <a:endParaRPr lang="en-US" dirty="0"/>
           </a:p>
         </p:txBody>
@@ -1287,10 +1012,6 @@
           <a:bodyPr/>
           <a:lstStyle/>
           <a:p>
-            <a:r>
-              <a:rPr lang="en-US" dirty="0"/>
-              <a:t/>
-            </a:r>
             <a:endParaRPr lang="en-US" dirty="0"/>
           </a:p>
         </p:txBody>
@@ -1375,10 +1096,6 @@
           <a:bodyPr/>
           <a:lstStyle/>
           <a:p>
-            <a:r>
-              <a:rPr lang="en-US" dirty="0"/>
-              <a:t/>
-            </a:r>
             <a:endParaRPr lang="en-US" dirty="0"/>
           </a:p>
         </p:txBody>
@@ -1463,10 +1180,6 @@
           <a:bodyPr/>
           <a:lstStyle/>
           <a:p>
-            <a:r>
-              <a:rPr lang="en-US" dirty="0"/>
-              <a:t/>
-            </a:r>
             <a:endParaRPr lang="en-US" dirty="0"/>
           </a:p>
         </p:txBody>
@@ -1551,10 +1264,6 @@
           <a:bodyPr/>
           <a:lstStyle/>
           <a:p>
-            <a:r>
-              <a:rPr lang="en-US" dirty="0"/>
-              <a:t/>
-            </a:r>
             <a:endParaRPr lang="en-US" dirty="0"/>
           </a:p>
         </p:txBody>
@@ -1639,10 +1348,6 @@
           <a:bodyPr/>
           <a:lstStyle/>
           <a:p>
-            <a:r>
-              <a:rPr lang="en-US" dirty="0"/>
-              <a:t/>
-            </a:r>
             <a:endParaRPr lang="en-US" dirty="0"/>
           </a:p>
         </p:txBody>
@@ -1727,10 +1432,6 @@
           <a:bodyPr/>
           <a:lstStyle/>
           <a:p>
-            <a:r>
-              <a:rPr lang="en-US" dirty="0"/>
-              <a:t/>
-            </a:r>
             <a:endParaRPr lang="en-US" dirty="0"/>
           </a:p>
         </p:txBody>
@@ -1815,10 +1516,6 @@
           <a:bodyPr/>
           <a:lstStyle/>
           <a:p>
-            <a:r>
-              <a:rPr lang="en-US" dirty="0"/>
-              <a:t/>
-            </a:r>
             <a:endParaRPr lang="en-US" dirty="0"/>
           </a:p>
         </p:txBody>
@@ -1903,10 +1600,6 @@
           <a:bodyPr/>
           <a:lstStyle/>
           <a:p>
-            <a:r>
-              <a:rPr lang="en-US" dirty="0"/>
-              <a:t/>
-            </a:r>
             <a:endParaRPr lang="en-US" dirty="0"/>
           </a:p>
         </p:txBody>
@@ -1991,10 +1684,6 @@
           <a:bodyPr/>
           <a:lstStyle/>
           <a:p>
-            <a:r>
-              <a:rPr lang="en-US" dirty="0"/>
-              <a:t/>
-            </a:r>
             <a:endParaRPr lang="en-US" dirty="0"/>
           </a:p>
         </p:txBody>
@@ -2079,10 +1768,6 @@
           <a:bodyPr/>
           <a:lstStyle/>
           <a:p>
-            <a:r>
-              <a:rPr lang="en-US" dirty="0"/>
-              <a:t/>
-            </a:r>
             <a:endParaRPr lang="en-US" dirty="0"/>
           </a:p>
         </p:txBody>
@@ -2167,10 +1852,6 @@
           <a:bodyPr/>
           <a:lstStyle/>
           <a:p>
-            <a:r>
-              <a:rPr lang="en-US" dirty="0"/>
-              <a:t/>
-            </a:r>
             <a:endParaRPr lang="en-US" dirty="0"/>
           </a:p>
         </p:txBody>
@@ -2244,6 +1925,11 @@
 <file path=ppt/slideMasters/slideMaster1.xml><?xml version="1.0" encoding="utf-8"?>
 <p:sldMaster xmlns:a="http://schemas.openxmlformats.org/drawingml/2006/main" xmlns:r="http://schemas.openxmlformats.org/officeDocument/2006/relationships" xmlns:p="http://schemas.openxmlformats.org/presentationml/2006/main">
   <p:cSld>
+    <p:bg>
+      <p:bgRef idx="1001">
+        <a:schemeClr val="bg1"/>
+      </p:bgRef>
+    </p:bg>
     <p:spTree>
       <p:nvGrpSpPr>
         <p:cNvPr id="1" name=""/>
@@ -2526,6 +2212,7 @@
         <a:solidFill>
           <a:srgbClr val="791716"/>
         </a:solidFill>
+        <a:effectLst/>
       </p:bgPr>
     </p:bg>
     <p:spTree>
@@ -2561,6 +2248,13 @@
           </a:solidFill>
           <a:ln/>
         </p:spPr>
+        <p:txBody>
+          <a:bodyPr/>
+          <a:lstStyle/>
+          <a:p>
+            <a:endParaRPr lang="en-US"/>
+          </a:p>
+        </p:txBody>
       </p:sp>
       <p:sp>
         <p:nvSpPr>
@@ -2583,6 +2277,13 @@
             <a:prstDash val="solid"/>
           </a:ln>
         </p:spPr>
+        <p:txBody>
+          <a:bodyPr/>
+          <a:lstStyle/>
+          <a:p>
+            <a:endParaRPr lang="en-US"/>
+          </a:p>
+        </p:txBody>
       </p:sp>
       <p:sp>
         <p:nvSpPr>
@@ -2605,6 +2306,13 @@
             <a:prstDash val="solid"/>
           </a:ln>
         </p:spPr>
+        <p:txBody>
+          <a:bodyPr/>
+          <a:lstStyle/>
+          <a:p>
+            <a:endParaRPr lang="en-US"/>
+          </a:p>
+        </p:txBody>
       </p:sp>
       <p:sp>
         <p:nvSpPr>
@@ -2627,11 +2335,11 @@
           <a:bodyPr wrap="square" rtlCol="0" anchor="ctr"/>
           <a:lstStyle/>
           <a:p>
-            <a:pPr indent="0" marL="0">
-              <a:buNone/>
-            </a:pPr>
-            <a:r>
-              <a:rPr lang="en-US" sz="1400" b="1" spc="300" kern="0" dirty="0">
+            <a:pPr marL="0" indent="0">
+              <a:buNone/>
+            </a:pPr>
+            <a:r>
+              <a:rPr lang="en-US" sz="1400" b="1" kern="0" spc="300" dirty="0">
                 <a:solidFill>
                   <a:srgbClr val="C0AC7E"/>
                 </a:solidFill>
@@ -2666,7 +2374,7 @@
           <a:bodyPr wrap="square" rtlCol="0" anchor="ctr"/>
           <a:lstStyle/>
           <a:p>
-            <a:pPr indent="0" marL="0">
+            <a:pPr marL="0" indent="0">
               <a:lnSpc>
                 <a:spcPts val="5600"/>
               </a:lnSpc>
@@ -2686,7 +2394,7 @@
             <a:endParaRPr lang="en-US" sz="5400" dirty="0"/>
           </a:p>
           <a:p>
-            <a:pPr indent="0" marL="0">
+            <a:pPr marL="0" indent="0">
               <a:lnSpc>
                 <a:spcPts val="5600"/>
               </a:lnSpc>
@@ -2728,7 +2436,7 @@
           <a:bodyPr wrap="square" rtlCol="0" anchor="ctr"/>
           <a:lstStyle/>
           <a:p>
-            <a:pPr indent="0" marL="0">
+            <a:pPr marL="0" indent="0">
               <a:buNone/>
             </a:pPr>
             <a:r>
@@ -2768,6 +2476,13 @@
             <a:prstDash val="solid"/>
           </a:ln>
         </p:spPr>
+        <p:txBody>
+          <a:bodyPr/>
+          <a:lstStyle/>
+          <a:p>
+            <a:endParaRPr lang="en-US"/>
+          </a:p>
+        </p:txBody>
       </p:sp>
       <p:sp>
         <p:nvSpPr>
@@ -2790,7 +2505,7 @@
           <a:bodyPr wrap="square" rtlCol="0" anchor="ctr"/>
           <a:lstStyle/>
           <a:p>
-            <a:pPr indent="0" marL="0">
+            <a:pPr marL="0" indent="0">
               <a:lnSpc>
                 <a:spcPct val="130000"/>
               </a:lnSpc>
@@ -2810,7 +2525,7 @@
             <a:endParaRPr lang="en-US" sz="1300" dirty="0"/>
           </a:p>
           <a:p>
-            <a:pPr indent="0" marL="0">
+            <a:pPr marL="0" indent="0">
               <a:lnSpc>
                 <a:spcPct val="130000"/>
               </a:lnSpc>
@@ -2830,7 +2545,7 @@
             <a:endParaRPr lang="en-US" sz="1300" dirty="0"/>
           </a:p>
           <a:p>
-            <a:pPr indent="0" marL="0">
+            <a:pPr marL="0" indent="0">
               <a:lnSpc>
                 <a:spcPct val="130000"/>
               </a:lnSpc>
@@ -2872,7 +2587,7 @@
           <a:bodyPr wrap="square" rtlCol="0" anchor="ctr"/>
           <a:lstStyle/>
           <a:p>
-            <a:pPr indent="0" marL="0">
+            <a:pPr marL="0" indent="0">
               <a:buNone/>
             </a:pPr>
             <a:r>
@@ -2911,7 +2626,7 @@
           <a:bodyPr wrap="square" rtlCol="0" anchor="ctr"/>
           <a:lstStyle/>
           <a:p>
-            <a:pPr algn="r" indent="0" marL="0">
+            <a:pPr marL="0" indent="0" algn="r">
               <a:buNone/>
             </a:pPr>
             <a:r>
@@ -2945,6 +2660,7 @@
         <a:solidFill>
           <a:srgbClr val="FFFFFF"/>
         </a:solidFill>
+        <a:effectLst/>
       </p:bgPr>
     </p:bg>
     <p:spTree>
@@ -2982,7 +2698,7 @@
           <a:bodyPr wrap="square" rtlCol="0" anchor="ctr"/>
           <a:lstStyle/>
           <a:p>
-            <a:pPr indent="0" marL="0">
+            <a:pPr marL="0" indent="0">
               <a:buNone/>
             </a:pPr>
             <a:r>
@@ -3021,7 +2737,7 @@
           <a:bodyPr wrap="square" rtlCol="0" anchor="ctr"/>
           <a:lstStyle/>
           <a:p>
-            <a:pPr indent="0" marL="0">
+            <a:pPr marL="0" indent="0">
               <a:buNone/>
             </a:pPr>
             <a:r>
@@ -3060,7 +2776,7 @@
           <a:bodyPr wrap="square" rtlCol="0" anchor="ctr"/>
           <a:lstStyle/>
           <a:p>
-            <a:pPr indent="0" marL="0">
+            <a:pPr marL="0" indent="0">
               <a:buNone/>
             </a:pPr>
             <a:r>
@@ -3080,7 +2796,7 @@
       </p:sp>
       <p:graphicFrame>
         <p:nvGraphicFramePr>
-          <p:cNvPr id="5" name="Chart 0" descr=""/>
+          <p:cNvPr id="5" name="Chart 0"/>
           <p:cNvGraphicFramePr/>
           <p:nvPr/>
         </p:nvGraphicFramePr>
@@ -3088,9 +2804,9 @@
           <a:off x="365760" y="1874520"/>
           <a:ext cx="5669280" cy="4480560"/>
         </p:xfrm>
-        <a:graphic xmlns:a="http://schemas.openxmlformats.org/drawingml/2006/main">
+        <a:graphic>
           <a:graphicData uri="http://schemas.openxmlformats.org/drawingml/2006/chart">
-            <c:chart xmlns:c="http://schemas.openxmlformats.org/drawingml/2006/chart" r:id="rId1"/>
+            <c:chart xmlns:c="http://schemas.openxmlformats.org/drawingml/2006/chart" xmlns:r="http://schemas.openxmlformats.org/officeDocument/2006/relationships" r:id="rId3"/>
           </a:graphicData>
         </a:graphic>
       </p:graphicFrame>
@@ -3115,7 +2831,7 @@
           <a:bodyPr wrap="square" rtlCol="0" anchor="ctr"/>
           <a:lstStyle/>
           <a:p>
-            <a:pPr indent="0" marL="0">
+            <a:pPr marL="0" indent="0">
               <a:buNone/>
             </a:pPr>
             <a:r>
@@ -3135,7 +2851,7 @@
       </p:sp>
       <p:graphicFrame>
         <p:nvGraphicFramePr>
-          <p:cNvPr id="7" name="Chart 1" descr=""/>
+          <p:cNvPr id="7" name="Chart 1"/>
           <p:cNvGraphicFramePr/>
           <p:nvPr/>
         </p:nvGraphicFramePr>
@@ -3143,9 +2859,9 @@
           <a:off x="6126480" y="1874520"/>
           <a:ext cx="5669280" cy="4480560"/>
         </p:xfrm>
-        <a:graphic xmlns:a="http://schemas.openxmlformats.org/drawingml/2006/main">
+        <a:graphic>
           <a:graphicData uri="http://schemas.openxmlformats.org/drawingml/2006/chart">
-            <c:chart xmlns:c="http://schemas.openxmlformats.org/drawingml/2006/chart" r:id="rId2"/>
+            <c:chart xmlns:c="http://schemas.openxmlformats.org/drawingml/2006/chart" xmlns:r="http://schemas.openxmlformats.org/officeDocument/2006/relationships" r:id="rId4"/>
           </a:graphicData>
         </a:graphic>
       </p:graphicFrame>
@@ -3170,7 +2886,7 @@
           <a:bodyPr wrap="square" rtlCol="0" anchor="ctr"/>
           <a:lstStyle/>
           <a:p>
-            <a:pPr indent="0" marL="0">
+            <a:pPr marL="0" indent="0">
               <a:buNone/>
             </a:pPr>
             <a:r>
@@ -3209,7 +2925,7 @@
           <a:bodyPr wrap="square" rtlCol="0" anchor="ctr"/>
           <a:lstStyle/>
           <a:p>
-            <a:pPr algn="r" indent="0" marL="0">
+            <a:pPr marL="0" indent="0" algn="r">
               <a:buNone/>
             </a:pPr>
             <a:r>
@@ -3243,6 +2959,7 @@
         <a:solidFill>
           <a:srgbClr val="E4D9BE"/>
         </a:solidFill>
+        <a:effectLst/>
       </p:bgPr>
     </p:bg>
     <p:spTree>
@@ -3280,7 +2997,7 @@
           <a:bodyPr wrap="square" rtlCol="0" anchor="ctr"/>
           <a:lstStyle/>
           <a:p>
-            <a:pPr indent="0" marL="0">
+            <a:pPr marL="0" indent="0">
               <a:buNone/>
             </a:pPr>
             <a:r>
@@ -3319,7 +3036,7 @@
           <a:bodyPr wrap="square" rtlCol="0" anchor="ctr"/>
           <a:lstStyle/>
           <a:p>
-            <a:pPr indent="0" marL="0">
+            <a:pPr marL="0" indent="0">
               <a:buNone/>
             </a:pPr>
             <a:r>
@@ -3358,7 +3075,7 @@
           <a:bodyPr wrap="square" rtlCol="0" anchor="ctr"/>
           <a:lstStyle/>
           <a:p>
-            <a:pPr indent="0" marL="0">
+            <a:pPr marL="0" indent="0">
               <a:buNone/>
             </a:pPr>
             <a:r>
@@ -3370,7 +3087,7 @@
                 <a:ea typeface="Calibri" pitchFamily="34" charset="-122"/>
                 <a:cs typeface="Calibri" pitchFamily="34" charset="-120"/>
               </a:rPr>
-              <a:t>You'll review two classmates' projects across both semesters — same partners throughout, real critical-evaluation practice.</a:t>
+              <a:t>You'll review one classmates' projects across both semesters — same partners throughout, real critical-evaluation practice.</a:t>
             </a:r>
             <a:endParaRPr lang="en-US" sz="1300" dirty="0"/>
           </a:p>
@@ -3395,17 +3112,24 @@
           </a:solidFill>
           <a:ln/>
         </p:spPr>
+        <p:txBody>
+          <a:bodyPr/>
+          <a:lstStyle/>
+          <a:p>
+            <a:endParaRPr lang="en-US"/>
+          </a:p>
+        </p:txBody>
       </p:sp>
       <p:pic>
         <p:nvPicPr>
-          <p:cNvPr id="6" name="Image 0" descr="icon_repeat.png">    </p:cNvPr>
+          <p:cNvPr id="6" name="Image 0" descr="icon_repeat.png"/>
           <p:cNvPicPr>
             <a:picLocks noChangeAspect="1"/>
           </p:cNvPicPr>
           <p:nvPr/>
         </p:nvPicPr>
         <p:blipFill>
-          <a:blip r:embed="rId1"/>
+          <a:blip r:embed="rId3"/>
           <a:stretch>
             <a:fillRect/>
           </a:stretch>
@@ -3441,7 +3165,7 @@
           <a:bodyPr wrap="square" rtlCol="0" anchor="ctr"/>
           <a:lstStyle/>
           <a:p>
-            <a:pPr algn="ctr" indent="0" marL="0">
+            <a:pPr marL="0" indent="0" algn="ctr">
               <a:lnSpc>
                 <a:spcPct val="115000"/>
               </a:lnSpc>
@@ -3461,7 +3185,7 @@
             <a:endParaRPr lang="en-US" sz="1350" dirty="0"/>
           </a:p>
           <a:p>
-            <a:pPr algn="ctr" indent="0" marL="0">
+            <a:pPr marL="0" indent="0" algn="ctr">
               <a:lnSpc>
                 <a:spcPct val="115000"/>
               </a:lnSpc>
@@ -3503,6 +3227,13 @@
           </a:solidFill>
           <a:ln/>
         </p:spPr>
+        <p:txBody>
+          <a:bodyPr/>
+          <a:lstStyle/>
+          <a:p>
+            <a:endParaRPr lang="en-US"/>
+          </a:p>
+        </p:txBody>
       </p:sp>
       <p:sp>
         <p:nvSpPr>
@@ -3525,7 +3256,7 @@
           <a:bodyPr wrap="square" rtlCol="0" anchor="ctr"/>
           <a:lstStyle/>
           <a:p>
-            <a:pPr indent="0" marL="0">
+            <a:pPr marL="0" indent="0">
               <a:buNone/>
             </a:pPr>
             <a:r>
@@ -3564,6 +3295,13 @@
           </a:solidFill>
           <a:ln/>
         </p:spPr>
+        <p:txBody>
+          <a:bodyPr/>
+          <a:lstStyle/>
+          <a:p>
+            <a:endParaRPr lang="en-US"/>
+          </a:p>
+        </p:txBody>
       </p:sp>
       <p:sp>
         <p:nvSpPr>
@@ -3586,7 +3324,7 @@
           <a:bodyPr wrap="square" rtlCol="0" anchor="ctr"/>
           <a:lstStyle/>
           <a:p>
-            <a:pPr algn="ctr" indent="0" marL="0">
+            <a:pPr marL="0" indent="0" algn="ctr">
               <a:buNone/>
             </a:pPr>
             <a:r>
@@ -3625,7 +3363,7 @@
           <a:bodyPr wrap="square" rtlCol="0" anchor="ctr"/>
           <a:lstStyle/>
           <a:p>
-            <a:pPr indent="0" marL="0">
+            <a:pPr marL="0" indent="0">
               <a:buNone/>
             </a:pPr>
             <a:r>
@@ -3664,6 +3402,13 @@
           </a:solidFill>
           <a:ln/>
         </p:spPr>
+        <p:txBody>
+          <a:bodyPr/>
+          <a:lstStyle/>
+          <a:p>
+            <a:endParaRPr lang="en-US"/>
+          </a:p>
+        </p:txBody>
       </p:sp>
       <p:sp>
         <p:nvSpPr>
@@ -3686,7 +3431,7 @@
           <a:bodyPr wrap="square" rtlCol="0" anchor="ctr"/>
           <a:lstStyle/>
           <a:p>
-            <a:pPr algn="ctr" indent="0" marL="0">
+            <a:pPr marL="0" indent="0" algn="ctr">
               <a:buNone/>
             </a:pPr>
             <a:r>
@@ -3725,7 +3470,7 @@
           <a:bodyPr wrap="square" rtlCol="0" anchor="ctr"/>
           <a:lstStyle/>
           <a:p>
-            <a:pPr indent="0" marL="0">
+            <a:pPr marL="0" indent="0">
               <a:buNone/>
             </a:pPr>
             <a:r>
@@ -3764,6 +3509,13 @@
           </a:solidFill>
           <a:ln/>
         </p:spPr>
+        <p:txBody>
+          <a:bodyPr/>
+          <a:lstStyle/>
+          <a:p>
+            <a:endParaRPr lang="en-US"/>
+          </a:p>
+        </p:txBody>
       </p:sp>
       <p:sp>
         <p:nvSpPr>
@@ -3786,7 +3538,7 @@
           <a:bodyPr wrap="square" rtlCol="0" anchor="ctr"/>
           <a:lstStyle/>
           <a:p>
-            <a:pPr algn="ctr" indent="0" marL="0">
+            <a:pPr marL="0" indent="0" algn="ctr">
               <a:buNone/>
             </a:pPr>
             <a:r>
@@ -3825,7 +3577,7 @@
           <a:bodyPr wrap="square" rtlCol="0" anchor="ctr"/>
           <a:lstStyle/>
           <a:p>
-            <a:pPr indent="0" marL="0">
+            <a:pPr marL="0" indent="0">
               <a:buNone/>
             </a:pPr>
             <a:r>
@@ -3864,6 +3616,13 @@
           </a:solidFill>
           <a:ln/>
         </p:spPr>
+        <p:txBody>
+          <a:bodyPr/>
+          <a:lstStyle/>
+          <a:p>
+            <a:endParaRPr lang="en-US"/>
+          </a:p>
+        </p:txBody>
       </p:sp>
       <p:sp>
         <p:nvSpPr>
@@ -3886,7 +3645,7 @@
           <a:bodyPr wrap="square" rtlCol="0" anchor="ctr"/>
           <a:lstStyle/>
           <a:p>
-            <a:pPr algn="ctr" indent="0" marL="0">
+            <a:pPr marL="0" indent="0" algn="ctr">
               <a:buNone/>
             </a:pPr>
             <a:r>
@@ -3925,7 +3684,7 @@
           <a:bodyPr wrap="square" rtlCol="0" anchor="ctr"/>
           <a:lstStyle/>
           <a:p>
-            <a:pPr indent="0" marL="0">
+            <a:pPr marL="0" indent="0">
               <a:buNone/>
             </a:pPr>
             <a:r>
@@ -3964,6 +3723,13 @@
           </a:solidFill>
           <a:ln/>
         </p:spPr>
+        <p:txBody>
+          <a:bodyPr/>
+          <a:lstStyle/>
+          <a:p>
+            <a:endParaRPr lang="en-US"/>
+          </a:p>
+        </p:txBody>
       </p:sp>
       <p:sp>
         <p:nvSpPr>
@@ -3986,7 +3752,7 @@
           <a:bodyPr wrap="square" rtlCol="0" anchor="ctr"/>
           <a:lstStyle/>
           <a:p>
-            <a:pPr algn="ctr" indent="0" marL="0">
+            <a:pPr marL="0" indent="0" algn="ctr">
               <a:buNone/>
             </a:pPr>
             <a:r>
@@ -4025,7 +3791,7 @@
           <a:bodyPr wrap="square" rtlCol="0" anchor="ctr"/>
           <a:lstStyle/>
           <a:p>
-            <a:pPr indent="0" marL="0">
+            <a:pPr marL="0" indent="0">
               <a:buNone/>
             </a:pPr>
             <a:r>
@@ -4064,7 +3830,7 @@
           <a:bodyPr wrap="square" rtlCol="0" anchor="ctr"/>
           <a:lstStyle/>
           <a:p>
-            <a:pPr indent="0" marL="0">
+            <a:pPr marL="0" indent="0">
               <a:buNone/>
             </a:pPr>
             <a:r>
@@ -4103,7 +3869,7 @@
           <a:bodyPr wrap="square" rtlCol="0" anchor="ctr"/>
           <a:lstStyle/>
           <a:p>
-            <a:pPr algn="r" indent="0" marL="0">
+            <a:pPr marL="0" indent="0" algn="r">
               <a:buNone/>
             </a:pPr>
             <a:r>
@@ -4137,6 +3903,7 @@
         <a:solidFill>
           <a:srgbClr val="FFFFFF"/>
         </a:solidFill>
+        <a:effectLst/>
       </p:bgPr>
     </p:bg>
     <p:spTree>
@@ -4174,7 +3941,7 @@
           <a:bodyPr wrap="square" rtlCol="0" anchor="ctr"/>
           <a:lstStyle/>
           <a:p>
-            <a:pPr indent="0" marL="0">
+            <a:pPr marL="0" indent="0">
               <a:buNone/>
             </a:pPr>
             <a:r>
@@ -4213,7 +3980,7 @@
           <a:bodyPr wrap="square" rtlCol="0" anchor="ctr"/>
           <a:lstStyle/>
           <a:p>
-            <a:pPr indent="0" marL="0">
+            <a:pPr marL="0" indent="0">
               <a:buNone/>
             </a:pPr>
             <a:r>
@@ -4257,6 +4024,13 @@
             <a:prstDash val="solid"/>
           </a:ln>
         </p:spPr>
+        <p:txBody>
+          <a:bodyPr/>
+          <a:lstStyle/>
+          <a:p>
+            <a:endParaRPr lang="en-US"/>
+          </a:p>
+        </p:txBody>
       </p:sp>
       <p:sp>
         <p:nvSpPr>
@@ -4277,17 +4051,24 @@
           </a:solidFill>
           <a:ln/>
         </p:spPr>
+        <p:txBody>
+          <a:bodyPr/>
+          <a:lstStyle/>
+          <a:p>
+            <a:endParaRPr lang="en-US"/>
+          </a:p>
+        </p:txBody>
       </p:sp>
       <p:pic>
         <p:nvPicPr>
-          <p:cNvPr id="6" name="Image 0" descr="icon_clock.png">    </p:cNvPr>
+          <p:cNvPr id="6" name="Image 0" descr="icon_clock.png"/>
           <p:cNvPicPr>
             <a:picLocks noChangeAspect="1"/>
           </p:cNvPicPr>
           <p:nvPr/>
         </p:nvPicPr>
         <p:blipFill>
-          <a:blip r:embed="rId1"/>
+          <a:blip r:embed="rId3"/>
           <a:stretch>
             <a:fillRect/>
           </a:stretch>
@@ -4323,7 +4104,7 @@
           <a:bodyPr wrap="square" rtlCol="0" anchor="ctr"/>
           <a:lstStyle/>
           <a:p>
-            <a:pPr algn="ctr" indent="0" marL="0">
+            <a:pPr marL="0" indent="0" algn="ctr">
               <a:lnSpc>
                 <a:spcPct val="110000"/>
               </a:lnSpc>
@@ -4365,7 +4146,7 @@
           <a:bodyPr wrap="square" rtlCol="0" anchor="ctr"/>
           <a:lstStyle/>
           <a:p>
-            <a:pPr algn="ctr" indent="0" marL="0">
+            <a:pPr marL="0" indent="0" algn="ctr">
               <a:lnSpc>
                 <a:spcPct val="130000"/>
               </a:lnSpc>
@@ -4412,6 +4193,13 @@
             <a:prstDash val="solid"/>
           </a:ln>
         </p:spPr>
+        <p:txBody>
+          <a:bodyPr/>
+          <a:lstStyle/>
+          <a:p>
+            <a:endParaRPr lang="en-US"/>
+          </a:p>
+        </p:txBody>
       </p:sp>
       <p:sp>
         <p:nvSpPr>
@@ -4432,17 +4220,24 @@
           </a:solidFill>
           <a:ln/>
         </p:spPr>
+        <p:txBody>
+          <a:bodyPr/>
+          <a:lstStyle/>
+          <a:p>
+            <a:endParaRPr lang="en-US"/>
+          </a:p>
+        </p:txBody>
       </p:sp>
       <p:pic>
         <p:nvPicPr>
-          <p:cNvPr id="11" name="Image 1" descr="icon_shield.png">    </p:cNvPr>
+          <p:cNvPr id="11" name="Image 1" descr="icon_shield.png"/>
           <p:cNvPicPr>
             <a:picLocks noChangeAspect="1"/>
           </p:cNvPicPr>
           <p:nvPr/>
         </p:nvPicPr>
         <p:blipFill>
-          <a:blip r:embed="rId2"/>
+          <a:blip r:embed="rId4"/>
           <a:stretch>
             <a:fillRect/>
           </a:stretch>
@@ -4478,7 +4273,7 @@
           <a:bodyPr wrap="square" rtlCol="0" anchor="ctr"/>
           <a:lstStyle/>
           <a:p>
-            <a:pPr algn="ctr" indent="0" marL="0">
+            <a:pPr marL="0" indent="0" algn="ctr">
               <a:lnSpc>
                 <a:spcPct val="110000"/>
               </a:lnSpc>
@@ -4520,7 +4315,7 @@
           <a:bodyPr wrap="square" rtlCol="0" anchor="ctr"/>
           <a:lstStyle/>
           <a:p>
-            <a:pPr algn="ctr" indent="0" marL="0">
+            <a:pPr marL="0" indent="0" algn="ctr">
               <a:lnSpc>
                 <a:spcPct val="130000"/>
               </a:lnSpc>
@@ -4567,6 +4362,13 @@
             <a:prstDash val="solid"/>
           </a:ln>
         </p:spPr>
+        <p:txBody>
+          <a:bodyPr/>
+          <a:lstStyle/>
+          <a:p>
+            <a:endParaRPr lang="en-US"/>
+          </a:p>
+        </p:txBody>
       </p:sp>
       <p:sp>
         <p:nvSpPr>
@@ -4587,17 +4389,24 @@
           </a:solidFill>
           <a:ln/>
         </p:spPr>
+        <p:txBody>
+          <a:bodyPr/>
+          <a:lstStyle/>
+          <a:p>
+            <a:endParaRPr lang="en-US"/>
+          </a:p>
+        </p:txBody>
       </p:sp>
       <p:pic>
         <p:nvPicPr>
-          <p:cNvPr id="16" name="Image 2" descr="icon_calendar.png">    </p:cNvPr>
+          <p:cNvPr id="16" name="Image 2" descr="icon_calendar.png"/>
           <p:cNvPicPr>
             <a:picLocks noChangeAspect="1"/>
           </p:cNvPicPr>
           <p:nvPr/>
         </p:nvPicPr>
         <p:blipFill>
-          <a:blip r:embed="rId3"/>
+          <a:blip r:embed="rId5"/>
           <a:stretch>
             <a:fillRect/>
           </a:stretch>
@@ -4633,7 +4442,7 @@
           <a:bodyPr wrap="square" rtlCol="0" anchor="ctr"/>
           <a:lstStyle/>
           <a:p>
-            <a:pPr algn="ctr" indent="0" marL="0">
+            <a:pPr marL="0" indent="0" algn="ctr">
               <a:lnSpc>
                 <a:spcPct val="110000"/>
               </a:lnSpc>
@@ -4675,7 +4484,7 @@
           <a:bodyPr wrap="square" rtlCol="0" anchor="ctr"/>
           <a:lstStyle/>
           <a:p>
-            <a:pPr algn="ctr" indent="0" marL="0">
+            <a:pPr marL="0" indent="0" algn="ctr">
               <a:lnSpc>
                 <a:spcPct val="130000"/>
               </a:lnSpc>
@@ -4722,6 +4531,13 @@
             <a:prstDash val="solid"/>
           </a:ln>
         </p:spPr>
+        <p:txBody>
+          <a:bodyPr/>
+          <a:lstStyle/>
+          <a:p>
+            <a:endParaRPr lang="en-US"/>
+          </a:p>
+        </p:txBody>
       </p:sp>
       <p:sp>
         <p:nvSpPr>
@@ -4742,17 +4558,24 @@
           </a:solidFill>
           <a:ln/>
         </p:spPr>
+        <p:txBody>
+          <a:bodyPr/>
+          <a:lstStyle/>
+          <a:p>
+            <a:endParaRPr lang="en-US"/>
+          </a:p>
+        </p:txBody>
       </p:sp>
       <p:pic>
         <p:nvPicPr>
-          <p:cNvPr id="21" name="Image 3" descr="icon_users.png">    </p:cNvPr>
+          <p:cNvPr id="21" name="Image 3" descr="icon_users.png"/>
           <p:cNvPicPr>
             <a:picLocks noChangeAspect="1"/>
           </p:cNvPicPr>
           <p:nvPr/>
         </p:nvPicPr>
         <p:blipFill>
-          <a:blip r:embed="rId4"/>
+          <a:blip r:embed="rId6"/>
           <a:stretch>
             <a:fillRect/>
           </a:stretch>
@@ -4788,7 +4611,7 @@
           <a:bodyPr wrap="square" rtlCol="0" anchor="ctr"/>
           <a:lstStyle/>
           <a:p>
-            <a:pPr algn="ctr" indent="0" marL="0">
+            <a:pPr marL="0" indent="0" algn="ctr">
               <a:lnSpc>
                 <a:spcPct val="110000"/>
               </a:lnSpc>
@@ -4830,7 +4653,7 @@
           <a:bodyPr wrap="square" rtlCol="0" anchor="ctr"/>
           <a:lstStyle/>
           <a:p>
-            <a:pPr algn="ctr" indent="0" marL="0">
+            <a:pPr marL="0" indent="0" algn="ctr">
               <a:lnSpc>
                 <a:spcPct val="130000"/>
               </a:lnSpc>
@@ -4872,7 +4695,7 @@
           <a:bodyPr wrap="square" rtlCol="0" anchor="ctr"/>
           <a:lstStyle/>
           <a:p>
-            <a:pPr indent="0" marL="0">
+            <a:pPr marL="0" indent="0">
               <a:buNone/>
             </a:pPr>
             <a:r>
@@ -4911,7 +4734,7 @@
           <a:bodyPr wrap="square" rtlCol="0" anchor="ctr"/>
           <a:lstStyle/>
           <a:p>
-            <a:pPr algn="r" indent="0" marL="0">
+            <a:pPr marL="0" indent="0" algn="r">
               <a:buNone/>
             </a:pPr>
             <a:r>
@@ -4945,6 +4768,7 @@
         <a:solidFill>
           <a:srgbClr val="791716"/>
         </a:solidFill>
+        <a:effectLst/>
       </p:bgPr>
     </p:bg>
     <p:spTree>
@@ -4982,7 +4806,7 @@
           <a:bodyPr wrap="square" rtlCol="0" anchor="ctr"/>
           <a:lstStyle/>
           <a:p>
-            <a:pPr indent="0" marL="0">
+            <a:pPr marL="0" indent="0">
               <a:buNone/>
             </a:pPr>
             <a:r>
@@ -5021,7 +4845,7 @@
           <a:bodyPr wrap="square" rtlCol="0" anchor="ctr"/>
           <a:lstStyle/>
           <a:p>
-            <a:pPr indent="0" marL="0">
+            <a:pPr marL="0" indent="0">
               <a:buNone/>
             </a:pPr>
             <a:r>
@@ -5060,6 +4884,13 @@
           </a:solidFill>
           <a:ln/>
         </p:spPr>
+        <p:txBody>
+          <a:bodyPr/>
+          <a:lstStyle/>
+          <a:p>
+            <a:endParaRPr lang="en-US"/>
+          </a:p>
+        </p:txBody>
       </p:sp>
       <p:sp>
         <p:nvSpPr>
@@ -5080,6 +4911,13 @@
           </a:solidFill>
           <a:ln/>
         </p:spPr>
+        <p:txBody>
+          <a:bodyPr/>
+          <a:lstStyle/>
+          <a:p>
+            <a:endParaRPr lang="en-US"/>
+          </a:p>
+        </p:txBody>
       </p:sp>
       <p:sp>
         <p:nvSpPr>
@@ -5102,7 +4940,7 @@
           <a:bodyPr wrap="square" rtlCol="0" anchor="ctr"/>
           <a:lstStyle/>
           <a:p>
-            <a:pPr algn="ctr" indent="0" marL="0">
+            <a:pPr marL="0" indent="0" algn="ctr">
               <a:buNone/>
             </a:pPr>
             <a:r>
@@ -5141,7 +4979,7 @@
           <a:bodyPr wrap="square" rtlCol="0" anchor="ctr"/>
           <a:lstStyle/>
           <a:p>
-            <a:pPr indent="0" marL="0">
+            <a:pPr marL="0" indent="0">
               <a:lnSpc>
                 <a:spcPct val="115000"/>
               </a:lnSpc>
@@ -5183,6 +5021,13 @@
           </a:solidFill>
           <a:ln/>
         </p:spPr>
+        <p:txBody>
+          <a:bodyPr/>
+          <a:lstStyle/>
+          <a:p>
+            <a:endParaRPr lang="en-US"/>
+          </a:p>
+        </p:txBody>
       </p:sp>
       <p:sp>
         <p:nvSpPr>
@@ -5203,6 +5048,13 @@
           </a:solidFill>
           <a:ln/>
         </p:spPr>
+        <p:txBody>
+          <a:bodyPr/>
+          <a:lstStyle/>
+          <a:p>
+            <a:endParaRPr lang="en-US"/>
+          </a:p>
+        </p:txBody>
       </p:sp>
       <p:sp>
         <p:nvSpPr>
@@ -5225,7 +5077,7 @@
           <a:bodyPr wrap="square" rtlCol="0" anchor="ctr"/>
           <a:lstStyle/>
           <a:p>
-            <a:pPr algn="ctr" indent="0" marL="0">
+            <a:pPr marL="0" indent="0" algn="ctr">
               <a:buNone/>
             </a:pPr>
             <a:r>
@@ -5264,7 +5116,7 @@
           <a:bodyPr wrap="square" rtlCol="0" anchor="ctr"/>
           <a:lstStyle/>
           <a:p>
-            <a:pPr indent="0" marL="0">
+            <a:pPr marL="0" indent="0">
               <a:lnSpc>
                 <a:spcPct val="115000"/>
               </a:lnSpc>
@@ -5306,6 +5158,13 @@
           </a:solidFill>
           <a:ln/>
         </p:spPr>
+        <p:txBody>
+          <a:bodyPr/>
+          <a:lstStyle/>
+          <a:p>
+            <a:endParaRPr lang="en-US"/>
+          </a:p>
+        </p:txBody>
       </p:sp>
       <p:sp>
         <p:nvSpPr>
@@ -5326,6 +5185,13 @@
           </a:solidFill>
           <a:ln/>
         </p:spPr>
+        <p:txBody>
+          <a:bodyPr/>
+          <a:lstStyle/>
+          <a:p>
+            <a:endParaRPr lang="en-US"/>
+          </a:p>
+        </p:txBody>
       </p:sp>
       <p:sp>
         <p:nvSpPr>
@@ -5348,7 +5214,7 @@
           <a:bodyPr wrap="square" rtlCol="0" anchor="ctr"/>
           <a:lstStyle/>
           <a:p>
-            <a:pPr algn="ctr" indent="0" marL="0">
+            <a:pPr marL="0" indent="0" algn="ctr">
               <a:buNone/>
             </a:pPr>
             <a:r>
@@ -5387,7 +5253,7 @@
           <a:bodyPr wrap="square" rtlCol="0" anchor="ctr"/>
           <a:lstStyle/>
           <a:p>
-            <a:pPr indent="0" marL="0">
+            <a:pPr marL="0" indent="0">
               <a:lnSpc>
                 <a:spcPct val="115000"/>
               </a:lnSpc>
@@ -5429,6 +5295,13 @@
           </a:solidFill>
           <a:ln/>
         </p:spPr>
+        <p:txBody>
+          <a:bodyPr/>
+          <a:lstStyle/>
+          <a:p>
+            <a:endParaRPr lang="en-US"/>
+          </a:p>
+        </p:txBody>
       </p:sp>
       <p:sp>
         <p:nvSpPr>
@@ -5449,6 +5322,13 @@
           </a:solidFill>
           <a:ln/>
         </p:spPr>
+        <p:txBody>
+          <a:bodyPr/>
+          <a:lstStyle/>
+          <a:p>
+            <a:endParaRPr lang="en-US"/>
+          </a:p>
+        </p:txBody>
       </p:sp>
       <p:sp>
         <p:nvSpPr>
@@ -5471,7 +5351,7 @@
           <a:bodyPr wrap="square" rtlCol="0" anchor="ctr"/>
           <a:lstStyle/>
           <a:p>
-            <a:pPr algn="ctr" indent="0" marL="0">
+            <a:pPr marL="0" indent="0" algn="ctr">
               <a:buNone/>
             </a:pPr>
             <a:r>
@@ -5510,7 +5390,7 @@
           <a:bodyPr wrap="square" rtlCol="0" anchor="ctr"/>
           <a:lstStyle/>
           <a:p>
-            <a:pPr indent="0" marL="0">
+            <a:pPr marL="0" indent="0">
               <a:lnSpc>
                 <a:spcPct val="115000"/>
               </a:lnSpc>
@@ -5552,6 +5432,13 @@
           </a:solidFill>
           <a:ln/>
         </p:spPr>
+        <p:txBody>
+          <a:bodyPr/>
+          <a:lstStyle/>
+          <a:p>
+            <a:endParaRPr lang="en-US"/>
+          </a:p>
+        </p:txBody>
       </p:sp>
       <p:sp>
         <p:nvSpPr>
@@ -5572,6 +5459,13 @@
           </a:solidFill>
           <a:ln/>
         </p:spPr>
+        <p:txBody>
+          <a:bodyPr/>
+          <a:lstStyle/>
+          <a:p>
+            <a:endParaRPr lang="en-US"/>
+          </a:p>
+        </p:txBody>
       </p:sp>
       <p:sp>
         <p:nvSpPr>
@@ -5594,7 +5488,7 @@
           <a:bodyPr wrap="square" rtlCol="0" anchor="ctr"/>
           <a:lstStyle/>
           <a:p>
-            <a:pPr algn="ctr" indent="0" marL="0">
+            <a:pPr marL="0" indent="0" algn="ctr">
               <a:buNone/>
             </a:pPr>
             <a:r>
@@ -5633,7 +5527,7 @@
           <a:bodyPr wrap="square" rtlCol="0" anchor="ctr"/>
           <a:lstStyle/>
           <a:p>
-            <a:pPr indent="0" marL="0">
+            <a:pPr marL="0" indent="0">
               <a:lnSpc>
                 <a:spcPct val="115000"/>
               </a:lnSpc>
@@ -5675,6 +5569,13 @@
           </a:solidFill>
           <a:ln/>
         </p:spPr>
+        <p:txBody>
+          <a:bodyPr/>
+          <a:lstStyle/>
+          <a:p>
+            <a:endParaRPr lang="en-US"/>
+          </a:p>
+        </p:txBody>
       </p:sp>
       <p:sp>
         <p:nvSpPr>
@@ -5695,6 +5596,13 @@
           </a:solidFill>
           <a:ln/>
         </p:spPr>
+        <p:txBody>
+          <a:bodyPr/>
+          <a:lstStyle/>
+          <a:p>
+            <a:endParaRPr lang="en-US"/>
+          </a:p>
+        </p:txBody>
       </p:sp>
       <p:sp>
         <p:nvSpPr>
@@ -5717,7 +5625,7 @@
           <a:bodyPr wrap="square" rtlCol="0" anchor="ctr"/>
           <a:lstStyle/>
           <a:p>
-            <a:pPr algn="ctr" indent="0" marL="0">
+            <a:pPr marL="0" indent="0" algn="ctr">
               <a:buNone/>
             </a:pPr>
             <a:r>
@@ -5756,7 +5664,7 @@
           <a:bodyPr wrap="square" rtlCol="0" anchor="ctr"/>
           <a:lstStyle/>
           <a:p>
-            <a:pPr indent="0" marL="0">
+            <a:pPr marL="0" indent="0">
               <a:lnSpc>
                 <a:spcPct val="115000"/>
               </a:lnSpc>
@@ -5798,7 +5706,7 @@
           <a:bodyPr wrap="square" rtlCol="0" anchor="ctr"/>
           <a:lstStyle/>
           <a:p>
-            <a:pPr indent="0" marL="0">
+            <a:pPr marL="0" indent="0">
               <a:buNone/>
             </a:pPr>
             <a:r>
@@ -5837,7 +5745,7 @@
           <a:bodyPr wrap="square" rtlCol="0" anchor="ctr"/>
           <a:lstStyle/>
           <a:p>
-            <a:pPr algn="r" indent="0" marL="0">
+            <a:pPr marL="0" indent="0" algn="r">
               <a:buNone/>
             </a:pPr>
             <a:r>
@@ -5871,6 +5779,7 @@
         <a:solidFill>
           <a:srgbClr val="791716"/>
         </a:solidFill>
+        <a:effectLst/>
       </p:bgPr>
     </p:bg>
     <p:spTree>
@@ -5906,6 +5815,13 @@
           </a:solidFill>
           <a:ln/>
         </p:spPr>
+        <p:txBody>
+          <a:bodyPr/>
+          <a:lstStyle/>
+          <a:p>
+            <a:endParaRPr lang="en-US"/>
+          </a:p>
+        </p:txBody>
       </p:sp>
       <p:sp>
         <p:nvSpPr>
@@ -5928,6 +5844,13 @@
             <a:prstDash val="solid"/>
           </a:ln>
         </p:spPr>
+        <p:txBody>
+          <a:bodyPr/>
+          <a:lstStyle/>
+          <a:p>
+            <a:endParaRPr lang="en-US"/>
+          </a:p>
+        </p:txBody>
       </p:sp>
       <p:sp>
         <p:nvSpPr>
@@ -5950,7 +5873,7 @@
           <a:bodyPr wrap="square" rtlCol="0" anchor="ctr"/>
           <a:lstStyle/>
           <a:p>
-            <a:pPr indent="0" marL="0">
+            <a:pPr marL="0" indent="0">
               <a:buNone/>
             </a:pPr>
             <a:r>
@@ -5989,7 +5912,7 @@
           <a:bodyPr wrap="square" rtlCol="0" anchor="ctr"/>
           <a:lstStyle/>
           <a:p>
-            <a:pPr indent="0" marL="0">
+            <a:pPr marL="0" indent="0">
               <a:buNone/>
             </a:pPr>
             <a:r>
@@ -6026,254 +5949,17 @@
           </a:solidFill>
           <a:ln/>
         </p:spPr>
+        <p:txBody>
+          <a:bodyPr/>
+          <a:lstStyle/>
+          <a:p>
+            <a:endParaRPr lang="en-US"/>
+          </a:p>
+        </p:txBody>
       </p:sp>
       <p:pic>
         <p:nvPicPr>
-          <p:cNvPr id="7" name="Image 0" descr="icon_clipboard.png">    </p:cNvPr>
-          <p:cNvPicPr>
-            <a:picLocks noChangeAspect="1"/>
-          </p:cNvPicPr>
-          <p:nvPr/>
-        </p:nvPicPr>
-        <p:blipFill>
-          <a:blip r:embed="rId1"/>
-          <a:stretch>
-            <a:fillRect/>
-          </a:stretch>
-        </p:blipFill>
-        <p:spPr>
-          <a:xfrm>
-            <a:off x="1032358" y="2038198"/>
-            <a:ext cx="404165" cy="404165"/>
-          </a:xfrm>
-          <a:prstGeom prst="rect">
-            <a:avLst/>
-          </a:prstGeom>
-        </p:spPr>
-      </p:pic>
-      <p:sp>
-        <p:nvSpPr>
-          <p:cNvPr id="8" name="Text 5"/>
-          <p:cNvSpPr/>
-          <p:nvPr/>
-        </p:nvSpPr>
-        <p:spPr>
-          <a:xfrm>
-            <a:off x="1783080" y="1892808"/>
-            <a:ext cx="8961120" cy="365760"/>
-          </a:xfrm>
-          <a:prstGeom prst="rect">
-            <a:avLst/>
-          </a:prstGeom>
-          <a:noFill/>
-          <a:ln/>
-        </p:spPr>
-        <p:txBody>
-          <a:bodyPr wrap="square" rtlCol="0" anchor="ctr"/>
-          <a:lstStyle/>
-          <a:p>
-            <a:pPr indent="0" marL="0">
-              <a:buNone/>
-            </a:pPr>
-            <a:r>
-              <a:rPr lang="en-US" sz="1600" b="1" dirty="0">
-                <a:solidFill>
-                  <a:srgbClr val="FFFFFF"/>
-                </a:solidFill>
-                <a:latin typeface="Cambria" pitchFamily="34" charset="0"/>
-                <a:ea typeface="Cambria" pitchFamily="34" charset="-122"/>
-                <a:cs typeface="Cambria" pitchFamily="34" charset="-120"/>
-              </a:rPr>
-              <a:t>Read the full syllabus</a:t>
-            </a:r>
-            <a:endParaRPr lang="en-US" sz="1600" dirty="0"/>
-          </a:p>
-        </p:txBody>
-      </p:sp>
-      <p:sp>
-        <p:nvSpPr>
-          <p:cNvPr id="9" name="Text 6"/>
-          <p:cNvSpPr/>
-          <p:nvPr/>
-        </p:nvSpPr>
-        <p:spPr>
-          <a:xfrm>
-            <a:off x="1783080" y="2258568"/>
-            <a:ext cx="8961120" cy="365760"/>
-          </a:xfrm>
-          <a:prstGeom prst="rect">
-            <a:avLst/>
-          </a:prstGeom>
-          <a:noFill/>
-          <a:ln/>
-        </p:spPr>
-        <p:txBody>
-          <a:bodyPr wrap="square" rtlCol="0" anchor="ctr"/>
-          <a:lstStyle/>
-          <a:p>
-            <a:pPr indent="0" marL="0">
-              <a:buNone/>
-            </a:pPr>
-            <a:r>
-              <a:rPr lang="en-US" sz="1200" dirty="0">
-                <a:solidFill>
-                  <a:srgbClr val="E4D9BE"/>
-                </a:solidFill>
-                <a:latin typeface="Calibri" pitchFamily="34" charset="0"/>
-                <a:ea typeface="Calibri" pitchFamily="34" charset="-122"/>
-                <a:cs typeface="Calibri" pitchFamily="34" charset="-120"/>
-              </a:rPr>
-              <a:t>Course policies, grading, and the complete milestone schedule</a:t>
-            </a:r>
-            <a:endParaRPr lang="en-US" sz="1200" dirty="0"/>
-          </a:p>
-        </p:txBody>
-      </p:sp>
-      <p:sp>
-        <p:nvSpPr>
-          <p:cNvPr id="10" name="Shape 7"/>
-          <p:cNvSpPr/>
-          <p:nvPr/>
-        </p:nvSpPr>
-        <p:spPr>
-          <a:xfrm>
-            <a:off x="845820" y="2903220"/>
-            <a:ext cx="777240" cy="777240"/>
-          </a:xfrm>
-          <a:prstGeom prst="ellipse">
-            <a:avLst/>
-          </a:prstGeom>
-          <a:solidFill>
-            <a:srgbClr val="C0AC7E"/>
-          </a:solidFill>
-          <a:ln/>
-        </p:spPr>
-      </p:sp>
-      <p:pic>
-        <p:nvPicPr>
-          <p:cNvPr id="11" name="Image 1" descr="icon_calendar.png">    </p:cNvPr>
-          <p:cNvPicPr>
-            <a:picLocks noChangeAspect="1"/>
-          </p:cNvPicPr>
-          <p:nvPr/>
-        </p:nvPicPr>
-        <p:blipFill>
-          <a:blip r:embed="rId2"/>
-          <a:stretch>
-            <a:fillRect/>
-          </a:stretch>
-        </p:blipFill>
-        <p:spPr>
-          <a:xfrm>
-            <a:off x="1032358" y="3089758"/>
-            <a:ext cx="404165" cy="404165"/>
-          </a:xfrm>
-          <a:prstGeom prst="rect">
-            <a:avLst/>
-          </a:prstGeom>
-        </p:spPr>
-      </p:pic>
-      <p:sp>
-        <p:nvSpPr>
-          <p:cNvPr id="12" name="Text 8"/>
-          <p:cNvSpPr/>
-          <p:nvPr/>
-        </p:nvSpPr>
-        <p:spPr>
-          <a:xfrm>
-            <a:off x="1783080" y="2944368"/>
-            <a:ext cx="8961120" cy="365760"/>
-          </a:xfrm>
-          <a:prstGeom prst="rect">
-            <a:avLst/>
-          </a:prstGeom>
-          <a:noFill/>
-          <a:ln/>
-        </p:spPr>
-        <p:txBody>
-          <a:bodyPr wrap="square" rtlCol="0" anchor="ctr"/>
-          <a:lstStyle/>
-          <a:p>
-            <a:pPr indent="0" marL="0">
-              <a:buNone/>
-            </a:pPr>
-            <a:r>
-              <a:rPr lang="en-US" sz="1600" b="1" dirty="0">
-                <a:solidFill>
-                  <a:srgbClr val="FFFFFF"/>
-                </a:solidFill>
-                <a:latin typeface="Cambria" pitchFamily="34" charset="0"/>
-                <a:ea typeface="Cambria" pitchFamily="34" charset="-122"/>
-                <a:cs typeface="Cambria" pitchFamily="34" charset="-120"/>
-              </a:rPr>
-              <a:t>Book your first Sprint Review</a:t>
-            </a:r>
-            <a:endParaRPr lang="en-US" sz="1600" dirty="0"/>
-          </a:p>
-        </p:txBody>
-      </p:sp>
-      <p:sp>
-        <p:nvSpPr>
-          <p:cNvPr id="13" name="Text 9"/>
-          <p:cNvSpPr/>
-          <p:nvPr/>
-        </p:nvSpPr>
-        <p:spPr>
-          <a:xfrm>
-            <a:off x="1783080" y="3310128"/>
-            <a:ext cx="8961120" cy="365760"/>
-          </a:xfrm>
-          <a:prstGeom prst="rect">
-            <a:avLst/>
-          </a:prstGeom>
-          <a:noFill/>
-          <a:ln/>
-        </p:spPr>
-        <p:txBody>
-          <a:bodyPr wrap="square" rtlCol="0" anchor="ctr"/>
-          <a:lstStyle/>
-          <a:p>
-            <a:pPr indent="0" marL="0">
-              <a:buNone/>
-            </a:pPr>
-            <a:r>
-              <a:rPr lang="en-US" sz="1200" dirty="0">
-                <a:solidFill>
-                  <a:srgbClr val="E4D9BE"/>
-                </a:solidFill>
-                <a:latin typeface="Calibri" pitchFamily="34" charset="0"/>
-                <a:ea typeface="Calibri" pitchFamily="34" charset="-122"/>
-                <a:cs typeface="Calibri" pitchFamily="34" charset="-120"/>
-              </a:rPr>
-              <a:t>Reserve a weekly 15-minute slot on Google Calendar</a:t>
-            </a:r>
-            <a:endParaRPr lang="en-US" sz="1200" dirty="0"/>
-          </a:p>
-        </p:txBody>
-      </p:sp>
-      <p:sp>
-        <p:nvSpPr>
-          <p:cNvPr id="14" name="Shape 10"/>
-          <p:cNvSpPr/>
-          <p:nvPr/>
-        </p:nvSpPr>
-        <p:spPr>
-          <a:xfrm>
-            <a:off x="845820" y="3954780"/>
-            <a:ext cx="777240" cy="777240"/>
-          </a:xfrm>
-          <a:prstGeom prst="ellipse">
-            <a:avLst/>
-          </a:prstGeom>
-          <a:solidFill>
-            <a:srgbClr val="C0AC7E"/>
-          </a:solidFill>
-          <a:ln/>
-        </p:spPr>
-      </p:sp>
-      <p:pic>
-        <p:nvPicPr>
-          <p:cNvPr id="15" name="Image 2" descr="icon_cpu.png">    </p:cNvPr>
+          <p:cNvPr id="7" name="Image 0" descr="icon_clipboard.png"/>
           <p:cNvPicPr>
             <a:picLocks noChangeAspect="1"/>
           </p:cNvPicPr>
@@ -6287,7 +5973,7 @@
         </p:blipFill>
         <p:spPr>
           <a:xfrm>
-            <a:off x="1032358" y="4141318"/>
+            <a:off x="1032358" y="2038198"/>
             <a:ext cx="404165" cy="404165"/>
           </a:xfrm>
           <a:prstGeom prst="rect">
@@ -6297,13 +5983,13 @@
       </p:pic>
       <p:sp>
         <p:nvSpPr>
-          <p:cNvPr id="16" name="Text 11"/>
-          <p:cNvSpPr/>
-          <p:nvPr/>
-        </p:nvSpPr>
-        <p:spPr>
-          <a:xfrm>
-            <a:off x="1783080" y="3995928"/>
+          <p:cNvPr id="8" name="Text 5"/>
+          <p:cNvSpPr/>
+          <p:nvPr/>
+        </p:nvSpPr>
+        <p:spPr>
+          <a:xfrm>
+            <a:off x="1783080" y="1892808"/>
             <a:ext cx="8961120" cy="365760"/>
           </a:xfrm>
           <a:prstGeom prst="rect">
@@ -6316,7 +6002,7 @@
           <a:bodyPr wrap="square" rtlCol="0" anchor="ctr"/>
           <a:lstStyle/>
           <a:p>
-            <a:pPr indent="0" marL="0">
+            <a:pPr marL="0" indent="0">
               <a:buNone/>
             </a:pPr>
             <a:r>
@@ -6328,7 +6014,7 @@
                 <a:ea typeface="Cambria" pitchFamily="34" charset="-122"/>
                 <a:cs typeface="Cambria" pitchFamily="34" charset="-120"/>
               </a:rPr>
-              <a:t>Set up your dev environment</a:t>
+              <a:t>Read the full syllabus</a:t>
             </a:r>
             <a:endParaRPr lang="en-US" sz="1600" dirty="0"/>
           </a:p>
@@ -6336,13 +6022,13 @@
       </p:sp>
       <p:sp>
         <p:nvSpPr>
-          <p:cNvPr id="17" name="Text 12"/>
-          <p:cNvSpPr/>
-          <p:nvPr/>
-        </p:nvSpPr>
-        <p:spPr>
-          <a:xfrm>
-            <a:off x="1783080" y="4361688"/>
+          <p:cNvPr id="9" name="Text 6"/>
+          <p:cNvSpPr/>
+          <p:nvPr/>
+        </p:nvSpPr>
+        <p:spPr>
+          <a:xfrm>
+            <a:off x="1783080" y="2258568"/>
             <a:ext cx="8961120" cy="365760"/>
           </a:xfrm>
           <a:prstGeom prst="rect">
@@ -6355,7 +6041,7 @@
           <a:bodyPr wrap="square" rtlCol="0" anchor="ctr"/>
           <a:lstStyle/>
           <a:p>
-            <a:pPr indent="0" marL="0">
+            <a:pPr marL="0" indent="0">
               <a:buNone/>
             </a:pPr>
             <a:r>
@@ -6367,7 +6053,7 @@
                 <a:ea typeface="Calibri" pitchFamily="34" charset="-122"/>
                 <a:cs typeface="Calibri" pitchFamily="34" charset="-120"/>
               </a:rPr>
-              <a:t>Git 2.0+, and Docker 20.0+ recommended</a:t>
+              <a:t>Course policies, grading, and the complete milestone schedule</a:t>
             </a:r>
             <a:endParaRPr lang="en-US" sz="1200" dirty="0"/>
           </a:p>
@@ -6375,13 +6061,13 @@
       </p:sp>
       <p:sp>
         <p:nvSpPr>
-          <p:cNvPr id="18" name="Shape 13"/>
-          <p:cNvSpPr/>
-          <p:nvPr/>
-        </p:nvSpPr>
-        <p:spPr>
-          <a:xfrm>
-            <a:off x="845820" y="5006340"/>
+          <p:cNvPr id="10" name="Shape 7"/>
+          <p:cNvSpPr/>
+          <p:nvPr/>
+        </p:nvSpPr>
+        <p:spPr>
+          <a:xfrm>
+            <a:off x="845820" y="2903220"/>
             <a:ext cx="777240" cy="777240"/>
           </a:xfrm>
           <a:prstGeom prst="ellipse">
@@ -6392,10 +6078,17 @@
           </a:solidFill>
           <a:ln/>
         </p:spPr>
+        <p:txBody>
+          <a:bodyPr/>
+          <a:lstStyle/>
+          <a:p>
+            <a:endParaRPr lang="en-US"/>
+          </a:p>
+        </p:txBody>
       </p:sp>
       <p:pic>
         <p:nvPicPr>
-          <p:cNvPr id="19" name="Image 3" descr="icon_edit.png">    </p:cNvPr>
+          <p:cNvPr id="11" name="Image 1" descr="icon_calendar.png"/>
           <p:cNvPicPr>
             <a:picLocks noChangeAspect="1"/>
           </p:cNvPicPr>
@@ -6409,7 +6102,7 @@
         </p:blipFill>
         <p:spPr>
           <a:xfrm>
-            <a:off x="1032358" y="5192878"/>
+            <a:off x="1032358" y="3089758"/>
             <a:ext cx="404165" cy="404165"/>
           </a:xfrm>
           <a:prstGeom prst="rect">
@@ -6419,13 +6112,13 @@
       </p:pic>
       <p:sp>
         <p:nvSpPr>
-          <p:cNvPr id="20" name="Text 14"/>
-          <p:cNvSpPr/>
-          <p:nvPr/>
-        </p:nvSpPr>
-        <p:spPr>
-          <a:xfrm>
-            <a:off x="1783080" y="5047488"/>
+          <p:cNvPr id="12" name="Text 8"/>
+          <p:cNvSpPr/>
+          <p:nvPr/>
+        </p:nvSpPr>
+        <p:spPr>
+          <a:xfrm>
+            <a:off x="1783080" y="2944368"/>
             <a:ext cx="8961120" cy="365760"/>
           </a:xfrm>
           <a:prstGeom prst="rect">
@@ -6438,7 +6131,7 @@
           <a:bodyPr wrap="square" rtlCol="0" anchor="ctr"/>
           <a:lstStyle/>
           <a:p>
-            <a:pPr indent="0" marL="0">
+            <a:pPr marL="0" indent="0">
               <a:buNone/>
             </a:pPr>
             <a:r>
@@ -6450,7 +6143,7 @@
                 <a:ea typeface="Cambria" pitchFamily="34" charset="-122"/>
                 <a:cs typeface="Cambria" pitchFamily="34" charset="-120"/>
               </a:rPr>
-              <a:t>Draft three project ideas</a:t>
+              <a:t>Book your first Sprint Review</a:t>
             </a:r>
             <a:endParaRPr lang="en-US" sz="1600" dirty="0"/>
           </a:p>
@@ -6458,13 +6151,13 @@
       </p:sp>
       <p:sp>
         <p:nvSpPr>
-          <p:cNvPr id="21" name="Text 15"/>
-          <p:cNvSpPr/>
-          <p:nvPr/>
-        </p:nvSpPr>
-        <p:spPr>
-          <a:xfrm>
-            <a:off x="1783080" y="5413248"/>
+          <p:cNvPr id="13" name="Text 9"/>
+          <p:cNvSpPr/>
+          <p:nvPr/>
+        </p:nvSpPr>
+        <p:spPr>
+          <a:xfrm>
+            <a:off x="1783080" y="3310128"/>
             <a:ext cx="8961120" cy="365760"/>
           </a:xfrm>
           <a:prstGeom prst="rect">
@@ -6477,7 +6170,7 @@
           <a:bodyPr wrap="square" rtlCol="0" anchor="ctr"/>
           <a:lstStyle/>
           <a:p>
-            <a:pPr indent="0" marL="0">
+            <a:pPr marL="0" indent="0">
               <a:buNone/>
             </a:pPr>
             <a:r>
@@ -6489,7 +6182,7 @@
                 <a:ea typeface="Calibri" pitchFamily="34" charset="-122"/>
                 <a:cs typeface="Calibri" pitchFamily="34" charset="-120"/>
               </a:rPr>
-              <a:t>One page each — due Week 1, the spark for everything ahead</a:t>
+              <a:t>Reserve a weekly 15-minute slot on Google Calendar</a:t>
             </a:r>
             <a:endParaRPr lang="en-US" sz="1200" dirty="0"/>
           </a:p>
@@ -6497,30 +6190,120 @@
       </p:sp>
       <p:sp>
         <p:nvSpPr>
-          <p:cNvPr id="22" name="Text 16"/>
-          <p:cNvSpPr/>
-          <p:nvPr/>
-        </p:nvSpPr>
-        <p:spPr>
-          <a:xfrm>
-            <a:off x="457200" y="6528816"/>
-            <a:ext cx="7315200" cy="274320"/>
-          </a:xfrm>
-          <a:prstGeom prst="rect">
-            <a:avLst/>
-          </a:prstGeom>
-          <a:noFill/>
-          <a:ln/>
-        </p:spPr>
-        <p:txBody>
-          <a:bodyPr wrap="square" rtlCol="0" anchor="ctr"/>
-          <a:lstStyle/>
-          <a:p>
-            <a:pPr indent="0" marL="0">
-              <a:buNone/>
-            </a:pPr>
-            <a:r>
-              <a:rPr lang="en-US" sz="1000" i="1" dirty="0">
+          <p:cNvPr id="14" name="Shape 10"/>
+          <p:cNvSpPr/>
+          <p:nvPr/>
+        </p:nvSpPr>
+        <p:spPr>
+          <a:xfrm>
+            <a:off x="845820" y="3954780"/>
+            <a:ext cx="777240" cy="777240"/>
+          </a:xfrm>
+          <a:prstGeom prst="ellipse">
+            <a:avLst/>
+          </a:prstGeom>
+          <a:solidFill>
+            <a:srgbClr val="C0AC7E"/>
+          </a:solidFill>
+          <a:ln/>
+        </p:spPr>
+        <p:txBody>
+          <a:bodyPr/>
+          <a:lstStyle/>
+          <a:p>
+            <a:endParaRPr lang="en-US"/>
+          </a:p>
+        </p:txBody>
+      </p:sp>
+      <p:pic>
+        <p:nvPicPr>
+          <p:cNvPr id="15" name="Image 2" descr="icon_cpu.png"/>
+          <p:cNvPicPr>
+            <a:picLocks noChangeAspect="1"/>
+          </p:cNvPicPr>
+          <p:nvPr/>
+        </p:nvPicPr>
+        <p:blipFill>
+          <a:blip r:embed="rId5"/>
+          <a:stretch>
+            <a:fillRect/>
+          </a:stretch>
+        </p:blipFill>
+        <p:spPr>
+          <a:xfrm>
+            <a:off x="1032358" y="4141318"/>
+            <a:ext cx="404165" cy="404165"/>
+          </a:xfrm>
+          <a:prstGeom prst="rect">
+            <a:avLst/>
+          </a:prstGeom>
+        </p:spPr>
+      </p:pic>
+      <p:sp>
+        <p:nvSpPr>
+          <p:cNvPr id="16" name="Text 11"/>
+          <p:cNvSpPr/>
+          <p:nvPr/>
+        </p:nvSpPr>
+        <p:spPr>
+          <a:xfrm>
+            <a:off x="1783080" y="3995928"/>
+            <a:ext cx="8961120" cy="365760"/>
+          </a:xfrm>
+          <a:prstGeom prst="rect">
+            <a:avLst/>
+          </a:prstGeom>
+          <a:noFill/>
+          <a:ln/>
+        </p:spPr>
+        <p:txBody>
+          <a:bodyPr wrap="square" rtlCol="0" anchor="ctr"/>
+          <a:lstStyle/>
+          <a:p>
+            <a:pPr marL="0" indent="0">
+              <a:buNone/>
+            </a:pPr>
+            <a:r>
+              <a:rPr lang="en-US" sz="1600" b="1" dirty="0">
+                <a:solidFill>
+                  <a:srgbClr val="FFFFFF"/>
+                </a:solidFill>
+                <a:latin typeface="Cambria" pitchFamily="34" charset="0"/>
+                <a:ea typeface="Cambria" pitchFamily="34" charset="-122"/>
+                <a:cs typeface="Cambria" pitchFamily="34" charset="-120"/>
+              </a:rPr>
+              <a:t>Set up your dev environment</a:t>
+            </a:r>
+            <a:endParaRPr lang="en-US" sz="1600" dirty="0"/>
+          </a:p>
+        </p:txBody>
+      </p:sp>
+      <p:sp>
+        <p:nvSpPr>
+          <p:cNvPr id="17" name="Text 12"/>
+          <p:cNvSpPr/>
+          <p:nvPr/>
+        </p:nvSpPr>
+        <p:spPr>
+          <a:xfrm>
+            <a:off x="1783080" y="4361688"/>
+            <a:ext cx="8961120" cy="365760"/>
+          </a:xfrm>
+          <a:prstGeom prst="rect">
+            <a:avLst/>
+          </a:prstGeom>
+          <a:noFill/>
+          <a:ln/>
+        </p:spPr>
+        <p:txBody>
+          <a:bodyPr wrap="square" rtlCol="0" anchor="ctr"/>
+          <a:lstStyle/>
+          <a:p>
+            <a:pPr marL="0" indent="0">
+              <a:buNone/>
+            </a:pPr>
+            <a:r>
+              <a:rPr lang="en-US" sz="1200" dirty="0">
                 <a:solidFill>
                   <a:srgbClr val="E4D9BE"/>
                 </a:solidFill>
@@ -6528,6 +6311,174 @@
                 <a:ea typeface="Calibri" pitchFamily="34" charset="-122"/>
                 <a:cs typeface="Calibri" pitchFamily="34" charset="-120"/>
               </a:rPr>
+              <a:t>Git 2.0+, and Docker 20.0+ recommended</a:t>
+            </a:r>
+            <a:endParaRPr lang="en-US" sz="1200" dirty="0"/>
+          </a:p>
+        </p:txBody>
+      </p:sp>
+      <p:sp>
+        <p:nvSpPr>
+          <p:cNvPr id="18" name="Shape 13"/>
+          <p:cNvSpPr/>
+          <p:nvPr/>
+        </p:nvSpPr>
+        <p:spPr>
+          <a:xfrm>
+            <a:off x="845820" y="5006340"/>
+            <a:ext cx="777240" cy="777240"/>
+          </a:xfrm>
+          <a:prstGeom prst="ellipse">
+            <a:avLst/>
+          </a:prstGeom>
+          <a:solidFill>
+            <a:srgbClr val="C0AC7E"/>
+          </a:solidFill>
+          <a:ln/>
+        </p:spPr>
+        <p:txBody>
+          <a:bodyPr/>
+          <a:lstStyle/>
+          <a:p>
+            <a:endParaRPr lang="en-US"/>
+          </a:p>
+        </p:txBody>
+      </p:sp>
+      <p:pic>
+        <p:nvPicPr>
+          <p:cNvPr id="19" name="Image 3" descr="icon_edit.png"/>
+          <p:cNvPicPr>
+            <a:picLocks noChangeAspect="1"/>
+          </p:cNvPicPr>
+          <p:nvPr/>
+        </p:nvPicPr>
+        <p:blipFill>
+          <a:blip r:embed="rId6"/>
+          <a:stretch>
+            <a:fillRect/>
+          </a:stretch>
+        </p:blipFill>
+        <p:spPr>
+          <a:xfrm>
+            <a:off x="1032358" y="5192878"/>
+            <a:ext cx="404165" cy="404165"/>
+          </a:xfrm>
+          <a:prstGeom prst="rect">
+            <a:avLst/>
+          </a:prstGeom>
+        </p:spPr>
+      </p:pic>
+      <p:sp>
+        <p:nvSpPr>
+          <p:cNvPr id="20" name="Text 14"/>
+          <p:cNvSpPr/>
+          <p:nvPr/>
+        </p:nvSpPr>
+        <p:spPr>
+          <a:xfrm>
+            <a:off x="1783080" y="5047488"/>
+            <a:ext cx="8961120" cy="365760"/>
+          </a:xfrm>
+          <a:prstGeom prst="rect">
+            <a:avLst/>
+          </a:prstGeom>
+          <a:noFill/>
+          <a:ln/>
+        </p:spPr>
+        <p:txBody>
+          <a:bodyPr wrap="square" rtlCol="0" anchor="ctr"/>
+          <a:lstStyle/>
+          <a:p>
+            <a:pPr marL="0" indent="0">
+              <a:buNone/>
+            </a:pPr>
+            <a:r>
+              <a:rPr lang="en-US" sz="1600" b="1" dirty="0">
+                <a:solidFill>
+                  <a:srgbClr val="FFFFFF"/>
+                </a:solidFill>
+                <a:latin typeface="Cambria" pitchFamily="34" charset="0"/>
+                <a:ea typeface="Cambria" pitchFamily="34" charset="-122"/>
+                <a:cs typeface="Cambria" pitchFamily="34" charset="-120"/>
+              </a:rPr>
+              <a:t>Draft three project ideas</a:t>
+            </a:r>
+            <a:endParaRPr lang="en-US" sz="1600" dirty="0"/>
+          </a:p>
+        </p:txBody>
+      </p:sp>
+      <p:sp>
+        <p:nvSpPr>
+          <p:cNvPr id="21" name="Text 15"/>
+          <p:cNvSpPr/>
+          <p:nvPr/>
+        </p:nvSpPr>
+        <p:spPr>
+          <a:xfrm>
+            <a:off x="1783080" y="5413248"/>
+            <a:ext cx="8961120" cy="365760"/>
+          </a:xfrm>
+          <a:prstGeom prst="rect">
+            <a:avLst/>
+          </a:prstGeom>
+          <a:noFill/>
+          <a:ln/>
+        </p:spPr>
+        <p:txBody>
+          <a:bodyPr wrap="square" rtlCol="0" anchor="ctr"/>
+          <a:lstStyle/>
+          <a:p>
+            <a:pPr marL="0" indent="0">
+              <a:buNone/>
+            </a:pPr>
+            <a:r>
+              <a:rPr lang="en-US" sz="1200" dirty="0">
+                <a:solidFill>
+                  <a:srgbClr val="E4D9BE"/>
+                </a:solidFill>
+                <a:latin typeface="Calibri" pitchFamily="34" charset="0"/>
+                <a:ea typeface="Calibri" pitchFamily="34" charset="-122"/>
+                <a:cs typeface="Calibri" pitchFamily="34" charset="-120"/>
+              </a:rPr>
+              <a:t>One page each — due Week 1, the spark for everything ahead</a:t>
+            </a:r>
+            <a:endParaRPr lang="en-US" sz="1200" dirty="0"/>
+          </a:p>
+        </p:txBody>
+      </p:sp>
+      <p:sp>
+        <p:nvSpPr>
+          <p:cNvPr id="22" name="Text 16"/>
+          <p:cNvSpPr/>
+          <p:nvPr/>
+        </p:nvSpPr>
+        <p:spPr>
+          <a:xfrm>
+            <a:off x="457200" y="6528816"/>
+            <a:ext cx="7315200" cy="274320"/>
+          </a:xfrm>
+          <a:prstGeom prst="rect">
+            <a:avLst/>
+          </a:prstGeom>
+          <a:noFill/>
+          <a:ln/>
+        </p:spPr>
+        <p:txBody>
+          <a:bodyPr wrap="square" rtlCol="0" anchor="ctr"/>
+          <a:lstStyle/>
+          <a:p>
+            <a:pPr marL="0" indent="0">
+              <a:buNone/>
+            </a:pPr>
+            <a:r>
+              <a:rPr lang="en-US" sz="1000" i="1" dirty="0">
+                <a:solidFill>
+                  <a:srgbClr val="E4D9BE"/>
+                </a:solidFill>
+                <a:latin typeface="Calibri" pitchFamily="34" charset="0"/>
+                <a:ea typeface="Calibri" pitchFamily="34" charset="-122"/>
+                <a:cs typeface="Calibri" pitchFamily="34" charset="-120"/>
+              </a:rPr>
               <a:t>Let's Build Something</a:t>
             </a:r>
             <a:endParaRPr lang="en-US" sz="1000" dirty="0"/>
@@ -6555,7 +6506,7 @@
           <a:bodyPr wrap="square" rtlCol="0" anchor="ctr"/>
           <a:lstStyle/>
           <a:p>
-            <a:pPr algn="r" indent="0" marL="0">
+            <a:pPr marL="0" indent="0" algn="r">
               <a:buNone/>
             </a:pPr>
             <a:r>
@@ -6589,6 +6540,7 @@
         <a:solidFill>
           <a:srgbClr val="FBF9F5"/>
         </a:solidFill>
+        <a:effectLst/>
       </p:bgPr>
     </p:bg>
     <p:spTree>
@@ -6624,6 +6576,13 @@
           </a:solidFill>
           <a:ln/>
         </p:spPr>
+        <p:txBody>
+          <a:bodyPr/>
+          <a:lstStyle/>
+          <a:p>
+            <a:endParaRPr lang="en-US" sz="2000" dirty="0"/>
+          </a:p>
+        </p:txBody>
       </p:sp>
       <p:sp>
         <p:nvSpPr>
@@ -6646,7 +6605,7 @@
           <a:bodyPr wrap="square" rtlCol="0" anchor="ctr"/>
           <a:lstStyle/>
           <a:p>
-            <a:pPr indent="0" marL="0">
+            <a:pPr marL="0" indent="0">
               <a:buNone/>
             </a:pPr>
             <a:r>
@@ -6685,7 +6644,7 @@
           <a:bodyPr wrap="square" rtlCol="0" anchor="ctr"/>
           <a:lstStyle/>
           <a:p>
-            <a:pPr indent="0" marL="0">
+            <a:pPr marL="0" indent="0">
               <a:lnSpc>
                 <a:spcPts val="3400"/>
               </a:lnSpc>
@@ -6705,7 +6664,7 @@
             <a:endParaRPr lang="en-US" sz="3200" dirty="0"/>
           </a:p>
           <a:p>
-            <a:pPr indent="0" marL="0">
+            <a:pPr marL="0" indent="0">
               <a:lnSpc>
                 <a:spcPts val="3400"/>
               </a:lnSpc>
@@ -6747,14 +6706,14 @@
           <a:bodyPr wrap="square" rtlCol="0" anchor="ctr"/>
           <a:lstStyle/>
           <a:p>
-            <a:pPr indent="0" marL="0">
+            <a:pPr marL="0" indent="0">
               <a:lnSpc>
                 <a:spcPct val="135000"/>
               </a:lnSpc>
               <a:buNone/>
             </a:pPr>
             <a:r>
-              <a:rPr lang="en-US" sz="1350" dirty="0">
+              <a:rPr lang="en-US" dirty="0">
                 <a:solidFill>
                   <a:srgbClr val="E4D9BE"/>
                 </a:solidFill>
@@ -6764,7 +6723,7 @@
               </a:rPr>
               <a:t>This is the culmination of everything you've learned — where you design, build, and ship something real.</a:t>
             </a:r>
-            <a:endParaRPr lang="en-US" sz="1350" dirty="0"/>
+            <a:endParaRPr lang="en-US" dirty="0"/>
           </a:p>
         </p:txBody>
       </p:sp>
@@ -6787,17 +6746,24 @@
           </a:solidFill>
           <a:ln/>
         </p:spPr>
+        <p:txBody>
+          <a:bodyPr/>
+          <a:lstStyle/>
+          <a:p>
+            <a:endParaRPr lang="en-US"/>
+          </a:p>
+        </p:txBody>
       </p:sp>
       <p:pic>
         <p:nvPicPr>
-          <p:cNvPr id="7" name="Image 0" descr="icon_compass.png">    </p:cNvPr>
+          <p:cNvPr id="7" name="Image 0" descr="icon_compass.png"/>
           <p:cNvPicPr>
             <a:picLocks noChangeAspect="1"/>
           </p:cNvPicPr>
           <p:nvPr/>
         </p:nvPicPr>
         <p:blipFill>
-          <a:blip r:embed="rId1"/>
+          <a:blip r:embed="rId3"/>
           <a:stretch>
             <a:fillRect/>
           </a:stretch>
@@ -6831,6 +6797,13 @@
           </a:solidFill>
           <a:ln/>
         </p:spPr>
+        <p:txBody>
+          <a:bodyPr/>
+          <a:lstStyle/>
+          <a:p>
+            <a:endParaRPr lang="en-US"/>
+          </a:p>
+        </p:txBody>
       </p:sp>
       <p:sp>
         <p:nvSpPr>
@@ -6853,7 +6826,7 @@
           <a:bodyPr wrap="square" rtlCol="0" anchor="ctr"/>
           <a:lstStyle/>
           <a:p>
-            <a:pPr algn="ctr" indent="0" marL="0">
+            <a:pPr marL="0" indent="0" algn="ctr">
               <a:buNone/>
             </a:pPr>
             <a:r>
@@ -6892,11 +6865,11 @@
           <a:bodyPr wrap="square" rtlCol="0" anchor="ctr"/>
           <a:lstStyle/>
           <a:p>
-            <a:pPr indent="0" marL="0">
-              <a:buNone/>
-            </a:pPr>
-            <a:r>
-              <a:rPr lang="en-US" sz="1650" b="1" dirty="0">
+            <a:pPr marL="0" indent="0">
+              <a:buNone/>
+            </a:pPr>
+            <a:r>
+              <a:rPr lang="en-US" sz="2000" b="1" dirty="0">
                 <a:solidFill>
                   <a:srgbClr val="791716"/>
                 </a:solidFill>
@@ -6906,7 +6879,7 @@
               </a:rPr>
               <a:t>Two full semesters</a:t>
             </a:r>
-            <a:endParaRPr lang="en-US" sz="1650" dirty="0"/>
+            <a:endParaRPr lang="en-US" sz="2000" dirty="0"/>
           </a:p>
         </p:txBody>
       </p:sp>
@@ -6931,14 +6904,14 @@
           <a:bodyPr wrap="square" rtlCol="0" anchor="ctr"/>
           <a:lstStyle/>
           <a:p>
-            <a:pPr indent="0" marL="0">
+            <a:pPr marL="0" indent="0">
               <a:lnSpc>
                 <a:spcPct val="125000"/>
               </a:lnSpc>
               <a:buNone/>
             </a:pPr>
             <a:r>
-              <a:rPr lang="en-US" sz="1200" dirty="0">
+              <a:rPr lang="en-US" sz="1600" dirty="0">
                 <a:solidFill>
                   <a:srgbClr val="2A2321"/>
                 </a:solidFill>
@@ -6948,7 +6921,7 @@
               </a:rPr>
               <a:t>Fall 2026 (CS 480W) through Spring 2027 (CS 481) — 8 credits, one continuous project.</a:t>
             </a:r>
-            <a:endParaRPr lang="en-US" sz="1200" dirty="0"/>
+            <a:endParaRPr lang="en-US" sz="1600" dirty="0"/>
           </a:p>
         </p:txBody>
       </p:sp>
@@ -6971,6 +6944,13 @@
           </a:solidFill>
           <a:ln/>
         </p:spPr>
+        <p:txBody>
+          <a:bodyPr/>
+          <a:lstStyle/>
+          <a:p>
+            <a:endParaRPr lang="en-US"/>
+          </a:p>
+        </p:txBody>
       </p:sp>
       <p:sp>
         <p:nvSpPr>
@@ -6993,7 +6973,7 @@
           <a:bodyPr wrap="square" rtlCol="0" anchor="ctr"/>
           <a:lstStyle/>
           <a:p>
-            <a:pPr algn="ctr" indent="0" marL="0">
+            <a:pPr marL="0" indent="0" algn="ctr">
               <a:buNone/>
             </a:pPr>
             <a:r>
@@ -7032,11 +7012,11 @@
           <a:bodyPr wrap="square" rtlCol="0" anchor="ctr"/>
           <a:lstStyle/>
           <a:p>
-            <a:pPr indent="0" marL="0">
-              <a:buNone/>
-            </a:pPr>
-            <a:r>
-              <a:rPr lang="en-US" sz="1650" b="1" dirty="0">
+            <a:pPr marL="0" indent="0">
+              <a:buNone/>
+            </a:pPr>
+            <a:r>
+              <a:rPr lang="en-US" sz="2000" b="1" dirty="0">
                 <a:solidFill>
                   <a:srgbClr val="791716"/>
                 </a:solidFill>
@@ -7046,7 +7026,7 @@
               </a:rPr>
               <a:t>Your own project, start to finish</a:t>
             </a:r>
-            <a:endParaRPr lang="en-US" sz="1650" dirty="0"/>
+            <a:endParaRPr lang="en-US" sz="2000" dirty="0"/>
           </a:p>
         </p:txBody>
       </p:sp>
@@ -7071,14 +7051,14 @@
           <a:bodyPr wrap="square" rtlCol="0" anchor="ctr"/>
           <a:lstStyle/>
           <a:p>
-            <a:pPr indent="0" marL="0">
+            <a:pPr marL="0" indent="0">
               <a:lnSpc>
                 <a:spcPct val="125000"/>
               </a:lnSpc>
               <a:buNone/>
             </a:pPr>
             <a:r>
-              <a:rPr lang="en-US" sz="1200" dirty="0">
+              <a:rPr lang="en-US" sz="1600" dirty="0">
                 <a:solidFill>
                   <a:srgbClr val="2A2321"/>
                 </a:solidFill>
@@ -7088,7 +7068,7 @@
               </a:rPr>
               <a:t>You choose it, scope it, architect it, build it, test it, and deploy it.</a:t>
             </a:r>
-            <a:endParaRPr lang="en-US" sz="1200" dirty="0"/>
+            <a:endParaRPr lang="en-US" sz="1600" dirty="0"/>
           </a:p>
         </p:txBody>
       </p:sp>
@@ -7111,6 +7091,13 @@
           </a:solidFill>
           <a:ln/>
         </p:spPr>
+        <p:txBody>
+          <a:bodyPr/>
+          <a:lstStyle/>
+          <a:p>
+            <a:endParaRPr lang="en-US"/>
+          </a:p>
+        </p:txBody>
       </p:sp>
       <p:sp>
         <p:nvSpPr>
@@ -7133,7 +7120,7 @@
           <a:bodyPr wrap="square" rtlCol="0" anchor="ctr"/>
           <a:lstStyle/>
           <a:p>
-            <a:pPr algn="ctr" indent="0" marL="0">
+            <a:pPr marL="0" indent="0" algn="ctr">
               <a:buNone/>
             </a:pPr>
             <a:r>
@@ -7172,11 +7159,11 @@
           <a:bodyPr wrap="square" rtlCol="0" anchor="ctr"/>
           <a:lstStyle/>
           <a:p>
-            <a:pPr indent="0" marL="0">
-              <a:buNone/>
-            </a:pPr>
-            <a:r>
-              <a:rPr lang="en-US" sz="1650" b="1" dirty="0">
+            <a:pPr marL="0" indent="0">
+              <a:buNone/>
+            </a:pPr>
+            <a:r>
+              <a:rPr lang="en-US" sz="2000" b="1" dirty="0">
                 <a:solidFill>
                   <a:srgbClr val="791716"/>
                 </a:solidFill>
@@ -7186,7 +7173,7 @@
               </a:rPr>
               <a:t>Industry-standard practice</a:t>
             </a:r>
-            <a:endParaRPr lang="en-US" sz="1650" dirty="0"/>
+            <a:endParaRPr lang="en-US" sz="2000" dirty="0"/>
           </a:p>
         </p:txBody>
       </p:sp>
@@ -7211,14 +7198,14 @@
           <a:bodyPr wrap="square" rtlCol="0" anchor="ctr"/>
           <a:lstStyle/>
           <a:p>
-            <a:pPr indent="0" marL="0">
+            <a:pPr marL="0" indent="0">
               <a:lnSpc>
                 <a:spcPct val="125000"/>
               </a:lnSpc>
               <a:buNone/>
             </a:pPr>
             <a:r>
-              <a:rPr lang="en-US" sz="1200" dirty="0">
+              <a:rPr lang="en-US" sz="1600" dirty="0">
                 <a:solidFill>
                   <a:srgbClr val="2A2321"/>
                 </a:solidFill>
@@ -7228,7 +7215,7 @@
               </a:rPr>
               <a:t>Real SDLC methodology: agile sprints, code review, CI/CD, and documentation — the way professional teams work.</a:t>
             </a:r>
-            <a:endParaRPr lang="en-US" sz="1200" dirty="0"/>
+            <a:endParaRPr lang="en-US" sz="1600" dirty="0"/>
           </a:p>
         </p:txBody>
       </p:sp>
@@ -7251,6 +7238,13 @@
           </a:solidFill>
           <a:ln/>
         </p:spPr>
+        <p:txBody>
+          <a:bodyPr/>
+          <a:lstStyle/>
+          <a:p>
+            <a:endParaRPr lang="en-US"/>
+          </a:p>
+        </p:txBody>
       </p:sp>
       <p:sp>
         <p:nvSpPr>
@@ -7273,7 +7267,7 @@
           <a:bodyPr wrap="square" rtlCol="0" anchor="ctr"/>
           <a:lstStyle/>
           <a:p>
-            <a:pPr algn="ctr" indent="0" marL="0">
+            <a:pPr marL="0" indent="0" algn="ctr">
               <a:buNone/>
             </a:pPr>
             <a:r>
@@ -7312,11 +7306,11 @@
           <a:bodyPr wrap="square" rtlCol="0" anchor="ctr"/>
           <a:lstStyle/>
           <a:p>
-            <a:pPr indent="0" marL="0">
-              <a:buNone/>
-            </a:pPr>
-            <a:r>
-              <a:rPr lang="en-US" sz="1650" b="1" dirty="0">
+            <a:pPr marL="0" indent="0">
+              <a:buNone/>
+            </a:pPr>
+            <a:r>
+              <a:rPr lang="en-US" sz="2000" b="1" dirty="0">
                 <a:solidFill>
                   <a:srgbClr val="791716"/>
                 </a:solidFill>
@@ -7326,7 +7320,7 @@
               </a:rPr>
               <a:t>A portfolio piece that speaks for you</a:t>
             </a:r>
-            <a:endParaRPr lang="en-US" sz="1650" dirty="0"/>
+            <a:endParaRPr lang="en-US" sz="2000" dirty="0"/>
           </a:p>
         </p:txBody>
       </p:sp>
@@ -7351,14 +7345,14 @@
           <a:bodyPr wrap="square" rtlCol="0" anchor="ctr"/>
           <a:lstStyle/>
           <a:p>
-            <a:pPr indent="0" marL="0">
+            <a:pPr marL="0" indent="0">
               <a:lnSpc>
                 <a:spcPct val="125000"/>
               </a:lnSpc>
               <a:buNone/>
             </a:pPr>
             <a:r>
-              <a:rPr lang="en-US" sz="1200" dirty="0">
+              <a:rPr lang="en-US" sz="1600" dirty="0">
                 <a:solidFill>
                   <a:srgbClr val="2A2321"/>
                 </a:solidFill>
@@ -7368,7 +7362,7 @@
               </a:rPr>
               <a:t>Something you can demo in an interview, not just describe on a resume.</a:t>
             </a:r>
-            <a:endParaRPr lang="en-US" sz="1200" dirty="0"/>
+            <a:endParaRPr lang="en-US" sz="1600" dirty="0"/>
           </a:p>
         </p:txBody>
       </p:sp>
@@ -7393,7 +7387,7 @@
           <a:bodyPr wrap="square" rtlCol="0" anchor="ctr"/>
           <a:lstStyle/>
           <a:p>
-            <a:pPr indent="0" marL="0">
+            <a:pPr marL="0" indent="0">
               <a:buNone/>
             </a:pPr>
             <a:r>
@@ -7432,7 +7426,7 @@
           <a:bodyPr wrap="square" rtlCol="0" anchor="ctr"/>
           <a:lstStyle/>
           <a:p>
-            <a:pPr algn="r" indent="0" marL="0">
+            <a:pPr marL="0" indent="0" algn="r">
               <a:buNone/>
             </a:pPr>
             <a:r>
@@ -7466,6 +7460,7 @@
         <a:solidFill>
           <a:srgbClr val="FFFFFF"/>
         </a:solidFill>
+        <a:effectLst/>
       </p:bgPr>
     </p:bg>
     <p:spTree>
@@ -7503,7 +7498,7 @@
           <a:bodyPr wrap="square" rtlCol="0" anchor="ctr"/>
           <a:lstStyle/>
           <a:p>
-            <a:pPr indent="0" marL="0">
+            <a:pPr marL="0" indent="0">
               <a:buNone/>
             </a:pPr>
             <a:r>
@@ -7542,7 +7537,7 @@
           <a:bodyPr wrap="square" rtlCol="0" anchor="ctr"/>
           <a:lstStyle/>
           <a:p>
-            <a:pPr indent="0" marL="0">
+            <a:pPr marL="0" indent="0">
               <a:buNone/>
             </a:pPr>
             <a:r>
@@ -7584,175 +7579,17 @@
             <a:prstDash val="solid"/>
           </a:ln>
         </p:spPr>
+        <p:txBody>
+          <a:bodyPr/>
+          <a:lstStyle/>
+          <a:p>
+            <a:endParaRPr lang="en-US"/>
+          </a:p>
+        </p:txBody>
       </p:sp>
       <p:pic>
         <p:nvPicPr>
-          <p:cNvPr id="5" name="Image 0" descr="icon_user.png">    </p:cNvPr>
-          <p:cNvPicPr>
-            <a:picLocks noChangeAspect="1"/>
-          </p:cNvPicPr>
-          <p:nvPr/>
-        </p:nvPicPr>
-        <p:blipFill>
-          <a:blip r:embed="rId1"/>
-          <a:stretch>
-            <a:fillRect/>
-          </a:stretch>
-        </p:blipFill>
-        <p:spPr>
-          <a:xfrm>
-            <a:off x="1417320" y="2468880"/>
-            <a:ext cx="1188720" cy="1188720"/>
-          </a:xfrm>
-          <a:prstGeom prst="rect">
-            <a:avLst/>
-          </a:prstGeom>
-        </p:spPr>
-      </p:pic>
-      <p:sp>
-        <p:nvSpPr>
-          <p:cNvPr id="6" name="Text 3"/>
-          <p:cNvSpPr/>
-          <p:nvPr/>
-        </p:nvSpPr>
-        <p:spPr>
-          <a:xfrm>
-            <a:off x="3657600" y="1920240"/>
-            <a:ext cx="7772400" cy="457200"/>
-          </a:xfrm>
-          <a:prstGeom prst="rect">
-            <a:avLst/>
-          </a:prstGeom>
-          <a:noFill/>
-          <a:ln/>
-        </p:spPr>
-        <p:txBody>
-          <a:bodyPr wrap="square" rtlCol="0" anchor="ctr"/>
-          <a:lstStyle/>
-          <a:p>
-            <a:pPr indent="0" marL="0">
-              <a:buNone/>
-            </a:pPr>
-            <a:r>
-              <a:rPr lang="en-US" sz="2200" b="1" dirty="0">
-                <a:solidFill>
-                  <a:srgbClr val="791716"/>
-                </a:solidFill>
-                <a:latin typeface="Cambria" pitchFamily="34" charset="0"/>
-                <a:ea typeface="Cambria" pitchFamily="34" charset="-122"/>
-                <a:cs typeface="Cambria" pitchFamily="34" charset="-120"/>
-              </a:rPr>
-              <a:t>Professor Fred Agbo, PhD</a:t>
-            </a:r>
-            <a:endParaRPr lang="en-US" sz="2200" dirty="0"/>
-          </a:p>
-        </p:txBody>
-      </p:sp>
-      <p:sp>
-        <p:nvSpPr>
-          <p:cNvPr id="7" name="Text 4"/>
-          <p:cNvSpPr/>
-          <p:nvPr/>
-        </p:nvSpPr>
-        <p:spPr>
-          <a:xfrm>
-            <a:off x="3657600" y="2395728"/>
-            <a:ext cx="7772400" cy="365760"/>
-          </a:xfrm>
-          <a:prstGeom prst="rect">
-            <a:avLst/>
-          </a:prstGeom>
-          <a:noFill/>
-          <a:ln/>
-        </p:spPr>
-        <p:txBody>
-          <a:bodyPr wrap="square" rtlCol="0" anchor="ctr"/>
-          <a:lstStyle/>
-          <a:p>
-            <a:pPr indent="0" marL="0">
-              <a:buNone/>
-            </a:pPr>
-            <a:r>
-              <a:rPr lang="en-US" sz="1400" i="1" dirty="0">
-                <a:solidFill>
-                  <a:srgbClr val="2A2321"/>
-                </a:solidFill>
-                <a:latin typeface="Calibri" pitchFamily="34" charset="0"/>
-                <a:ea typeface="Calibri" pitchFamily="34" charset="-122"/>
-                <a:cs typeface="Calibri" pitchFamily="34" charset="-120"/>
-              </a:rPr>
-              <a:t>Assistant Professor of Computer Science</a:t>
-            </a:r>
-            <a:endParaRPr lang="en-US" sz="1400" dirty="0"/>
-          </a:p>
-        </p:txBody>
-      </p:sp>
-      <p:pic>
-        <p:nvPicPr>
-          <p:cNvPr id="8" name="Image 1" descr="icon_mappin_dark.png">    </p:cNvPr>
-          <p:cNvPicPr>
-            <a:picLocks noChangeAspect="1"/>
-          </p:cNvPicPr>
-          <p:nvPr/>
-        </p:nvPicPr>
-        <p:blipFill>
-          <a:blip r:embed="rId2"/>
-          <a:stretch>
-            <a:fillRect/>
-          </a:stretch>
-        </p:blipFill>
-        <p:spPr>
-          <a:xfrm>
-            <a:off x="3657600" y="3063240"/>
-            <a:ext cx="292608" cy="292608"/>
-          </a:xfrm>
-          <a:prstGeom prst="rect">
-            <a:avLst/>
-          </a:prstGeom>
-        </p:spPr>
-      </p:pic>
-      <p:sp>
-        <p:nvSpPr>
-          <p:cNvPr id="9" name="Text 5"/>
-          <p:cNvSpPr/>
-          <p:nvPr/>
-        </p:nvSpPr>
-        <p:spPr>
-          <a:xfrm>
-            <a:off x="4114800" y="3017520"/>
-            <a:ext cx="7315200" cy="384048"/>
-          </a:xfrm>
-          <a:prstGeom prst="rect">
-            <a:avLst/>
-          </a:prstGeom>
-          <a:noFill/>
-          <a:ln/>
-        </p:spPr>
-        <p:txBody>
-          <a:bodyPr wrap="square" rtlCol="0" anchor="ctr"/>
-          <a:lstStyle/>
-          <a:p>
-            <a:pPr indent="0" marL="0">
-              <a:buNone/>
-            </a:pPr>
-            <a:r>
-              <a:rPr lang="en-US" sz="1300" dirty="0">
-                <a:solidFill>
-                  <a:srgbClr val="2A2321"/>
-                </a:solidFill>
-                <a:latin typeface="Calibri" pitchFamily="34" charset="0"/>
-                <a:ea typeface="Calibri" pitchFamily="34" charset="-122"/>
-                <a:cs typeface="Calibri" pitchFamily="34" charset="-120"/>
-              </a:rPr>
-              <a:t>Ford Hall 209 · Salem</a:t>
-            </a:r>
-            <a:endParaRPr lang="en-US" sz="1300" dirty="0"/>
-          </a:p>
-        </p:txBody>
-      </p:sp>
-      <p:pic>
-        <p:nvPicPr>
-          <p:cNvPr id="10" name="Image 2" descr="icon_mail_dark.png">    </p:cNvPr>
+          <p:cNvPr id="5" name="Image 0" descr="icon_user.png"/>
           <p:cNvPicPr>
             <a:picLocks noChangeAspect="1"/>
           </p:cNvPicPr>
@@ -7766,8 +7603,8 @@
         </p:blipFill>
         <p:spPr>
           <a:xfrm>
-            <a:off x="3657600" y="3566160"/>
-            <a:ext cx="292608" cy="292608"/>
+            <a:off x="1417320" y="2468880"/>
+            <a:ext cx="1188720" cy="1188720"/>
           </a:xfrm>
           <a:prstGeom prst="rect">
             <a:avLst/>
@@ -7776,30 +7613,69 @@
       </p:pic>
       <p:sp>
         <p:nvSpPr>
-          <p:cNvPr id="11" name="Text 6"/>
-          <p:cNvSpPr/>
-          <p:nvPr/>
-        </p:nvSpPr>
-        <p:spPr>
-          <a:xfrm>
-            <a:off x="4114800" y="3520440"/>
-            <a:ext cx="7315200" cy="384048"/>
-          </a:xfrm>
-          <a:prstGeom prst="rect">
-            <a:avLst/>
-          </a:prstGeom>
-          <a:noFill/>
-          <a:ln/>
-        </p:spPr>
-        <p:txBody>
-          <a:bodyPr wrap="square" rtlCol="0" anchor="ctr"/>
-          <a:lstStyle/>
-          <a:p>
-            <a:pPr indent="0" marL="0">
-              <a:buNone/>
-            </a:pPr>
-            <a:r>
-              <a:rPr lang="en-US" sz="1300" dirty="0">
+          <p:cNvPr id="6" name="Text 3"/>
+          <p:cNvSpPr/>
+          <p:nvPr/>
+        </p:nvSpPr>
+        <p:spPr>
+          <a:xfrm>
+            <a:off x="3657600" y="1920240"/>
+            <a:ext cx="7772400" cy="457200"/>
+          </a:xfrm>
+          <a:prstGeom prst="rect">
+            <a:avLst/>
+          </a:prstGeom>
+          <a:noFill/>
+          <a:ln/>
+        </p:spPr>
+        <p:txBody>
+          <a:bodyPr wrap="square" rtlCol="0" anchor="ctr"/>
+          <a:lstStyle/>
+          <a:p>
+            <a:pPr marL="0" indent="0">
+              <a:buNone/>
+            </a:pPr>
+            <a:r>
+              <a:rPr lang="en-US" sz="2200" b="1" dirty="0">
+                <a:solidFill>
+                  <a:srgbClr val="791716"/>
+                </a:solidFill>
+                <a:latin typeface="Cambria" pitchFamily="34" charset="0"/>
+                <a:ea typeface="Cambria" pitchFamily="34" charset="-122"/>
+                <a:cs typeface="Cambria" pitchFamily="34" charset="-120"/>
+              </a:rPr>
+              <a:t>Professor Fred Agbo, PhD</a:t>
+            </a:r>
+            <a:endParaRPr lang="en-US" sz="2200" dirty="0"/>
+          </a:p>
+        </p:txBody>
+      </p:sp>
+      <p:sp>
+        <p:nvSpPr>
+          <p:cNvPr id="7" name="Text 4"/>
+          <p:cNvSpPr/>
+          <p:nvPr/>
+        </p:nvSpPr>
+        <p:spPr>
+          <a:xfrm>
+            <a:off x="3657600" y="2395728"/>
+            <a:ext cx="7772400" cy="365760"/>
+          </a:xfrm>
+          <a:prstGeom prst="rect">
+            <a:avLst/>
+          </a:prstGeom>
+          <a:noFill/>
+          <a:ln/>
+        </p:spPr>
+        <p:txBody>
+          <a:bodyPr wrap="square" rtlCol="0" anchor="ctr"/>
+          <a:lstStyle/>
+          <a:p>
+            <a:pPr marL="0" indent="0">
+              <a:buNone/>
+            </a:pPr>
+            <a:r>
+              <a:rPr lang="en-US" sz="1400" i="1" dirty="0">
                 <a:solidFill>
                   <a:srgbClr val="2A2321"/>
                 </a:solidFill>
@@ -7807,15 +7683,15 @@
                 <a:ea typeface="Calibri" pitchFamily="34" charset="-122"/>
                 <a:cs typeface="Calibri" pitchFamily="34" charset="-120"/>
               </a:rPr>
-              <a:t>fjagbo@willamette.edu</a:t>
-            </a:r>
-            <a:endParaRPr lang="en-US" sz="1300" dirty="0"/>
+              <a:t>Assistant Professor of Computer Science</a:t>
+            </a:r>
+            <a:endParaRPr lang="en-US" sz="1400" dirty="0"/>
           </a:p>
         </p:txBody>
       </p:sp>
       <p:pic>
         <p:nvPicPr>
-          <p:cNvPr id="12" name="Image 3" descr="icon_calendar_dark.png">    </p:cNvPr>
+          <p:cNvPr id="8" name="Image 1" descr="icon_mappin_dark.png"/>
           <p:cNvPicPr>
             <a:picLocks noChangeAspect="1"/>
           </p:cNvPicPr>
@@ -7829,7 +7705,7 @@
         </p:blipFill>
         <p:spPr>
           <a:xfrm>
-            <a:off x="3657600" y="4069080"/>
+            <a:off x="3657600" y="3063240"/>
             <a:ext cx="292608" cy="292608"/>
           </a:xfrm>
           <a:prstGeom prst="rect">
@@ -7839,13 +7715,13 @@
       </p:pic>
       <p:sp>
         <p:nvSpPr>
-          <p:cNvPr id="13" name="Text 7"/>
-          <p:cNvSpPr/>
-          <p:nvPr/>
-        </p:nvSpPr>
-        <p:spPr>
-          <a:xfrm>
-            <a:off x="4114800" y="4023360"/>
+          <p:cNvPr id="9" name="Text 5"/>
+          <p:cNvSpPr/>
+          <p:nvPr/>
+        </p:nvSpPr>
+        <p:spPr>
+          <a:xfrm>
+            <a:off x="4114800" y="3017520"/>
             <a:ext cx="7315200" cy="384048"/>
           </a:xfrm>
           <a:prstGeom prst="rect">
@@ -7858,7 +7734,7 @@
           <a:bodyPr wrap="square" rtlCol="0" anchor="ctr"/>
           <a:lstStyle/>
           <a:p>
-            <a:pPr indent="0" marL="0">
+            <a:pPr marL="0" indent="0">
               <a:buNone/>
             </a:pPr>
             <a:r>
@@ -7870,6 +7746,132 @@
                 <a:ea typeface="Calibri" pitchFamily="34" charset="-122"/>
                 <a:cs typeface="Calibri" pitchFamily="34" charset="-120"/>
               </a:rPr>
+              <a:t>Ford Hall 209 · Salem</a:t>
+            </a:r>
+            <a:endParaRPr lang="en-US" sz="1300" dirty="0"/>
+          </a:p>
+        </p:txBody>
+      </p:sp>
+      <p:pic>
+        <p:nvPicPr>
+          <p:cNvPr id="10" name="Image 2" descr="icon_mail_dark.png"/>
+          <p:cNvPicPr>
+            <a:picLocks noChangeAspect="1"/>
+          </p:cNvPicPr>
+          <p:nvPr/>
+        </p:nvPicPr>
+        <p:blipFill>
+          <a:blip r:embed="rId5"/>
+          <a:stretch>
+            <a:fillRect/>
+          </a:stretch>
+        </p:blipFill>
+        <p:spPr>
+          <a:xfrm>
+            <a:off x="3657600" y="3566160"/>
+            <a:ext cx="292608" cy="292608"/>
+          </a:xfrm>
+          <a:prstGeom prst="rect">
+            <a:avLst/>
+          </a:prstGeom>
+        </p:spPr>
+      </p:pic>
+      <p:sp>
+        <p:nvSpPr>
+          <p:cNvPr id="11" name="Text 6"/>
+          <p:cNvSpPr/>
+          <p:nvPr/>
+        </p:nvSpPr>
+        <p:spPr>
+          <a:xfrm>
+            <a:off x="4114800" y="3520440"/>
+            <a:ext cx="7315200" cy="384048"/>
+          </a:xfrm>
+          <a:prstGeom prst="rect">
+            <a:avLst/>
+          </a:prstGeom>
+          <a:noFill/>
+          <a:ln/>
+        </p:spPr>
+        <p:txBody>
+          <a:bodyPr wrap="square" rtlCol="0" anchor="ctr"/>
+          <a:lstStyle/>
+          <a:p>
+            <a:pPr marL="0" indent="0">
+              <a:buNone/>
+            </a:pPr>
+            <a:r>
+              <a:rPr lang="en-US" sz="1300" dirty="0">
+                <a:solidFill>
+                  <a:srgbClr val="2A2321"/>
+                </a:solidFill>
+                <a:latin typeface="Calibri" pitchFamily="34" charset="0"/>
+                <a:ea typeface="Calibri" pitchFamily="34" charset="-122"/>
+                <a:cs typeface="Calibri" pitchFamily="34" charset="-120"/>
+              </a:rPr>
+              <a:t>fjagbo@willamette.edu</a:t>
+            </a:r>
+            <a:endParaRPr lang="en-US" sz="1300" dirty="0"/>
+          </a:p>
+        </p:txBody>
+      </p:sp>
+      <p:pic>
+        <p:nvPicPr>
+          <p:cNvPr id="12" name="Image 3" descr="icon_calendar_dark.png"/>
+          <p:cNvPicPr>
+            <a:picLocks noChangeAspect="1"/>
+          </p:cNvPicPr>
+          <p:nvPr/>
+        </p:nvPicPr>
+        <p:blipFill>
+          <a:blip r:embed="rId6"/>
+          <a:stretch>
+            <a:fillRect/>
+          </a:stretch>
+        </p:blipFill>
+        <p:spPr>
+          <a:xfrm>
+            <a:off x="3657600" y="4069080"/>
+            <a:ext cx="292608" cy="292608"/>
+          </a:xfrm>
+          <a:prstGeom prst="rect">
+            <a:avLst/>
+          </a:prstGeom>
+        </p:spPr>
+      </p:pic>
+      <p:sp>
+        <p:nvSpPr>
+          <p:cNvPr id="13" name="Text 7"/>
+          <p:cNvSpPr/>
+          <p:nvPr/>
+        </p:nvSpPr>
+        <p:spPr>
+          <a:xfrm>
+            <a:off x="4114800" y="4023360"/>
+            <a:ext cx="7315200" cy="384048"/>
+          </a:xfrm>
+          <a:prstGeom prst="rect">
+            <a:avLst/>
+          </a:prstGeom>
+          <a:noFill/>
+          <a:ln/>
+        </p:spPr>
+        <p:txBody>
+          <a:bodyPr wrap="square" rtlCol="0" anchor="ctr"/>
+          <a:lstStyle/>
+          <a:p>
+            <a:pPr marL="0" indent="0">
+              <a:buNone/>
+            </a:pPr>
+            <a:r>
+              <a:rPr lang="en-US" sz="1300" dirty="0">
+                <a:solidFill>
+                  <a:srgbClr val="2A2321"/>
+                </a:solidFill>
+                <a:latin typeface="Calibri" pitchFamily="34" charset="0"/>
+                <a:ea typeface="Calibri" pitchFamily="34" charset="-122"/>
+                <a:cs typeface="Calibri" pitchFamily="34" charset="-120"/>
+              </a:rPr>
               <a:t>Office hours: 15-min appointments or drop-in — in person, phone, or Google Meet</a:t>
             </a:r>
             <a:endParaRPr lang="en-US" sz="1300" dirty="0"/>
@@ -7888,15 +7890,20 @@
             <a:ext cx="11064240" cy="1234440"/>
           </a:xfrm>
           <a:prstGeom prst="rect">
-            <a:avLst>
-              <a:gd name="adj" fmla="val 7407"/>
-            </a:avLst>
+            <a:avLst/>
           </a:prstGeom>
           <a:solidFill>
             <a:srgbClr val="E4D9BE"/>
           </a:solidFill>
           <a:ln/>
         </p:spPr>
+        <p:txBody>
+          <a:bodyPr/>
+          <a:lstStyle/>
+          <a:p>
+            <a:endParaRPr lang="en-US"/>
+          </a:p>
+        </p:txBody>
       </p:sp>
       <p:sp>
         <p:nvSpPr>
@@ -7919,11 +7926,11 @@
           <a:bodyPr wrap="square" rtlCol="0" anchor="ctr"/>
           <a:lstStyle/>
           <a:p>
-            <a:pPr indent="0" marL="0">
-              <a:buNone/>
-            </a:pPr>
-            <a:r>
-              <a:rPr lang="en-US" sz="1500" b="1" dirty="0">
+            <a:pPr marL="0" indent="0">
+              <a:buNone/>
+            </a:pPr>
+            <a:r>
+              <a:rPr lang="en-US" b="1" dirty="0">
                 <a:solidFill>
                   <a:srgbClr val="791716"/>
                 </a:solidFill>
@@ -7933,7 +7940,7 @@
               </a:rPr>
               <a:t>Think of me as your Product Owner.</a:t>
             </a:r>
-            <a:endParaRPr lang="en-US" sz="1500" dirty="0"/>
+            <a:endParaRPr lang="en-US" dirty="0"/>
           </a:p>
         </p:txBody>
       </p:sp>
@@ -7958,14 +7965,14 @@
           <a:bodyPr wrap="square" rtlCol="0" anchor="ctr"/>
           <a:lstStyle/>
           <a:p>
-            <a:pPr indent="0" marL="0">
+            <a:pPr marL="0" indent="0">
               <a:lnSpc>
                 <a:spcPct val="125000"/>
               </a:lnSpc>
               <a:buNone/>
             </a:pPr>
             <a:r>
-              <a:rPr lang="en-US" sz="1250" dirty="0">
+              <a:rPr lang="en-US" sz="1600" dirty="0">
                 <a:solidFill>
                   <a:srgbClr val="2A2321"/>
                 </a:solidFill>
@@ -7975,7 +7982,7 @@
               </a:rPr>
               <a:t>I'll set direction, review your sprints weekly, and push your project toward something you're proud to ship — but the roadmap, the decisions, and the code are yours.</a:t>
             </a:r>
-            <a:endParaRPr lang="en-US" sz="1250" dirty="0"/>
+            <a:endParaRPr lang="en-US" sz="1600" dirty="0"/>
           </a:p>
         </p:txBody>
       </p:sp>
@@ -8000,7 +8007,7 @@
           <a:bodyPr wrap="square" rtlCol="0" anchor="ctr"/>
           <a:lstStyle/>
           <a:p>
-            <a:pPr indent="0" marL="0">
+            <a:pPr marL="0" indent="0">
               <a:buNone/>
             </a:pPr>
             <a:r>
@@ -8039,7 +8046,7 @@
           <a:bodyPr wrap="square" rtlCol="0" anchor="ctr"/>
           <a:lstStyle/>
           <a:p>
-            <a:pPr algn="r" indent="0" marL="0">
+            <a:pPr marL="0" indent="0" algn="r">
               <a:buNone/>
             </a:pPr>
             <a:r>
@@ -8073,6 +8080,7 @@
         <a:solidFill>
           <a:srgbClr val="791716"/>
         </a:solidFill>
+        <a:effectLst/>
       </p:bgPr>
     </p:bg>
     <p:spTree>
@@ -8110,7 +8118,7 @@
           <a:bodyPr wrap="square" rtlCol="0" anchor="ctr"/>
           <a:lstStyle/>
           <a:p>
-            <a:pPr indent="0" marL="0">
+            <a:pPr marL="0" indent="0">
               <a:buNone/>
             </a:pPr>
             <a:r>
@@ -8149,7 +8157,7 @@
           <a:bodyPr wrap="square" rtlCol="0" anchor="ctr"/>
           <a:lstStyle/>
           <a:p>
-            <a:pPr indent="0" marL="0">
+            <a:pPr marL="0" indent="0">
               <a:buNone/>
             </a:pPr>
             <a:r>
@@ -8188,6 +8196,13 @@
           </a:solidFill>
           <a:ln/>
         </p:spPr>
+        <p:txBody>
+          <a:bodyPr/>
+          <a:lstStyle/>
+          <a:p>
+            <a:endParaRPr lang="en-US"/>
+          </a:p>
+        </p:txBody>
       </p:sp>
       <p:sp>
         <p:nvSpPr>
@@ -8208,310 +8223,17 @@
           </a:solidFill>
           <a:ln/>
         </p:spPr>
+        <p:txBody>
+          <a:bodyPr/>
+          <a:lstStyle/>
+          <a:p>
+            <a:endParaRPr lang="en-US"/>
+          </a:p>
+        </p:txBody>
       </p:sp>
       <p:pic>
         <p:nvPicPr>
-          <p:cNvPr id="6" name="Image 0" descr="icon_flag.png">    </p:cNvPr>
-          <p:cNvPicPr>
-            <a:picLocks noChangeAspect="1"/>
-          </p:cNvPicPr>
-          <p:nvPr/>
-        </p:nvPicPr>
-        <p:blipFill>
-          <a:blip r:embed="rId1"/>
-          <a:stretch>
-            <a:fillRect/>
-          </a:stretch>
-        </p:blipFill>
-        <p:spPr>
-          <a:xfrm>
-            <a:off x="1365199" y="2380183"/>
-            <a:ext cx="451714" cy="451714"/>
-          </a:xfrm>
-          <a:prstGeom prst="rect">
-            <a:avLst/>
-          </a:prstGeom>
-        </p:spPr>
-      </p:pic>
-      <p:sp>
-        <p:nvSpPr>
-          <p:cNvPr id="7" name="Text 4"/>
-          <p:cNvSpPr/>
-          <p:nvPr/>
-        </p:nvSpPr>
-        <p:spPr>
-          <a:xfrm>
-            <a:off x="685800" y="3246120"/>
-            <a:ext cx="1810512" cy="822960"/>
-          </a:xfrm>
-          <a:prstGeom prst="rect">
-            <a:avLst/>
-          </a:prstGeom>
-          <a:noFill/>
-          <a:ln/>
-        </p:spPr>
-        <p:txBody>
-          <a:bodyPr wrap="square" rtlCol="0" anchor="ctr"/>
-          <a:lstStyle/>
-          <a:p>
-            <a:pPr algn="ctr" indent="0" marL="0">
-              <a:lnSpc>
-                <a:spcPct val="110000"/>
-              </a:lnSpc>
-              <a:buNone/>
-            </a:pPr>
-            <a:r>
-              <a:rPr lang="en-US" sz="1400" b="1" dirty="0">
-                <a:solidFill>
-                  <a:srgbClr val="FFFFFF"/>
-                </a:solidFill>
-                <a:latin typeface="Cambria" pitchFamily="34" charset="0"/>
-                <a:ea typeface="Cambria" pitchFamily="34" charset="-122"/>
-                <a:cs typeface="Cambria" pitchFamily="34" charset="-120"/>
-              </a:rPr>
-              <a:t>A complete application</a:t>
-            </a:r>
-            <a:endParaRPr lang="en-US" sz="1400" dirty="0"/>
-          </a:p>
-        </p:txBody>
-      </p:sp>
-      <p:sp>
-        <p:nvSpPr>
-          <p:cNvPr id="8" name="Text 5"/>
-          <p:cNvSpPr/>
-          <p:nvPr/>
-        </p:nvSpPr>
-        <p:spPr>
-          <a:xfrm>
-            <a:off x="685800" y="4160520"/>
-            <a:ext cx="1810512" cy="1280160"/>
-          </a:xfrm>
-          <a:prstGeom prst="rect">
-            <a:avLst/>
-          </a:prstGeom>
-          <a:noFill/>
-          <a:ln/>
-        </p:spPr>
-        <p:txBody>
-          <a:bodyPr wrap="square" rtlCol="0" anchor="ctr"/>
-          <a:lstStyle/>
-          <a:p>
-            <a:pPr algn="ctr" indent="0" marL="0">
-              <a:lnSpc>
-                <a:spcPct val="125000"/>
-              </a:lnSpc>
-              <a:buNone/>
-            </a:pPr>
-            <a:r>
-              <a:rPr lang="en-US" sz="1100" dirty="0">
-                <a:solidFill>
-                  <a:srgbClr val="E4D9BE"/>
-                </a:solidFill>
-                <a:latin typeface="Calibri" pitchFamily="34" charset="0"/>
-                <a:ea typeface="Calibri" pitchFamily="34" charset="-122"/>
-                <a:cs typeface="Calibri" pitchFamily="34" charset="-120"/>
-              </a:rPr>
-              <a:t>Full-stack, concept through deployment</a:t>
-            </a:r>
-            <a:endParaRPr lang="en-US" sz="1100" dirty="0"/>
-          </a:p>
-        </p:txBody>
-      </p:sp>
-      <p:sp>
-        <p:nvSpPr>
-          <p:cNvPr id="9" name="Shape 6"/>
-          <p:cNvSpPr/>
-          <p:nvPr/>
-        </p:nvSpPr>
-        <p:spPr>
-          <a:xfrm>
-            <a:off x="2834640" y="1828800"/>
-            <a:ext cx="2084832" cy="3840480"/>
-          </a:xfrm>
-          <a:prstGeom prst="roundRect">
-            <a:avLst>
-              <a:gd name="adj" fmla="val 5263"/>
-            </a:avLst>
-          </a:prstGeom>
-          <a:solidFill>
-            <a:srgbClr val="540F0F"/>
-          </a:solidFill>
-          <a:ln/>
-        </p:spPr>
-      </p:sp>
-      <p:sp>
-        <p:nvSpPr>
-          <p:cNvPr id="10" name="Shape 7"/>
-          <p:cNvSpPr/>
-          <p:nvPr/>
-        </p:nvSpPr>
-        <p:spPr>
-          <a:xfrm>
-            <a:off x="3442716" y="2171700"/>
-            <a:ext cx="868680" cy="868680"/>
-          </a:xfrm>
-          <a:prstGeom prst="ellipse">
-            <a:avLst/>
-          </a:prstGeom>
-          <a:solidFill>
-            <a:srgbClr val="C0AC7E"/>
-          </a:solidFill>
-          <a:ln/>
-        </p:spPr>
-      </p:sp>
-      <p:pic>
-        <p:nvPicPr>
-          <p:cNvPr id="11" name="Image 1" descr="icon_checkcircle.png">    </p:cNvPr>
-          <p:cNvPicPr>
-            <a:picLocks noChangeAspect="1"/>
-          </p:cNvPicPr>
-          <p:nvPr/>
-        </p:nvPicPr>
-        <p:blipFill>
-          <a:blip r:embed="rId2"/>
-          <a:stretch>
-            <a:fillRect/>
-          </a:stretch>
-        </p:blipFill>
-        <p:spPr>
-          <a:xfrm>
-            <a:off x="3651199" y="2380183"/>
-            <a:ext cx="451714" cy="451714"/>
-          </a:xfrm>
-          <a:prstGeom prst="rect">
-            <a:avLst/>
-          </a:prstGeom>
-        </p:spPr>
-      </p:pic>
-      <p:sp>
-        <p:nvSpPr>
-          <p:cNvPr id="12" name="Text 8"/>
-          <p:cNvSpPr/>
-          <p:nvPr/>
-        </p:nvSpPr>
-        <p:spPr>
-          <a:xfrm>
-            <a:off x="2971800" y="3246120"/>
-            <a:ext cx="1810512" cy="822960"/>
-          </a:xfrm>
-          <a:prstGeom prst="rect">
-            <a:avLst/>
-          </a:prstGeom>
-          <a:noFill/>
-          <a:ln/>
-        </p:spPr>
-        <p:txBody>
-          <a:bodyPr wrap="square" rtlCol="0" anchor="ctr"/>
-          <a:lstStyle/>
-          <a:p>
-            <a:pPr algn="ctr" indent="0" marL="0">
-              <a:lnSpc>
-                <a:spcPct val="110000"/>
-              </a:lnSpc>
-              <a:buNone/>
-            </a:pPr>
-            <a:r>
-              <a:rPr lang="en-US" sz="1400" b="1" dirty="0">
-                <a:solidFill>
-                  <a:srgbClr val="FFFFFF"/>
-                </a:solidFill>
-                <a:latin typeface="Cambria" pitchFamily="34" charset="0"/>
-                <a:ea typeface="Cambria" pitchFamily="34" charset="-122"/>
-                <a:cs typeface="Cambria" pitchFamily="34" charset="-120"/>
-              </a:rPr>
-              <a:t>Modern dev practices</a:t>
-            </a:r>
-            <a:endParaRPr lang="en-US" sz="1400" dirty="0"/>
-          </a:p>
-        </p:txBody>
-      </p:sp>
-      <p:sp>
-        <p:nvSpPr>
-          <p:cNvPr id="13" name="Text 9"/>
-          <p:cNvSpPr/>
-          <p:nvPr/>
-        </p:nvSpPr>
-        <p:spPr>
-          <a:xfrm>
-            <a:off x="2971800" y="4160520"/>
-            <a:ext cx="1810512" cy="1280160"/>
-          </a:xfrm>
-          <a:prstGeom prst="rect">
-            <a:avLst/>
-          </a:prstGeom>
-          <a:noFill/>
-          <a:ln/>
-        </p:spPr>
-        <p:txBody>
-          <a:bodyPr wrap="square" rtlCol="0" anchor="ctr"/>
-          <a:lstStyle/>
-          <a:p>
-            <a:pPr algn="ctr" indent="0" marL="0">
-              <a:lnSpc>
-                <a:spcPct val="125000"/>
-              </a:lnSpc>
-              <a:buNone/>
-            </a:pPr>
-            <a:r>
-              <a:rPr lang="en-US" sz="1100" dirty="0">
-                <a:solidFill>
-                  <a:srgbClr val="E4D9BE"/>
-                </a:solidFill>
-                <a:latin typeface="Calibri" pitchFamily="34" charset="0"/>
-                <a:ea typeface="Calibri" pitchFamily="34" charset="-122"/>
-                <a:cs typeface="Calibri" pitchFamily="34" charset="-120"/>
-              </a:rPr>
-              <a:t>Proven proficiency across the SDLC</a:t>
-            </a:r>
-            <a:endParaRPr lang="en-US" sz="1100" dirty="0"/>
-          </a:p>
-        </p:txBody>
-      </p:sp>
-      <p:sp>
-        <p:nvSpPr>
-          <p:cNvPr id="14" name="Shape 10"/>
-          <p:cNvSpPr/>
-          <p:nvPr/>
-        </p:nvSpPr>
-        <p:spPr>
-          <a:xfrm>
-            <a:off x="5120640" y="1828800"/>
-            <a:ext cx="2084832" cy="3840480"/>
-          </a:xfrm>
-          <a:prstGeom prst="roundRect">
-            <a:avLst>
-              <a:gd name="adj" fmla="val 5263"/>
-            </a:avLst>
-          </a:prstGeom>
-          <a:solidFill>
-            <a:srgbClr val="540F0F"/>
-          </a:solidFill>
-          <a:ln/>
-        </p:spPr>
-      </p:sp>
-      <p:sp>
-        <p:nvSpPr>
-          <p:cNvPr id="15" name="Shape 11"/>
-          <p:cNvSpPr/>
-          <p:nvPr/>
-        </p:nvSpPr>
-        <p:spPr>
-          <a:xfrm>
-            <a:off x="5728716" y="2171700"/>
-            <a:ext cx="868680" cy="868680"/>
-          </a:xfrm>
-          <a:prstGeom prst="ellipse">
-            <a:avLst/>
-          </a:prstGeom>
-          <a:solidFill>
-            <a:srgbClr val="C0AC7E"/>
-          </a:solidFill>
-          <a:ln/>
-        </p:spPr>
-      </p:sp>
-      <p:pic>
-        <p:nvPicPr>
-          <p:cNvPr id="16" name="Image 2" descr="icon_bookopen.png">    </p:cNvPr>
+          <p:cNvPr id="6" name="Image 0" descr="icon_flag.png"/>
           <p:cNvPicPr>
             <a:picLocks noChangeAspect="1"/>
           </p:cNvPicPr>
@@ -8525,7 +8247,7 @@
         </p:blipFill>
         <p:spPr>
           <a:xfrm>
-            <a:off x="5937199" y="2380183"/>
+            <a:off x="1365199" y="2380183"/>
             <a:ext cx="451714" cy="451714"/>
           </a:xfrm>
           <a:prstGeom prst="rect">
@@ -8535,13 +8257,13 @@
       </p:pic>
       <p:sp>
         <p:nvSpPr>
-          <p:cNvPr id="17" name="Text 12"/>
-          <p:cNvSpPr/>
-          <p:nvPr/>
-        </p:nvSpPr>
-        <p:spPr>
-          <a:xfrm>
-            <a:off x="5257800" y="3246120"/>
+          <p:cNvPr id="7" name="Text 4"/>
+          <p:cNvSpPr/>
+          <p:nvPr/>
+        </p:nvSpPr>
+        <p:spPr>
+          <a:xfrm>
+            <a:off x="685800" y="3246120"/>
             <a:ext cx="1810512" cy="822960"/>
           </a:xfrm>
           <a:prstGeom prst="rect">
@@ -8554,7 +8276,7 @@
           <a:bodyPr wrap="square" rtlCol="0" anchor="ctr"/>
           <a:lstStyle/>
           <a:p>
-            <a:pPr algn="ctr" indent="0" marL="0">
+            <a:pPr marL="0" indent="0" algn="ctr">
               <a:lnSpc>
                 <a:spcPct val="110000"/>
               </a:lnSpc>
@@ -8569,7 +8291,7 @@
                 <a:ea typeface="Cambria" pitchFamily="34" charset="-122"/>
                 <a:cs typeface="Cambria" pitchFamily="34" charset="-120"/>
               </a:rPr>
-              <a:t>Real documentation</a:t>
+              <a:t>A complete application</a:t>
             </a:r>
             <a:endParaRPr lang="en-US" sz="1400" dirty="0"/>
           </a:p>
@@ -8577,13 +8299,13 @@
       </p:sp>
       <p:sp>
         <p:nvSpPr>
-          <p:cNvPr id="18" name="Text 13"/>
-          <p:cNvSpPr/>
-          <p:nvPr/>
-        </p:nvSpPr>
-        <p:spPr>
-          <a:xfrm>
-            <a:off x="5257800" y="4160520"/>
+          <p:cNvPr id="8" name="Text 5"/>
+          <p:cNvSpPr/>
+          <p:nvPr/>
+        </p:nvSpPr>
+        <p:spPr>
+          <a:xfrm>
+            <a:off x="685800" y="4160520"/>
             <a:ext cx="1810512" cy="1280160"/>
           </a:xfrm>
           <a:prstGeom prst="rect">
@@ -8596,14 +8318,14 @@
           <a:bodyPr wrap="square" rtlCol="0" anchor="ctr"/>
           <a:lstStyle/>
           <a:p>
-            <a:pPr algn="ctr" indent="0" marL="0">
+            <a:pPr marL="0" indent="0" algn="ctr">
               <a:lnSpc>
                 <a:spcPct val="125000"/>
               </a:lnSpc>
               <a:buNone/>
             </a:pPr>
             <a:r>
-              <a:rPr lang="en-US" sz="1100" dirty="0">
+              <a:rPr lang="en-US" sz="1600" dirty="0">
                 <a:solidFill>
                   <a:srgbClr val="E4D9BE"/>
                 </a:solidFill>
@@ -8611,21 +8333,21 @@
                 <a:ea typeface="Calibri" pitchFamily="34" charset="-122"/>
                 <a:cs typeface="Calibri" pitchFamily="34" charset="-120"/>
               </a:rPr>
-              <a:t>Technical docs that outlast the course</a:t>
-            </a:r>
-            <a:endParaRPr lang="en-US" sz="1100" dirty="0"/>
-          </a:p>
-        </p:txBody>
-      </p:sp>
-      <p:sp>
-        <p:nvSpPr>
-          <p:cNvPr id="19" name="Shape 14"/>
-          <p:cNvSpPr/>
-          <p:nvPr/>
-        </p:nvSpPr>
-        <p:spPr>
-          <a:xfrm>
-            <a:off x="7406640" y="1828800"/>
+              <a:t>Full-stack, concept through deployment</a:t>
+            </a:r>
+            <a:endParaRPr lang="en-US" sz="1600" dirty="0"/>
+          </a:p>
+        </p:txBody>
+      </p:sp>
+      <p:sp>
+        <p:nvSpPr>
+          <p:cNvPr id="9" name="Shape 6"/>
+          <p:cNvSpPr/>
+          <p:nvPr/>
+        </p:nvSpPr>
+        <p:spPr>
+          <a:xfrm>
+            <a:off x="2834640" y="1828800"/>
             <a:ext cx="2084832" cy="3840480"/>
           </a:xfrm>
           <a:prstGeom prst="roundRect">
@@ -8638,16 +8360,23 @@
           </a:solidFill>
           <a:ln/>
         </p:spPr>
-      </p:sp>
-      <p:sp>
-        <p:nvSpPr>
-          <p:cNvPr id="20" name="Shape 15"/>
-          <p:cNvSpPr/>
-          <p:nvPr/>
-        </p:nvSpPr>
-        <p:spPr>
-          <a:xfrm>
-            <a:off x="8014716" y="2171700"/>
+        <p:txBody>
+          <a:bodyPr/>
+          <a:lstStyle/>
+          <a:p>
+            <a:endParaRPr lang="en-US"/>
+          </a:p>
+        </p:txBody>
+      </p:sp>
+      <p:sp>
+        <p:nvSpPr>
+          <p:cNvPr id="10" name="Shape 7"/>
+          <p:cNvSpPr/>
+          <p:nvPr/>
+        </p:nvSpPr>
+        <p:spPr>
+          <a:xfrm>
+            <a:off x="3442716" y="2171700"/>
             <a:ext cx="868680" cy="868680"/>
           </a:xfrm>
           <a:prstGeom prst="ellipse">
@@ -8658,10 +8387,17 @@
           </a:solidFill>
           <a:ln/>
         </p:spPr>
+        <p:txBody>
+          <a:bodyPr/>
+          <a:lstStyle/>
+          <a:p>
+            <a:endParaRPr lang="en-US"/>
+          </a:p>
+        </p:txBody>
       </p:sp>
       <p:pic>
         <p:nvPicPr>
-          <p:cNvPr id="21" name="Image 3" descr="icon_messagecircle.png">    </p:cNvPr>
+          <p:cNvPr id="11" name="Image 1" descr="icon_checkcircle.png"/>
           <p:cNvPicPr>
             <a:picLocks noChangeAspect="1"/>
           </p:cNvPicPr>
@@ -8675,7 +8411,7 @@
         </p:blipFill>
         <p:spPr>
           <a:xfrm>
-            <a:off x="8223199" y="2380183"/>
+            <a:off x="3651199" y="2380183"/>
             <a:ext cx="451714" cy="451714"/>
           </a:xfrm>
           <a:prstGeom prst="rect">
@@ -8685,13 +8421,13 @@
       </p:pic>
       <p:sp>
         <p:nvSpPr>
-          <p:cNvPr id="22" name="Text 16"/>
-          <p:cNvSpPr/>
-          <p:nvPr/>
-        </p:nvSpPr>
-        <p:spPr>
-          <a:xfrm>
-            <a:off x="7543800" y="3246120"/>
+          <p:cNvPr id="12" name="Text 8"/>
+          <p:cNvSpPr/>
+          <p:nvPr/>
+        </p:nvSpPr>
+        <p:spPr>
+          <a:xfrm>
+            <a:off x="2971800" y="3246120"/>
             <a:ext cx="1810512" cy="822960"/>
           </a:xfrm>
           <a:prstGeom prst="rect">
@@ -8704,7 +8440,7 @@
           <a:bodyPr wrap="square" rtlCol="0" anchor="ctr"/>
           <a:lstStyle/>
           <a:p>
-            <a:pPr algn="ctr" indent="0" marL="0">
+            <a:pPr marL="0" indent="0" algn="ctr">
               <a:lnSpc>
                 <a:spcPct val="110000"/>
               </a:lnSpc>
@@ -8719,7 +8455,7 @@
                 <a:ea typeface="Cambria" pitchFamily="34" charset="-122"/>
                 <a:cs typeface="Cambria" pitchFamily="34" charset="-120"/>
               </a:rPr>
-              <a:t>Presentation skill</a:t>
+              <a:t>Modern dev practices</a:t>
             </a:r>
             <a:endParaRPr lang="en-US" sz="1400" dirty="0"/>
           </a:p>
@@ -8727,13 +8463,13 @@
       </p:sp>
       <p:sp>
         <p:nvSpPr>
-          <p:cNvPr id="23" name="Text 17"/>
-          <p:cNvSpPr/>
-          <p:nvPr/>
-        </p:nvSpPr>
-        <p:spPr>
-          <a:xfrm>
-            <a:off x="7543800" y="4160520"/>
+          <p:cNvPr id="13" name="Text 9"/>
+          <p:cNvSpPr/>
+          <p:nvPr/>
+        </p:nvSpPr>
+        <p:spPr>
+          <a:xfrm>
+            <a:off x="2971800" y="4160520"/>
             <a:ext cx="1810512" cy="1280160"/>
           </a:xfrm>
           <a:prstGeom prst="rect">
@@ -8746,14 +8482,14 @@
           <a:bodyPr wrap="square" rtlCol="0" anchor="ctr"/>
           <a:lstStyle/>
           <a:p>
-            <a:pPr algn="ctr" indent="0" marL="0">
+            <a:pPr marL="0" indent="0" algn="ctr">
               <a:lnSpc>
                 <a:spcPct val="125000"/>
               </a:lnSpc>
               <a:buNone/>
             </a:pPr>
             <a:r>
-              <a:rPr lang="en-US" sz="1100" dirty="0">
+              <a:rPr lang="en-US" sz="1600" dirty="0">
                 <a:solidFill>
                   <a:srgbClr val="E4D9BE"/>
                 </a:solidFill>
@@ -8761,21 +8497,21 @@
                 <a:ea typeface="Calibri" pitchFamily="34" charset="-122"/>
                 <a:cs typeface="Calibri" pitchFamily="34" charset="-120"/>
               </a:rPr>
-              <a:t>For technical and general audiences alike</a:t>
-            </a:r>
-            <a:endParaRPr lang="en-US" sz="1100" dirty="0"/>
-          </a:p>
-        </p:txBody>
-      </p:sp>
-      <p:sp>
-        <p:nvSpPr>
-          <p:cNvPr id="24" name="Shape 18"/>
-          <p:cNvSpPr/>
-          <p:nvPr/>
-        </p:nvSpPr>
-        <p:spPr>
-          <a:xfrm>
-            <a:off x="9692640" y="1828800"/>
+              <a:t>Proven proficiency across the SDLC</a:t>
+            </a:r>
+            <a:endParaRPr lang="en-US" sz="1600" dirty="0"/>
+          </a:p>
+        </p:txBody>
+      </p:sp>
+      <p:sp>
+        <p:nvSpPr>
+          <p:cNvPr id="14" name="Shape 10"/>
+          <p:cNvSpPr/>
+          <p:nvPr/>
+        </p:nvSpPr>
+        <p:spPr>
+          <a:xfrm>
+            <a:off x="5120640" y="1828800"/>
             <a:ext cx="2084832" cy="3840480"/>
           </a:xfrm>
           <a:prstGeom prst="roundRect">
@@ -8788,16 +8524,23 @@
           </a:solidFill>
           <a:ln/>
         </p:spPr>
-      </p:sp>
-      <p:sp>
-        <p:nvSpPr>
-          <p:cNvPr id="25" name="Shape 19"/>
-          <p:cNvSpPr/>
-          <p:nvPr/>
-        </p:nvSpPr>
-        <p:spPr>
-          <a:xfrm>
-            <a:off x="10300716" y="2171700"/>
+        <p:txBody>
+          <a:bodyPr/>
+          <a:lstStyle/>
+          <a:p>
+            <a:endParaRPr lang="en-US"/>
+          </a:p>
+        </p:txBody>
+      </p:sp>
+      <p:sp>
+        <p:nvSpPr>
+          <p:cNvPr id="15" name="Shape 11"/>
+          <p:cNvSpPr/>
+          <p:nvPr/>
+        </p:nvSpPr>
+        <p:spPr>
+          <a:xfrm>
+            <a:off x="5728716" y="2171700"/>
             <a:ext cx="868680" cy="868680"/>
           </a:xfrm>
           <a:prstGeom prst="ellipse">
@@ -8808,10 +8551,17 @@
           </a:solidFill>
           <a:ln/>
         </p:spPr>
+        <p:txBody>
+          <a:bodyPr/>
+          <a:lstStyle/>
+          <a:p>
+            <a:endParaRPr lang="en-US"/>
+          </a:p>
+        </p:txBody>
       </p:sp>
       <p:pic>
         <p:nvPicPr>
-          <p:cNvPr id="26" name="Image 4" descr="icon_award.png">    </p:cNvPr>
+          <p:cNvPr id="16" name="Image 2" descr="icon_bookopen.png"/>
           <p:cNvPicPr>
             <a:picLocks noChangeAspect="1"/>
           </p:cNvPicPr>
@@ -8825,7 +8575,7 @@
         </p:blipFill>
         <p:spPr>
           <a:xfrm>
-            <a:off x="10509199" y="2380183"/>
+            <a:off x="5937199" y="2380183"/>
             <a:ext cx="451714" cy="451714"/>
           </a:xfrm>
           <a:prstGeom prst="rect">
@@ -8835,13 +8585,13 @@
       </p:pic>
       <p:sp>
         <p:nvSpPr>
-          <p:cNvPr id="27" name="Text 20"/>
-          <p:cNvSpPr/>
-          <p:nvPr/>
-        </p:nvSpPr>
-        <p:spPr>
-          <a:xfrm>
-            <a:off x="9829800" y="3246120"/>
+          <p:cNvPr id="17" name="Text 12"/>
+          <p:cNvSpPr/>
+          <p:nvPr/>
+        </p:nvSpPr>
+        <p:spPr>
+          <a:xfrm>
+            <a:off x="5257800" y="3246120"/>
             <a:ext cx="1810512" cy="822960"/>
           </a:xfrm>
           <a:prstGeom prst="rect">
@@ -8854,7 +8604,7 @@
           <a:bodyPr wrap="square" rtlCol="0" anchor="ctr"/>
           <a:lstStyle/>
           <a:p>
-            <a:pPr algn="ctr" indent="0" marL="0">
+            <a:pPr marL="0" indent="0" algn="ctr">
               <a:lnSpc>
                 <a:spcPct val="110000"/>
               </a:lnSpc>
@@ -8869,7 +8619,7 @@
                 <a:ea typeface="Cambria" pitchFamily="34" charset="-122"/>
                 <a:cs typeface="Cambria" pitchFamily="34" charset="-120"/>
               </a:rPr>
-              <a:t>A portfolio piece</a:t>
+              <a:t>Real documentation</a:t>
             </a:r>
             <a:endParaRPr lang="en-US" sz="1400" dirty="0"/>
           </a:p>
@@ -8877,13 +8627,13 @@
       </p:sp>
       <p:sp>
         <p:nvSpPr>
-          <p:cNvPr id="28" name="Text 21"/>
-          <p:cNvSpPr/>
-          <p:nvPr/>
-        </p:nvSpPr>
-        <p:spPr>
-          <a:xfrm>
-            <a:off x="9829800" y="4160520"/>
+          <p:cNvPr id="18" name="Text 13"/>
+          <p:cNvSpPr/>
+          <p:nvPr/>
+        </p:nvSpPr>
+        <p:spPr>
+          <a:xfrm>
+            <a:off x="5257800" y="4160520"/>
             <a:ext cx="1810512" cy="1280160"/>
           </a:xfrm>
           <a:prstGeom prst="rect">
@@ -8896,14 +8646,14 @@
           <a:bodyPr wrap="square" rtlCol="0" anchor="ctr"/>
           <a:lstStyle/>
           <a:p>
-            <a:pPr algn="ctr" indent="0" marL="0">
+            <a:pPr marL="0" indent="0" algn="ctr">
               <a:lnSpc>
                 <a:spcPct val="125000"/>
               </a:lnSpc>
               <a:buNone/>
             </a:pPr>
             <a:r>
-              <a:rPr lang="en-US" sz="1100" dirty="0">
+              <a:rPr lang="en-US" sz="1600" dirty="0">
                 <a:solidFill>
                   <a:srgbClr val="E4D9BE"/>
                 </a:solidFill>
@@ -8911,38 +8661,163 @@
                 <a:ea typeface="Calibri" pitchFamily="34" charset="-122"/>
                 <a:cs typeface="Calibri" pitchFamily="34" charset="-120"/>
               </a:rPr>
-              <a:t>Proof of what you can actually build</a:t>
-            </a:r>
-            <a:endParaRPr lang="en-US" sz="1100" dirty="0"/>
-          </a:p>
-        </p:txBody>
-      </p:sp>
-      <p:sp>
-        <p:nvSpPr>
-          <p:cNvPr id="29" name="Text 22"/>
-          <p:cNvSpPr/>
-          <p:nvPr/>
-        </p:nvSpPr>
-        <p:spPr>
-          <a:xfrm>
-            <a:off x="457200" y="6528816"/>
-            <a:ext cx="7315200" cy="274320"/>
-          </a:xfrm>
-          <a:prstGeom prst="rect">
-            <a:avLst/>
-          </a:prstGeom>
-          <a:noFill/>
-          <a:ln/>
-        </p:spPr>
-        <p:txBody>
-          <a:bodyPr wrap="square" rtlCol="0" anchor="ctr"/>
-          <a:lstStyle/>
-          <a:p>
-            <a:pPr indent="0" marL="0">
-              <a:buNone/>
-            </a:pPr>
-            <a:r>
-              <a:rPr lang="en-US" sz="1000" i="1" dirty="0">
+              <a:t>Technical docs that outlast the course</a:t>
+            </a:r>
+            <a:endParaRPr lang="en-US" sz="1600" dirty="0"/>
+          </a:p>
+        </p:txBody>
+      </p:sp>
+      <p:sp>
+        <p:nvSpPr>
+          <p:cNvPr id="19" name="Shape 14"/>
+          <p:cNvSpPr/>
+          <p:nvPr/>
+        </p:nvSpPr>
+        <p:spPr>
+          <a:xfrm>
+            <a:off x="7406640" y="1828800"/>
+            <a:ext cx="2084832" cy="3840480"/>
+          </a:xfrm>
+          <a:prstGeom prst="roundRect">
+            <a:avLst>
+              <a:gd name="adj" fmla="val 5263"/>
+            </a:avLst>
+          </a:prstGeom>
+          <a:solidFill>
+            <a:srgbClr val="540F0F"/>
+          </a:solidFill>
+          <a:ln/>
+        </p:spPr>
+        <p:txBody>
+          <a:bodyPr/>
+          <a:lstStyle/>
+          <a:p>
+            <a:endParaRPr lang="en-US"/>
+          </a:p>
+        </p:txBody>
+      </p:sp>
+      <p:sp>
+        <p:nvSpPr>
+          <p:cNvPr id="20" name="Shape 15"/>
+          <p:cNvSpPr/>
+          <p:nvPr/>
+        </p:nvSpPr>
+        <p:spPr>
+          <a:xfrm>
+            <a:off x="8014716" y="2171700"/>
+            <a:ext cx="868680" cy="868680"/>
+          </a:xfrm>
+          <a:prstGeom prst="ellipse">
+            <a:avLst/>
+          </a:prstGeom>
+          <a:solidFill>
+            <a:srgbClr val="C0AC7E"/>
+          </a:solidFill>
+          <a:ln/>
+        </p:spPr>
+        <p:txBody>
+          <a:bodyPr/>
+          <a:lstStyle/>
+          <a:p>
+            <a:endParaRPr lang="en-US"/>
+          </a:p>
+        </p:txBody>
+      </p:sp>
+      <p:pic>
+        <p:nvPicPr>
+          <p:cNvPr id="21" name="Image 3" descr="icon_messagecircle.png"/>
+          <p:cNvPicPr>
+            <a:picLocks noChangeAspect="1"/>
+          </p:cNvPicPr>
+          <p:nvPr/>
+        </p:nvPicPr>
+        <p:blipFill>
+          <a:blip r:embed="rId6"/>
+          <a:stretch>
+            <a:fillRect/>
+          </a:stretch>
+        </p:blipFill>
+        <p:spPr>
+          <a:xfrm>
+            <a:off x="8223199" y="2380183"/>
+            <a:ext cx="451714" cy="451714"/>
+          </a:xfrm>
+          <a:prstGeom prst="rect">
+            <a:avLst/>
+          </a:prstGeom>
+        </p:spPr>
+      </p:pic>
+      <p:sp>
+        <p:nvSpPr>
+          <p:cNvPr id="22" name="Text 16"/>
+          <p:cNvSpPr/>
+          <p:nvPr/>
+        </p:nvSpPr>
+        <p:spPr>
+          <a:xfrm>
+            <a:off x="7543800" y="3246120"/>
+            <a:ext cx="1810512" cy="822960"/>
+          </a:xfrm>
+          <a:prstGeom prst="rect">
+            <a:avLst/>
+          </a:prstGeom>
+          <a:noFill/>
+          <a:ln/>
+        </p:spPr>
+        <p:txBody>
+          <a:bodyPr wrap="square" rtlCol="0" anchor="ctr"/>
+          <a:lstStyle/>
+          <a:p>
+            <a:pPr marL="0" indent="0" algn="ctr">
+              <a:lnSpc>
+                <a:spcPct val="110000"/>
+              </a:lnSpc>
+              <a:buNone/>
+            </a:pPr>
+            <a:r>
+              <a:rPr lang="en-US" sz="1400" b="1" dirty="0">
+                <a:solidFill>
+                  <a:srgbClr val="FFFFFF"/>
+                </a:solidFill>
+                <a:latin typeface="Cambria" pitchFamily="34" charset="0"/>
+                <a:ea typeface="Cambria" pitchFamily="34" charset="-122"/>
+                <a:cs typeface="Cambria" pitchFamily="34" charset="-120"/>
+              </a:rPr>
+              <a:t>Presentation skill</a:t>
+            </a:r>
+            <a:endParaRPr lang="en-US" sz="1400" dirty="0"/>
+          </a:p>
+        </p:txBody>
+      </p:sp>
+      <p:sp>
+        <p:nvSpPr>
+          <p:cNvPr id="23" name="Text 17"/>
+          <p:cNvSpPr/>
+          <p:nvPr/>
+        </p:nvSpPr>
+        <p:spPr>
+          <a:xfrm>
+            <a:off x="7543800" y="4160520"/>
+            <a:ext cx="1810512" cy="1280160"/>
+          </a:xfrm>
+          <a:prstGeom prst="rect">
+            <a:avLst/>
+          </a:prstGeom>
+          <a:noFill/>
+          <a:ln/>
+        </p:spPr>
+        <p:txBody>
+          <a:bodyPr wrap="square" rtlCol="0" anchor="ctr"/>
+          <a:lstStyle/>
+          <a:p>
+            <a:pPr marL="0" indent="0" algn="ctr">
+              <a:lnSpc>
+                <a:spcPct val="125000"/>
+              </a:lnSpc>
+              <a:buNone/>
+            </a:pPr>
+            <a:r>
+              <a:rPr lang="en-US" sz="1600" dirty="0">
                 <a:solidFill>
                   <a:srgbClr val="E4D9BE"/>
                 </a:solidFill>
@@ -8950,6 +8825,209 @@
                 <a:ea typeface="Calibri" pitchFamily="34" charset="-122"/>
                 <a:cs typeface="Calibri" pitchFamily="34" charset="-120"/>
               </a:rPr>
+              <a:t>For technical and general audiences alike</a:t>
+            </a:r>
+            <a:endParaRPr lang="en-US" sz="1600" dirty="0"/>
+          </a:p>
+        </p:txBody>
+      </p:sp>
+      <p:sp>
+        <p:nvSpPr>
+          <p:cNvPr id="24" name="Shape 18"/>
+          <p:cNvSpPr/>
+          <p:nvPr/>
+        </p:nvSpPr>
+        <p:spPr>
+          <a:xfrm>
+            <a:off x="9692640" y="1828800"/>
+            <a:ext cx="2084832" cy="3840480"/>
+          </a:xfrm>
+          <a:prstGeom prst="roundRect">
+            <a:avLst>
+              <a:gd name="adj" fmla="val 5263"/>
+            </a:avLst>
+          </a:prstGeom>
+          <a:solidFill>
+            <a:srgbClr val="540F0F"/>
+          </a:solidFill>
+          <a:ln/>
+        </p:spPr>
+        <p:txBody>
+          <a:bodyPr/>
+          <a:lstStyle/>
+          <a:p>
+            <a:endParaRPr lang="en-US"/>
+          </a:p>
+        </p:txBody>
+      </p:sp>
+      <p:sp>
+        <p:nvSpPr>
+          <p:cNvPr id="25" name="Shape 19"/>
+          <p:cNvSpPr/>
+          <p:nvPr/>
+        </p:nvSpPr>
+        <p:spPr>
+          <a:xfrm>
+            <a:off x="10300716" y="2171700"/>
+            <a:ext cx="868680" cy="868680"/>
+          </a:xfrm>
+          <a:prstGeom prst="ellipse">
+            <a:avLst/>
+          </a:prstGeom>
+          <a:solidFill>
+            <a:srgbClr val="C0AC7E"/>
+          </a:solidFill>
+          <a:ln/>
+        </p:spPr>
+        <p:txBody>
+          <a:bodyPr/>
+          <a:lstStyle/>
+          <a:p>
+            <a:endParaRPr lang="en-US"/>
+          </a:p>
+        </p:txBody>
+      </p:sp>
+      <p:pic>
+        <p:nvPicPr>
+          <p:cNvPr id="26" name="Image 4" descr="icon_award.png"/>
+          <p:cNvPicPr>
+            <a:picLocks noChangeAspect="1"/>
+          </p:cNvPicPr>
+          <p:nvPr/>
+        </p:nvPicPr>
+        <p:blipFill>
+          <a:blip r:embed="rId7"/>
+          <a:stretch>
+            <a:fillRect/>
+          </a:stretch>
+        </p:blipFill>
+        <p:spPr>
+          <a:xfrm>
+            <a:off x="10509199" y="2380183"/>
+            <a:ext cx="451714" cy="451714"/>
+          </a:xfrm>
+          <a:prstGeom prst="rect">
+            <a:avLst/>
+          </a:prstGeom>
+        </p:spPr>
+      </p:pic>
+      <p:sp>
+        <p:nvSpPr>
+          <p:cNvPr id="27" name="Text 20"/>
+          <p:cNvSpPr/>
+          <p:nvPr/>
+        </p:nvSpPr>
+        <p:spPr>
+          <a:xfrm>
+            <a:off x="9829800" y="3246120"/>
+            <a:ext cx="1810512" cy="822960"/>
+          </a:xfrm>
+          <a:prstGeom prst="rect">
+            <a:avLst/>
+          </a:prstGeom>
+          <a:noFill/>
+          <a:ln/>
+        </p:spPr>
+        <p:txBody>
+          <a:bodyPr wrap="square" rtlCol="0" anchor="ctr"/>
+          <a:lstStyle/>
+          <a:p>
+            <a:pPr marL="0" indent="0" algn="ctr">
+              <a:lnSpc>
+                <a:spcPct val="110000"/>
+              </a:lnSpc>
+              <a:buNone/>
+            </a:pPr>
+            <a:r>
+              <a:rPr lang="en-US" sz="1400" b="1" dirty="0">
+                <a:solidFill>
+                  <a:srgbClr val="FFFFFF"/>
+                </a:solidFill>
+                <a:latin typeface="Cambria" pitchFamily="34" charset="0"/>
+                <a:ea typeface="Cambria" pitchFamily="34" charset="-122"/>
+                <a:cs typeface="Cambria" pitchFamily="34" charset="-120"/>
+              </a:rPr>
+              <a:t>A portfolio piece</a:t>
+            </a:r>
+            <a:endParaRPr lang="en-US" sz="1400" dirty="0"/>
+          </a:p>
+        </p:txBody>
+      </p:sp>
+      <p:sp>
+        <p:nvSpPr>
+          <p:cNvPr id="28" name="Text 21"/>
+          <p:cNvSpPr/>
+          <p:nvPr/>
+        </p:nvSpPr>
+        <p:spPr>
+          <a:xfrm>
+            <a:off x="9829800" y="4160520"/>
+            <a:ext cx="1810512" cy="1280160"/>
+          </a:xfrm>
+          <a:prstGeom prst="rect">
+            <a:avLst/>
+          </a:prstGeom>
+          <a:noFill/>
+          <a:ln/>
+        </p:spPr>
+        <p:txBody>
+          <a:bodyPr wrap="square" rtlCol="0" anchor="ctr"/>
+          <a:lstStyle/>
+          <a:p>
+            <a:pPr marL="0" indent="0" algn="ctr">
+              <a:lnSpc>
+                <a:spcPct val="125000"/>
+              </a:lnSpc>
+              <a:buNone/>
+            </a:pPr>
+            <a:r>
+              <a:rPr lang="en-US" sz="1600" dirty="0">
+                <a:solidFill>
+                  <a:srgbClr val="E4D9BE"/>
+                </a:solidFill>
+                <a:latin typeface="Calibri" pitchFamily="34" charset="0"/>
+                <a:ea typeface="Calibri" pitchFamily="34" charset="-122"/>
+                <a:cs typeface="Calibri" pitchFamily="34" charset="-120"/>
+              </a:rPr>
+              <a:t>Proof of what you can actually build</a:t>
+            </a:r>
+            <a:endParaRPr lang="en-US" sz="1600" dirty="0"/>
+          </a:p>
+        </p:txBody>
+      </p:sp>
+      <p:sp>
+        <p:nvSpPr>
+          <p:cNvPr id="29" name="Text 22"/>
+          <p:cNvSpPr/>
+          <p:nvPr/>
+        </p:nvSpPr>
+        <p:spPr>
+          <a:xfrm>
+            <a:off x="457200" y="6528816"/>
+            <a:ext cx="7315200" cy="274320"/>
+          </a:xfrm>
+          <a:prstGeom prst="rect">
+            <a:avLst/>
+          </a:prstGeom>
+          <a:noFill/>
+          <a:ln/>
+        </p:spPr>
+        <p:txBody>
+          <a:bodyPr wrap="square" rtlCol="0" anchor="ctr"/>
+          <a:lstStyle/>
+          <a:p>
+            <a:pPr marL="0" indent="0">
+              <a:buNone/>
+            </a:pPr>
+            <a:r>
+              <a:rPr lang="en-US" sz="1000" i="1" dirty="0">
+                <a:solidFill>
+                  <a:srgbClr val="E4D9BE"/>
+                </a:solidFill>
+                <a:latin typeface="Calibri" pitchFamily="34" charset="0"/>
+                <a:ea typeface="Calibri" pitchFamily="34" charset="-122"/>
+                <a:cs typeface="Calibri" pitchFamily="34" charset="-120"/>
+              </a:rPr>
               <a:t>Course Goals</a:t>
             </a:r>
             <a:endParaRPr lang="en-US" sz="1000" dirty="0"/>
@@ -8977,7 +9055,7 @@
           <a:bodyPr wrap="square" rtlCol="0" anchor="ctr"/>
           <a:lstStyle/>
           <a:p>
-            <a:pPr algn="r" indent="0" marL="0">
+            <a:pPr marL="0" indent="0" algn="r">
               <a:buNone/>
             </a:pPr>
             <a:r>
@@ -9011,6 +9089,7 @@
         <a:solidFill>
           <a:srgbClr val="FBF9F5"/>
         </a:solidFill>
+        <a:effectLst/>
       </p:bgPr>
     </p:bg>
     <p:spTree>
@@ -9048,7 +9127,7 @@
           <a:bodyPr wrap="square" rtlCol="0" anchor="ctr"/>
           <a:lstStyle/>
           <a:p>
-            <a:pPr indent="0" marL="0">
+            <a:pPr marL="0" indent="0">
               <a:buNone/>
             </a:pPr>
             <a:r>
@@ -9087,7 +9166,7 @@
           <a:bodyPr wrap="square" rtlCol="0" anchor="ctr"/>
           <a:lstStyle/>
           <a:p>
-            <a:pPr indent="0" marL="0">
+            <a:pPr marL="0" indent="0">
               <a:buNone/>
             </a:pPr>
             <a:r>
@@ -9126,6 +9205,13 @@
           </a:solidFill>
           <a:ln/>
         </p:spPr>
+        <p:txBody>
+          <a:bodyPr/>
+          <a:lstStyle/>
+          <a:p>
+            <a:endParaRPr lang="en-US"/>
+          </a:p>
+        </p:txBody>
       </p:sp>
       <p:sp>
         <p:nvSpPr>
@@ -9148,11 +9234,11 @@
           <a:bodyPr wrap="square" rtlCol="0" anchor="ctr"/>
           <a:lstStyle/>
           <a:p>
-            <a:pPr indent="0" marL="0">
-              <a:buNone/>
-            </a:pPr>
-            <a:r>
-              <a:rPr lang="en-US" sz="1100" b="1" spc="150" kern="0" dirty="0">
+            <a:pPr marL="0" indent="0">
+              <a:buNone/>
+            </a:pPr>
+            <a:r>
+              <a:rPr lang="en-US" sz="1100" b="1" kern="0" spc="150" dirty="0">
                 <a:solidFill>
                   <a:srgbClr val="C0AC7E"/>
                 </a:solidFill>
@@ -9187,11 +9273,11 @@
           <a:bodyPr wrap="square" rtlCol="0" anchor="ctr"/>
           <a:lstStyle/>
           <a:p>
-            <a:pPr indent="0" marL="0">
-              <a:buNone/>
-            </a:pPr>
-            <a:r>
-              <a:rPr lang="en-US" sz="1250" b="1" dirty="0">
+            <a:pPr marL="0" indent="0">
+              <a:buNone/>
+            </a:pPr>
+            <a:r>
+              <a:rPr lang="en-US" sz="1400" b="1" dirty="0">
                 <a:solidFill>
                   <a:srgbClr val="C0AC7E"/>
                 </a:solidFill>
@@ -9201,7 +9287,7 @@
               </a:rPr>
               <a:t>Weeks 1–4</a:t>
             </a:r>
-            <a:endParaRPr lang="en-US" sz="1250" dirty="0"/>
+            <a:endParaRPr lang="en-US" sz="1400" dirty="0"/>
           </a:p>
         </p:txBody>
       </p:sp>
@@ -9226,7 +9312,7 @@
           <a:bodyPr wrap="square" rtlCol="0" anchor="ctr"/>
           <a:lstStyle/>
           <a:p>
-            <a:pPr indent="0" marL="0">
+            <a:pPr marL="0" indent="0">
               <a:lnSpc>
                 <a:spcPct val="110000"/>
               </a:lnSpc>
@@ -9246,7 +9332,7 @@
             <a:endParaRPr lang="en-US" sz="1550" dirty="0"/>
           </a:p>
           <a:p>
-            <a:pPr indent="0" marL="0">
+            <a:pPr marL="0" indent="0">
               <a:lnSpc>
                 <a:spcPct val="110000"/>
               </a:lnSpc>
@@ -9289,6 +9375,13 @@
             <a:prstDash val="dash"/>
           </a:ln>
         </p:spPr>
+        <p:txBody>
+          <a:bodyPr/>
+          <a:lstStyle/>
+          <a:p>
+            <a:endParaRPr lang="en-US"/>
+          </a:p>
+        </p:txBody>
       </p:sp>
       <p:sp>
         <p:nvSpPr>
@@ -9311,11 +9404,11 @@
           <a:bodyPr wrap="square" rtlCol="0" anchor="ctr"/>
           <a:lstStyle/>
           <a:p>
-            <a:pPr indent="0" marL="0">
-              <a:buNone/>
-            </a:pPr>
-            <a:r>
-              <a:rPr lang="en-US" sz="1250" b="1" dirty="0">
+            <a:pPr marL="0" indent="0">
+              <a:buNone/>
+            </a:pPr>
+            <a:r>
+              <a:rPr lang="en-US" sz="1400" b="1" dirty="0">
                 <a:solidFill>
                   <a:srgbClr val="C0AC7E"/>
                 </a:solidFill>
@@ -9325,7 +9418,7 @@
               </a:rPr>
               <a:t>Weeks 5–8</a:t>
             </a:r>
-            <a:endParaRPr lang="en-US" sz="1250" dirty="0"/>
+            <a:endParaRPr lang="en-US" sz="1400" dirty="0"/>
           </a:p>
         </p:txBody>
       </p:sp>
@@ -9350,7 +9443,7 @@
           <a:bodyPr wrap="square" rtlCol="0" anchor="ctr"/>
           <a:lstStyle/>
           <a:p>
-            <a:pPr indent="0" marL="0">
+            <a:pPr marL="0" indent="0">
               <a:lnSpc>
                 <a:spcPct val="110000"/>
               </a:lnSpc>
@@ -9370,7 +9463,7 @@
             <a:endParaRPr lang="en-US" sz="1550" dirty="0"/>
           </a:p>
           <a:p>
-            <a:pPr indent="0" marL="0">
+            <a:pPr marL="0" indent="0">
               <a:lnSpc>
                 <a:spcPct val="110000"/>
               </a:lnSpc>
@@ -9413,6 +9506,13 @@
             <a:prstDash val="dash"/>
           </a:ln>
         </p:spPr>
+        <p:txBody>
+          <a:bodyPr/>
+          <a:lstStyle/>
+          <a:p>
+            <a:endParaRPr lang="en-US"/>
+          </a:p>
+        </p:txBody>
       </p:sp>
       <p:sp>
         <p:nvSpPr>
@@ -9435,11 +9535,11 @@
           <a:bodyPr wrap="square" rtlCol="0" anchor="ctr"/>
           <a:lstStyle/>
           <a:p>
-            <a:pPr indent="0" marL="0">
-              <a:buNone/>
-            </a:pPr>
-            <a:r>
-              <a:rPr lang="en-US" sz="1250" b="1" dirty="0">
+            <a:pPr marL="0" indent="0">
+              <a:buNone/>
+            </a:pPr>
+            <a:r>
+              <a:rPr lang="en-US" sz="1400" b="1" dirty="0">
                 <a:solidFill>
                   <a:srgbClr val="C0AC7E"/>
                 </a:solidFill>
@@ -9449,7 +9549,7 @@
               </a:rPr>
               <a:t>Weeks 9–14</a:t>
             </a:r>
-            <a:endParaRPr lang="en-US" sz="1250" dirty="0"/>
+            <a:endParaRPr lang="en-US" sz="1400" dirty="0"/>
           </a:p>
         </p:txBody>
       </p:sp>
@@ -9474,7 +9574,7 @@
           <a:bodyPr wrap="square" rtlCol="0" anchor="ctr"/>
           <a:lstStyle/>
           <a:p>
-            <a:pPr indent="0" marL="0">
+            <a:pPr marL="0" indent="0">
               <a:lnSpc>
                 <a:spcPct val="110000"/>
               </a:lnSpc>
@@ -9494,7 +9594,7 @@
             <a:endParaRPr lang="en-US" sz="1550" dirty="0"/>
           </a:p>
           <a:p>
-            <a:pPr indent="0" marL="0">
+            <a:pPr marL="0" indent="0">
               <a:lnSpc>
                 <a:spcPct val="110000"/>
               </a:lnSpc>
@@ -9537,6 +9637,13 @@
             <a:prstDash val="dash"/>
           </a:ln>
         </p:spPr>
+        <p:txBody>
+          <a:bodyPr/>
+          <a:lstStyle/>
+          <a:p>
+            <a:endParaRPr lang="en-US"/>
+          </a:p>
+        </p:txBody>
       </p:sp>
       <p:sp>
         <p:nvSpPr>
@@ -9559,11 +9666,11 @@
           <a:bodyPr wrap="square" rtlCol="0" anchor="ctr"/>
           <a:lstStyle/>
           <a:p>
-            <a:pPr indent="0" marL="0">
-              <a:buNone/>
-            </a:pPr>
-            <a:r>
-              <a:rPr lang="en-US" sz="1250" b="1" dirty="0">
+            <a:pPr marL="0" indent="0">
+              <a:buNone/>
+            </a:pPr>
+            <a:r>
+              <a:rPr lang="en-US" sz="1400" b="1" dirty="0">
                 <a:solidFill>
                   <a:srgbClr val="C0AC7E"/>
                 </a:solidFill>
@@ -9573,7 +9680,7 @@
               </a:rPr>
               <a:t>Week 15</a:t>
             </a:r>
-            <a:endParaRPr lang="en-US" sz="1250" dirty="0"/>
+            <a:endParaRPr lang="en-US" sz="1400" dirty="0"/>
           </a:p>
         </p:txBody>
       </p:sp>
@@ -9598,7 +9705,7 @@
           <a:bodyPr wrap="square" rtlCol="0" anchor="ctr"/>
           <a:lstStyle/>
           <a:p>
-            <a:pPr indent="0" marL="0">
+            <a:pPr marL="0" indent="0">
               <a:lnSpc>
                 <a:spcPct val="110000"/>
               </a:lnSpc>
@@ -9618,7 +9725,7 @@
             <a:endParaRPr lang="en-US" sz="1550" dirty="0"/>
           </a:p>
           <a:p>
-            <a:pPr indent="0" marL="0">
+            <a:pPr marL="0" indent="0">
               <a:lnSpc>
                 <a:spcPct val="110000"/>
               </a:lnSpc>
@@ -9660,6 +9767,13 @@
           </a:solidFill>
           <a:ln/>
         </p:spPr>
+        <p:txBody>
+          <a:bodyPr/>
+          <a:lstStyle/>
+          <a:p>
+            <a:endParaRPr lang="en-US" sz="1400"/>
+          </a:p>
+        </p:txBody>
       </p:sp>
       <p:sp>
         <p:nvSpPr>
@@ -9682,11 +9796,11 @@
           <a:bodyPr wrap="square" rtlCol="0" anchor="ctr"/>
           <a:lstStyle/>
           <a:p>
-            <a:pPr indent="0" marL="0">
-              <a:buNone/>
-            </a:pPr>
-            <a:r>
-              <a:rPr lang="en-US" sz="1100" b="1" spc="150" kern="0" dirty="0">
+            <a:pPr marL="0" indent="0">
+              <a:buNone/>
+            </a:pPr>
+            <a:r>
+              <a:rPr lang="en-US" sz="1100" b="1" kern="0" spc="150" dirty="0">
                 <a:solidFill>
                   <a:srgbClr val="791716"/>
                 </a:solidFill>
@@ -9721,11 +9835,11 @@
           <a:bodyPr wrap="square" rtlCol="0" anchor="ctr"/>
           <a:lstStyle/>
           <a:p>
-            <a:pPr indent="0" marL="0">
-              <a:buNone/>
-            </a:pPr>
-            <a:r>
-              <a:rPr lang="en-US" sz="1250" b="1" dirty="0">
+            <a:pPr marL="0" indent="0">
+              <a:buNone/>
+            </a:pPr>
+            <a:r>
+              <a:rPr lang="en-US" sz="1400" b="1" dirty="0">
                 <a:solidFill>
                   <a:srgbClr val="791716"/>
                 </a:solidFill>
@@ -9735,7 +9849,7 @@
               </a:rPr>
               <a:t>Weeks 1–6</a:t>
             </a:r>
-            <a:endParaRPr lang="en-US" sz="1250" dirty="0"/>
+            <a:endParaRPr lang="en-US" sz="1400" dirty="0"/>
           </a:p>
         </p:txBody>
       </p:sp>
@@ -9760,7 +9874,7 @@
           <a:bodyPr wrap="square" rtlCol="0" anchor="ctr"/>
           <a:lstStyle/>
           <a:p>
-            <a:pPr indent="0" marL="0">
+            <a:pPr marL="0" indent="0">
               <a:lnSpc>
                 <a:spcPct val="110000"/>
               </a:lnSpc>
@@ -9780,7 +9894,7 @@
             <a:endParaRPr lang="en-US" sz="1550" dirty="0"/>
           </a:p>
           <a:p>
-            <a:pPr indent="0" marL="0">
+            <a:pPr marL="0" indent="0">
               <a:lnSpc>
                 <a:spcPct val="110000"/>
               </a:lnSpc>
@@ -9823,6 +9937,13 @@
             <a:prstDash val="dash"/>
           </a:ln>
         </p:spPr>
+        <p:txBody>
+          <a:bodyPr/>
+          <a:lstStyle/>
+          <a:p>
+            <a:endParaRPr lang="en-US"/>
+          </a:p>
+        </p:txBody>
       </p:sp>
       <p:sp>
         <p:nvSpPr>
@@ -9845,11 +9966,11 @@
           <a:bodyPr wrap="square" rtlCol="0" anchor="ctr"/>
           <a:lstStyle/>
           <a:p>
-            <a:pPr indent="0" marL="0">
-              <a:buNone/>
-            </a:pPr>
-            <a:r>
-              <a:rPr lang="en-US" sz="1250" b="1" dirty="0">
+            <a:pPr marL="0" indent="0">
+              <a:buNone/>
+            </a:pPr>
+            <a:r>
+              <a:rPr lang="en-US" sz="1400" b="1" dirty="0">
                 <a:solidFill>
                   <a:srgbClr val="791716"/>
                 </a:solidFill>
@@ -9859,7 +9980,7 @@
               </a:rPr>
               <a:t>Weeks 7–10</a:t>
             </a:r>
-            <a:endParaRPr lang="en-US" sz="1250" dirty="0"/>
+            <a:endParaRPr lang="en-US" sz="1400" dirty="0"/>
           </a:p>
         </p:txBody>
       </p:sp>
@@ -9884,7 +10005,7 @@
           <a:bodyPr wrap="square" rtlCol="0" anchor="ctr"/>
           <a:lstStyle/>
           <a:p>
-            <a:pPr indent="0" marL="0">
+            <a:pPr marL="0" indent="0">
               <a:lnSpc>
                 <a:spcPct val="110000"/>
               </a:lnSpc>
@@ -9904,7 +10025,7 @@
             <a:endParaRPr lang="en-US" sz="1550" dirty="0"/>
           </a:p>
           <a:p>
-            <a:pPr indent="0" marL="0">
+            <a:pPr marL="0" indent="0">
               <a:lnSpc>
                 <a:spcPct val="110000"/>
               </a:lnSpc>
@@ -9947,6 +10068,13 @@
             <a:prstDash val="dash"/>
           </a:ln>
         </p:spPr>
+        <p:txBody>
+          <a:bodyPr/>
+          <a:lstStyle/>
+          <a:p>
+            <a:endParaRPr lang="en-US"/>
+          </a:p>
+        </p:txBody>
       </p:sp>
       <p:sp>
         <p:nvSpPr>
@@ -9969,11 +10097,11 @@
           <a:bodyPr wrap="square" rtlCol="0" anchor="ctr"/>
           <a:lstStyle/>
           <a:p>
-            <a:pPr indent="0" marL="0">
-              <a:buNone/>
-            </a:pPr>
-            <a:r>
-              <a:rPr lang="en-US" sz="1250" b="1" dirty="0">
+            <a:pPr marL="0" indent="0">
+              <a:buNone/>
+            </a:pPr>
+            <a:r>
+              <a:rPr lang="en-US" sz="1400" b="1" dirty="0">
                 <a:solidFill>
                   <a:srgbClr val="791716"/>
                 </a:solidFill>
@@ -9983,7 +10111,7 @@
               </a:rPr>
               <a:t>Weeks 11–13</a:t>
             </a:r>
-            <a:endParaRPr lang="en-US" sz="1250" dirty="0"/>
+            <a:endParaRPr lang="en-US" sz="1400" dirty="0"/>
           </a:p>
         </p:txBody>
       </p:sp>
@@ -10008,7 +10136,7 @@
           <a:bodyPr wrap="square" rtlCol="0" anchor="ctr"/>
           <a:lstStyle/>
           <a:p>
-            <a:pPr indent="0" marL="0">
+            <a:pPr marL="0" indent="0">
               <a:lnSpc>
                 <a:spcPct val="110000"/>
               </a:lnSpc>
@@ -10028,7 +10156,7 @@
             <a:endParaRPr lang="en-US" sz="1550" dirty="0"/>
           </a:p>
           <a:p>
-            <a:pPr indent="0" marL="0">
+            <a:pPr marL="0" indent="0">
               <a:lnSpc>
                 <a:spcPct val="110000"/>
               </a:lnSpc>
@@ -10071,6 +10199,13 @@
             <a:prstDash val="dash"/>
           </a:ln>
         </p:spPr>
+        <p:txBody>
+          <a:bodyPr/>
+          <a:lstStyle/>
+          <a:p>
+            <a:endParaRPr lang="en-US"/>
+          </a:p>
+        </p:txBody>
       </p:sp>
       <p:sp>
         <p:nvSpPr>
@@ -10093,11 +10228,11 @@
           <a:bodyPr wrap="square" rtlCol="0" anchor="ctr"/>
           <a:lstStyle/>
           <a:p>
-            <a:pPr indent="0" marL="0">
-              <a:buNone/>
-            </a:pPr>
-            <a:r>
-              <a:rPr lang="en-US" sz="1250" b="1" dirty="0">
+            <a:pPr marL="0" indent="0">
+              <a:buNone/>
+            </a:pPr>
+            <a:r>
+              <a:rPr lang="en-US" sz="1400" b="1" dirty="0">
                 <a:solidFill>
                   <a:srgbClr val="791716"/>
                 </a:solidFill>
@@ -10107,7 +10242,7 @@
               </a:rPr>
               <a:t>Weeks 14–15</a:t>
             </a:r>
-            <a:endParaRPr lang="en-US" sz="1250" dirty="0"/>
+            <a:endParaRPr lang="en-US" sz="1400" dirty="0"/>
           </a:p>
         </p:txBody>
       </p:sp>
@@ -10132,7 +10267,7 @@
           <a:bodyPr wrap="square" rtlCol="0" anchor="ctr"/>
           <a:lstStyle/>
           <a:p>
-            <a:pPr indent="0" marL="0">
+            <a:pPr marL="0" indent="0">
               <a:lnSpc>
                 <a:spcPct val="110000"/>
               </a:lnSpc>
@@ -10152,7 +10287,7 @@
             <a:endParaRPr lang="en-US" sz="1550" dirty="0"/>
           </a:p>
           <a:p>
-            <a:pPr indent="0" marL="0">
+            <a:pPr marL="0" indent="0">
               <a:lnSpc>
                 <a:spcPct val="110000"/>
               </a:lnSpc>
@@ -10194,7 +10329,7 @@
           <a:bodyPr wrap="square" rtlCol="0" anchor="ctr"/>
           <a:lstStyle/>
           <a:p>
-            <a:pPr indent="0" marL="0">
+            <a:pPr marL="0" indent="0">
               <a:buNone/>
             </a:pPr>
             <a:r>
@@ -10233,7 +10368,7 @@
           <a:bodyPr wrap="square" rtlCol="0" anchor="ctr"/>
           <a:lstStyle/>
           <a:p>
-            <a:pPr indent="0" marL="0">
+            <a:pPr marL="0" indent="0">
               <a:buNone/>
             </a:pPr>
             <a:r>
@@ -10272,7 +10407,7 @@
           <a:bodyPr wrap="square" rtlCol="0" anchor="ctr"/>
           <a:lstStyle/>
           <a:p>
-            <a:pPr algn="r" indent="0" marL="0">
+            <a:pPr marL="0" indent="0" algn="r">
               <a:buNone/>
             </a:pPr>
             <a:r>
@@ -10306,6 +10441,7 @@
         <a:solidFill>
           <a:srgbClr val="FFFFFF"/>
         </a:solidFill>
+        <a:effectLst/>
       </p:bgPr>
     </p:bg>
     <p:spTree>
@@ -10343,7 +10479,7 @@
           <a:bodyPr wrap="square" rtlCol="0" anchor="ctr"/>
           <a:lstStyle/>
           <a:p>
-            <a:pPr indent="0" marL="0">
+            <a:pPr marL="0" indent="0">
               <a:buNone/>
             </a:pPr>
             <a:r>
@@ -10382,7 +10518,7 @@
           <a:bodyPr wrap="square" rtlCol="0" anchor="ctr"/>
           <a:lstStyle/>
           <a:p>
-            <a:pPr indent="0" marL="0">
+            <a:pPr marL="0" indent="0">
               <a:buNone/>
             </a:pPr>
             <a:r>
@@ -10421,11 +10557,11 @@
           <a:bodyPr wrap="square" rtlCol="0" anchor="ctr"/>
           <a:lstStyle/>
           <a:p>
-            <a:pPr indent="0" marL="0">
-              <a:buNone/>
-            </a:pPr>
-            <a:r>
-              <a:rPr lang="en-US" sz="1300" i="1" dirty="0">
+            <a:pPr marL="0" indent="0">
+              <a:buNone/>
+            </a:pPr>
+            <a:r>
+              <a:rPr lang="en-US" sz="1400" i="1" dirty="0">
                 <a:solidFill>
                   <a:srgbClr val="6B5F55"/>
                 </a:solidFill>
@@ -10435,7 +10571,7 @@
               </a:rPr>
               <a:t>Every week runs on the same cycle — consistency is what makes agile work.</a:t>
             </a:r>
-            <a:endParaRPr lang="en-US" sz="1300" dirty="0"/>
+            <a:endParaRPr lang="en-US" sz="1400" dirty="0"/>
           </a:p>
         </p:txBody>
       </p:sp>
@@ -10465,6 +10601,13 @@
             <a:prstDash val="solid"/>
           </a:ln>
         </p:spPr>
+        <p:txBody>
+          <a:bodyPr/>
+          <a:lstStyle/>
+          <a:p>
+            <a:endParaRPr lang="en-US"/>
+          </a:p>
+        </p:txBody>
       </p:sp>
       <p:sp>
         <p:nvSpPr>
@@ -10485,17 +10628,24 @@
           </a:solidFill>
           <a:ln/>
         </p:spPr>
+        <p:txBody>
+          <a:bodyPr/>
+          <a:lstStyle/>
+          <a:p>
+            <a:endParaRPr lang="en-US"/>
+          </a:p>
+        </p:txBody>
       </p:sp>
       <p:pic>
         <p:nvPicPr>
-          <p:cNvPr id="7" name="Image 0" descr="icon_calendar.png">    </p:cNvPr>
+          <p:cNvPr id="7" name="Image 0" descr="icon_calendar.png"/>
           <p:cNvPicPr>
             <a:picLocks noChangeAspect="1"/>
           </p:cNvPicPr>
           <p:nvPr/>
         </p:nvPicPr>
         <p:blipFill>
-          <a:blip r:embed="rId1"/>
+          <a:blip r:embed="rId3"/>
           <a:stretch>
             <a:fillRect/>
           </a:stretch>
@@ -10531,11 +10681,11 @@
           <a:bodyPr wrap="square" rtlCol="0" anchor="ctr"/>
           <a:lstStyle/>
           <a:p>
-            <a:pPr algn="ctr" indent="0" marL="0">
-              <a:buNone/>
-            </a:pPr>
-            <a:r>
-              <a:rPr lang="en-US" sz="1050" b="1" spc="100" kern="0" dirty="0">
+            <a:pPr marL="0" indent="0" algn="ctr">
+              <a:buNone/>
+            </a:pPr>
+            <a:r>
+              <a:rPr lang="en-US" sz="1050" b="1" kern="0" spc="100" dirty="0">
                 <a:solidFill>
                   <a:srgbClr val="8A6A2E"/>
                 </a:solidFill>
@@ -10570,14 +10720,14 @@
           <a:bodyPr wrap="square" rtlCol="0" anchor="ctr"/>
           <a:lstStyle/>
           <a:p>
-            <a:pPr algn="ctr" indent="0" marL="0">
+            <a:pPr marL="0" indent="0" algn="ctr">
               <a:lnSpc>
                 <a:spcPct val="110000"/>
               </a:lnSpc>
               <a:buNone/>
             </a:pPr>
             <a:r>
-              <a:rPr lang="en-US" sz="1400" b="1" dirty="0">
+              <a:rPr lang="en-US" sz="1600" b="1" dirty="0">
                 <a:solidFill>
                   <a:srgbClr val="791716"/>
                 </a:solidFill>
@@ -10587,7 +10737,7 @@
               </a:rPr>
               <a:t>Sprint Planning</a:t>
             </a:r>
-            <a:endParaRPr lang="en-US" sz="1400" dirty="0"/>
+            <a:endParaRPr lang="en-US" sz="1600" dirty="0"/>
           </a:p>
         </p:txBody>
       </p:sp>
@@ -10612,14 +10762,14 @@
           <a:bodyPr wrap="square" rtlCol="0" anchor="ctr"/>
           <a:lstStyle/>
           <a:p>
-            <a:pPr algn="ctr" indent="0" marL="0">
+            <a:pPr marL="0" indent="0" algn="ctr">
               <a:lnSpc>
                 <a:spcPct val="120000"/>
               </a:lnSpc>
               <a:buNone/>
             </a:pPr>
             <a:r>
-              <a:rPr lang="en-US" sz="1050" dirty="0">
+              <a:rPr lang="en-US" sz="1400" dirty="0">
                 <a:solidFill>
                   <a:srgbClr val="2A2321"/>
                 </a:solidFill>
@@ -10629,20 +10779,20 @@
               </a:rPr>
               <a:t>Set the week's backlog</a:t>
             </a:r>
-            <a:endParaRPr lang="en-US" sz="1050" dirty="0"/>
+            <a:endParaRPr lang="en-US" sz="1400" dirty="0"/>
           </a:p>
         </p:txBody>
       </p:sp>
       <p:pic>
         <p:nvPicPr>
-          <p:cNvPr id="11" name="Image 1" descr="icon_arrowright_dark.png">    </p:cNvPr>
+          <p:cNvPr id="11" name="Image 1" descr="icon_arrowright_dark.png"/>
           <p:cNvPicPr>
             <a:picLocks noChangeAspect="1"/>
           </p:cNvPicPr>
           <p:nvPr/>
         </p:nvPicPr>
         <p:blipFill>
-          <a:blip r:embed="rId2"/>
+          <a:blip r:embed="rId4"/>
           <a:stretch>
             <a:fillRect/>
           </a:stretch>
@@ -10683,6 +10833,13 @@
             <a:prstDash val="solid"/>
           </a:ln>
         </p:spPr>
+        <p:txBody>
+          <a:bodyPr/>
+          <a:lstStyle/>
+          <a:p>
+            <a:endParaRPr lang="en-US"/>
+          </a:p>
+        </p:txBody>
       </p:sp>
       <p:sp>
         <p:nvSpPr>
@@ -10703,17 +10860,24 @@
           </a:solidFill>
           <a:ln/>
         </p:spPr>
+        <p:txBody>
+          <a:bodyPr/>
+          <a:lstStyle/>
+          <a:p>
+            <a:endParaRPr lang="en-US"/>
+          </a:p>
+        </p:txBody>
       </p:sp>
       <p:pic>
         <p:nvPicPr>
-          <p:cNvPr id="14" name="Image 2" descr="icon_code.png">    </p:cNvPr>
+          <p:cNvPr id="14" name="Image 2" descr="icon_code.png"/>
           <p:cNvPicPr>
             <a:picLocks noChangeAspect="1"/>
           </p:cNvPicPr>
           <p:nvPr/>
         </p:nvPicPr>
         <p:blipFill>
-          <a:blip r:embed="rId3"/>
+          <a:blip r:embed="rId5"/>
           <a:stretch>
             <a:fillRect/>
           </a:stretch>
@@ -10749,11 +10913,11 @@
           <a:bodyPr wrap="square" rtlCol="0" anchor="ctr"/>
           <a:lstStyle/>
           <a:p>
-            <a:pPr algn="ctr" indent="0" marL="0">
-              <a:buNone/>
-            </a:pPr>
-            <a:r>
-              <a:rPr lang="en-US" sz="1050" b="1" spc="100" kern="0" dirty="0">
+            <a:pPr marL="0" indent="0" algn="ctr">
+              <a:buNone/>
+            </a:pPr>
+            <a:r>
+              <a:rPr lang="en-US" sz="1050" b="1" kern="0" spc="100" dirty="0">
                 <a:solidFill>
                   <a:srgbClr val="8A6A2E"/>
                 </a:solidFill>
@@ -10788,14 +10952,14 @@
           <a:bodyPr wrap="square" rtlCol="0" anchor="ctr"/>
           <a:lstStyle/>
           <a:p>
-            <a:pPr algn="ctr" indent="0" marL="0">
+            <a:pPr marL="0" indent="0" algn="ctr">
               <a:lnSpc>
                 <a:spcPct val="110000"/>
               </a:lnSpc>
               <a:buNone/>
             </a:pPr>
             <a:r>
-              <a:rPr lang="en-US" sz="1400" b="1" dirty="0">
+              <a:rPr lang="en-US" sz="1600" b="1" dirty="0">
                 <a:solidFill>
                   <a:srgbClr val="791716"/>
                 </a:solidFill>
@@ -10805,7 +10969,7 @@
               </a:rPr>
               <a:t>Development Work</a:t>
             </a:r>
-            <a:endParaRPr lang="en-US" sz="1400" dirty="0"/>
+            <a:endParaRPr lang="en-US" sz="1600" dirty="0"/>
           </a:p>
         </p:txBody>
       </p:sp>
@@ -10830,14 +10994,14 @@
           <a:bodyPr wrap="square" rtlCol="0" anchor="ctr"/>
           <a:lstStyle/>
           <a:p>
-            <a:pPr algn="ctr" indent="0" marL="0">
+            <a:pPr marL="0" indent="0" algn="ctr">
               <a:lnSpc>
                 <a:spcPct val="120000"/>
               </a:lnSpc>
               <a:buNone/>
             </a:pPr>
             <a:r>
-              <a:rPr lang="en-US" sz="1050" dirty="0">
+              <a:rPr lang="en-US" sz="1400" dirty="0">
                 <a:solidFill>
                   <a:srgbClr val="2A2321"/>
                 </a:solidFill>
@@ -10847,13 +11011,13 @@
               </a:rPr>
               <a:t>Daily commits, real progress</a:t>
             </a:r>
-            <a:endParaRPr lang="en-US" sz="1050" dirty="0"/>
+            <a:endParaRPr lang="en-US" sz="1400" dirty="0"/>
           </a:p>
         </p:txBody>
       </p:sp>
       <p:pic>
         <p:nvPicPr>
-          <p:cNvPr id="18" name="Image 3" descr="icon_arrowright_dark.png">    </p:cNvPr>
+          <p:cNvPr id="18" name="Image 3" descr="icon_arrowright_dark.png"/>
           <p:cNvPicPr>
             <a:picLocks noChangeAspect="1"/>
           </p:cNvPicPr>
@@ -10901,6 +11065,13 @@
             <a:prstDash val="solid"/>
           </a:ln>
         </p:spPr>
+        <p:txBody>
+          <a:bodyPr/>
+          <a:lstStyle/>
+          <a:p>
+            <a:endParaRPr lang="en-US"/>
+          </a:p>
+        </p:txBody>
       </p:sp>
       <p:sp>
         <p:nvSpPr>
@@ -10921,17 +11092,24 @@
           </a:solidFill>
           <a:ln/>
         </p:spPr>
+        <p:txBody>
+          <a:bodyPr/>
+          <a:lstStyle/>
+          <a:p>
+            <a:endParaRPr lang="en-US"/>
+          </a:p>
+        </p:txBody>
       </p:sp>
       <p:pic>
         <p:nvPicPr>
-          <p:cNvPr id="21" name="Image 4" descr="icon_checkcircle.png">    </p:cNvPr>
+          <p:cNvPr id="21" name="Image 4" descr="icon_checkcircle.png"/>
           <p:cNvPicPr>
             <a:picLocks noChangeAspect="1"/>
           </p:cNvPicPr>
           <p:nvPr/>
         </p:nvPicPr>
         <p:blipFill>
-          <a:blip r:embed="rId5"/>
+          <a:blip r:embed="rId6"/>
           <a:stretch>
             <a:fillRect/>
           </a:stretch>
@@ -10967,11 +11145,11 @@
           <a:bodyPr wrap="square" rtlCol="0" anchor="ctr"/>
           <a:lstStyle/>
           <a:p>
-            <a:pPr algn="ctr" indent="0" marL="0">
-              <a:buNone/>
-            </a:pPr>
-            <a:r>
-              <a:rPr lang="en-US" sz="1050" b="1" spc="100" kern="0" dirty="0">
+            <a:pPr marL="0" indent="0" algn="ctr">
+              <a:buNone/>
+            </a:pPr>
+            <a:r>
+              <a:rPr lang="en-US" sz="1050" b="1" kern="0" spc="100" dirty="0">
                 <a:solidFill>
                   <a:srgbClr val="8A6A2E"/>
                 </a:solidFill>
@@ -11006,14 +11184,14 @@
           <a:bodyPr wrap="square" rtlCol="0" anchor="ctr"/>
           <a:lstStyle/>
           <a:p>
-            <a:pPr algn="ctr" indent="0" marL="0">
+            <a:pPr marL="0" indent="0" algn="ctr">
               <a:lnSpc>
                 <a:spcPct val="110000"/>
               </a:lnSpc>
               <a:buNone/>
             </a:pPr>
             <a:r>
-              <a:rPr lang="en-US" sz="1400" b="1" dirty="0">
+              <a:rPr lang="en-US" sz="1600" b="1" dirty="0">
                 <a:solidFill>
                   <a:srgbClr val="791716"/>
                 </a:solidFill>
@@ -11023,7 +11201,7 @@
               </a:rPr>
               <a:t>Review &amp; Testing</a:t>
             </a:r>
-            <a:endParaRPr lang="en-US" sz="1400" dirty="0"/>
+            <a:endParaRPr lang="en-US" sz="1600" dirty="0"/>
           </a:p>
         </p:txBody>
       </p:sp>
@@ -11048,14 +11226,14 @@
           <a:bodyPr wrap="square" rtlCol="0" anchor="ctr"/>
           <a:lstStyle/>
           <a:p>
-            <a:pPr algn="ctr" indent="0" marL="0">
+            <a:pPr marL="0" indent="0" algn="ctr">
               <a:lnSpc>
                 <a:spcPct val="120000"/>
               </a:lnSpc>
               <a:buNone/>
             </a:pPr>
             <a:r>
-              <a:rPr lang="en-US" sz="1050" dirty="0">
+              <a:rPr lang="en-US" sz="1400" dirty="0">
                 <a:solidFill>
                   <a:srgbClr val="2A2321"/>
                 </a:solidFill>
@@ -11065,20 +11243,20 @@
               </a:rPr>
               <a:t>Pull requests + group session</a:t>
             </a:r>
-            <a:endParaRPr lang="en-US" sz="1050" dirty="0"/>
+            <a:endParaRPr lang="en-US" sz="1400" dirty="0"/>
           </a:p>
         </p:txBody>
       </p:sp>
       <p:pic>
         <p:nvPicPr>
-          <p:cNvPr id="25" name="Image 5" descr="icon_arrowright_dark.png">    </p:cNvPr>
+          <p:cNvPr id="25" name="Image 5" descr="icon_arrowright_dark.png"/>
           <p:cNvPicPr>
             <a:picLocks noChangeAspect="1"/>
           </p:cNvPicPr>
           <p:nvPr/>
         </p:nvPicPr>
         <p:blipFill>
-          <a:blip r:embed="rId6"/>
+          <a:blip r:embed="rId4"/>
           <a:stretch>
             <a:fillRect/>
           </a:stretch>
@@ -11119,6 +11297,13 @@
             <a:prstDash val="solid"/>
           </a:ln>
         </p:spPr>
+        <p:txBody>
+          <a:bodyPr/>
+          <a:lstStyle/>
+          <a:p>
+            <a:endParaRPr lang="en-US"/>
+          </a:p>
+        </p:txBody>
       </p:sp>
       <p:sp>
         <p:nvSpPr>
@@ -11139,10 +11324,17 @@
           </a:solidFill>
           <a:ln/>
         </p:spPr>
+        <p:txBody>
+          <a:bodyPr/>
+          <a:lstStyle/>
+          <a:p>
+            <a:endParaRPr lang="en-US"/>
+          </a:p>
+        </p:txBody>
       </p:sp>
       <p:pic>
         <p:nvPicPr>
-          <p:cNvPr id="28" name="Image 6" descr="icon_edit.png">    </p:cNvPr>
+          <p:cNvPr id="28" name="Image 6" descr="icon_edit.png"/>
           <p:cNvPicPr>
             <a:picLocks noChangeAspect="1"/>
           </p:cNvPicPr>
@@ -11185,11 +11377,11 @@
           <a:bodyPr wrap="square" rtlCol="0" anchor="ctr"/>
           <a:lstStyle/>
           <a:p>
-            <a:pPr algn="ctr" indent="0" marL="0">
-              <a:buNone/>
-            </a:pPr>
-            <a:r>
-              <a:rPr lang="en-US" sz="1050" b="1" spc="100" kern="0" dirty="0">
+            <a:pPr marL="0" indent="0" algn="ctr">
+              <a:buNone/>
+            </a:pPr>
+            <a:r>
+              <a:rPr lang="en-US" sz="1050" b="1" kern="0" spc="100" dirty="0">
                 <a:solidFill>
                   <a:srgbClr val="8A6A2E"/>
                 </a:solidFill>
@@ -11224,14 +11416,14 @@
           <a:bodyPr wrap="square" rtlCol="0" anchor="ctr"/>
           <a:lstStyle/>
           <a:p>
-            <a:pPr algn="ctr" indent="0" marL="0">
+            <a:pPr marL="0" indent="0" algn="ctr">
               <a:lnSpc>
                 <a:spcPct val="110000"/>
               </a:lnSpc>
               <a:buNone/>
             </a:pPr>
             <a:r>
-              <a:rPr lang="en-US" sz="1400" b="1" dirty="0">
+              <a:rPr lang="en-US" sz="1600" b="1" dirty="0">
                 <a:solidFill>
                   <a:srgbClr val="791716"/>
                 </a:solidFill>
@@ -11241,7 +11433,7 @@
               </a:rPr>
               <a:t>Docs &amp; Reflection</a:t>
             </a:r>
-            <a:endParaRPr lang="en-US" sz="1400" dirty="0"/>
+            <a:endParaRPr lang="en-US" sz="1600" dirty="0"/>
           </a:p>
         </p:txBody>
       </p:sp>
@@ -11266,14 +11458,14 @@
           <a:bodyPr wrap="square" rtlCol="0" anchor="ctr"/>
           <a:lstStyle/>
           <a:p>
-            <a:pPr algn="ctr" indent="0" marL="0">
+            <a:pPr marL="0" indent="0" algn="ctr">
               <a:lnSpc>
                 <a:spcPct val="120000"/>
               </a:lnSpc>
               <a:buNone/>
             </a:pPr>
             <a:r>
-              <a:rPr lang="en-US" sz="1050" dirty="0">
+              <a:rPr lang="en-US" sz="1400" dirty="0">
                 <a:solidFill>
                   <a:srgbClr val="2A2321"/>
                 </a:solidFill>
@@ -11283,20 +11475,20 @@
               </a:rPr>
               <a:t>Write it down while it's fresh</a:t>
             </a:r>
-            <a:endParaRPr lang="en-US" sz="1050" dirty="0"/>
+            <a:endParaRPr lang="en-US" sz="1400" dirty="0"/>
           </a:p>
         </p:txBody>
       </p:sp>
       <p:pic>
         <p:nvPicPr>
-          <p:cNvPr id="32" name="Image 7" descr="icon_arrowright_dark.png">    </p:cNvPr>
+          <p:cNvPr id="32" name="Image 7" descr="icon_arrowright_dark.png"/>
           <p:cNvPicPr>
             <a:picLocks noChangeAspect="1"/>
           </p:cNvPicPr>
           <p:nvPr/>
         </p:nvPicPr>
         <p:blipFill>
-          <a:blip r:embed="rId8"/>
+          <a:blip r:embed="rId4"/>
           <a:stretch>
             <a:fillRect/>
           </a:stretch>
@@ -11337,6 +11529,13 @@
             <a:prstDash val="solid"/>
           </a:ln>
         </p:spPr>
+        <p:txBody>
+          <a:bodyPr/>
+          <a:lstStyle/>
+          <a:p>
+            <a:endParaRPr lang="en-US"/>
+          </a:p>
+        </p:txBody>
       </p:sp>
       <p:sp>
         <p:nvSpPr>
@@ -11357,17 +11556,24 @@
           </a:solidFill>
           <a:ln/>
         </p:spPr>
+        <p:txBody>
+          <a:bodyPr/>
+          <a:lstStyle/>
+          <a:p>
+            <a:endParaRPr lang="en-US"/>
+          </a:p>
+        </p:txBody>
       </p:sp>
       <p:pic>
         <p:nvPicPr>
-          <p:cNvPr id="35" name="Image 8" descr="icon_messagecircle.png">    </p:cNvPr>
+          <p:cNvPr id="35" name="Image 8" descr="icon_messagecircle.png"/>
           <p:cNvPicPr>
             <a:picLocks noChangeAspect="1"/>
           </p:cNvPicPr>
           <p:nvPr/>
         </p:nvPicPr>
         <p:blipFill>
-          <a:blip r:embed="rId9"/>
+          <a:blip r:embed="rId8"/>
           <a:stretch>
             <a:fillRect/>
           </a:stretch>
@@ -11403,11 +11609,11 @@
           <a:bodyPr wrap="square" rtlCol="0" anchor="ctr"/>
           <a:lstStyle/>
           <a:p>
-            <a:pPr algn="ctr" indent="0" marL="0">
-              <a:buNone/>
-            </a:pPr>
-            <a:r>
-              <a:rPr lang="en-US" sz="1050" b="1" spc="100" kern="0" dirty="0">
+            <a:pPr marL="0" indent="0" algn="ctr">
+              <a:buNone/>
+            </a:pPr>
+            <a:r>
+              <a:rPr lang="en-US" sz="1050" b="1" kern="0" spc="100" dirty="0">
                 <a:solidFill>
                   <a:srgbClr val="8A6A2E"/>
                 </a:solidFill>
@@ -11442,14 +11648,14 @@
           <a:bodyPr wrap="square" rtlCol="0" anchor="ctr"/>
           <a:lstStyle/>
           <a:p>
-            <a:pPr algn="ctr" indent="0" marL="0">
+            <a:pPr marL="0" indent="0" algn="ctr">
               <a:lnSpc>
                 <a:spcPct val="110000"/>
               </a:lnSpc>
               <a:buNone/>
             </a:pPr>
             <a:r>
-              <a:rPr lang="en-US" sz="1400" b="1" dirty="0">
+              <a:rPr lang="en-US" sz="1600" b="1" dirty="0">
                 <a:solidFill>
                   <a:srgbClr val="791716"/>
                 </a:solidFill>
@@ -11459,7 +11665,7 @@
               </a:rPr>
               <a:t>Sprint Review</a:t>
             </a:r>
-            <a:endParaRPr lang="en-US" sz="1400" dirty="0"/>
+            <a:endParaRPr lang="en-US" sz="1600" dirty="0"/>
           </a:p>
         </p:txBody>
       </p:sp>
@@ -11484,14 +11690,14 @@
           <a:bodyPr wrap="square" rtlCol="0" anchor="ctr"/>
           <a:lstStyle/>
           <a:p>
-            <a:pPr algn="ctr" indent="0" marL="0">
+            <a:pPr marL="0" indent="0" algn="ctr">
               <a:lnSpc>
                 <a:spcPct val="120000"/>
               </a:lnSpc>
               <a:buNone/>
             </a:pPr>
             <a:r>
-              <a:rPr lang="en-US" sz="1050" dirty="0">
+              <a:rPr lang="en-US" sz="1400" dirty="0">
                 <a:solidFill>
                   <a:srgbClr val="2A2321"/>
                 </a:solidFill>
@@ -11501,7 +11707,7 @@
               </a:rPr>
               <a:t>Demo to your instructor</a:t>
             </a:r>
-            <a:endParaRPr lang="en-US" sz="1050" dirty="0"/>
+            <a:endParaRPr lang="en-US" sz="1400" dirty="0"/>
           </a:p>
         </p:txBody>
       </p:sp>
@@ -11526,7 +11732,7 @@
           <a:bodyPr wrap="square" rtlCol="0" anchor="ctr"/>
           <a:lstStyle/>
           <a:p>
-            <a:pPr indent="0" marL="0">
+            <a:pPr marL="0" indent="0">
               <a:buNone/>
             </a:pPr>
             <a:r>
@@ -11565,7 +11771,7 @@
           <a:bodyPr wrap="square" rtlCol="0" anchor="ctr"/>
           <a:lstStyle/>
           <a:p>
-            <a:pPr algn="r" indent="0" marL="0">
+            <a:pPr marL="0" indent="0" algn="r">
               <a:buNone/>
             </a:pPr>
             <a:r>
@@ -11599,6 +11805,7 @@
         <a:solidFill>
           <a:srgbClr val="FBF9F5"/>
         </a:solidFill>
+        <a:effectLst/>
       </p:bgPr>
     </p:bg>
     <p:spTree>
@@ -11636,7 +11843,7 @@
           <a:bodyPr wrap="square" rtlCol="0" anchor="ctr"/>
           <a:lstStyle/>
           <a:p>
-            <a:pPr indent="0" marL="0">
+            <a:pPr marL="0" indent="0">
               <a:buNone/>
             </a:pPr>
             <a:r>
@@ -11675,7 +11882,7 @@
           <a:bodyPr wrap="square" rtlCol="0" anchor="ctr"/>
           <a:lstStyle/>
           <a:p>
-            <a:pPr indent="0" marL="0">
+            <a:pPr marL="0" indent="0">
               <a:buNone/>
             </a:pPr>
             <a:r>
@@ -11719,13 +11926,20 @@
             <a:prstDash val="solid"/>
           </a:ln>
           <a:effectLst>
-            <a:outerShdw sx="100000" sy="100000" kx="0" ky="0" algn="bl" rotWithShape="0" blurRad="101600" dist="38100" dir="5400000">
+            <a:outerShdw blurRad="101600" dist="38100" dir="5400000" algn="bl" rotWithShape="0">
               <a:srgbClr val="000000">
                 <a:alpha val="15000"/>
               </a:srgbClr>
             </a:outerShdw>
           </a:effectLst>
         </p:spPr>
+        <p:txBody>
+          <a:bodyPr/>
+          <a:lstStyle/>
+          <a:p>
+            <a:endParaRPr lang="en-US" sz="1400"/>
+          </a:p>
+        </p:txBody>
       </p:sp>
       <p:sp>
         <p:nvSpPr>
@@ -11746,17 +11960,24 @@
           </a:solidFill>
           <a:ln/>
         </p:spPr>
+        <p:txBody>
+          <a:bodyPr/>
+          <a:lstStyle/>
+          <a:p>
+            <a:endParaRPr lang="en-US"/>
+          </a:p>
+        </p:txBody>
       </p:sp>
       <p:pic>
         <p:nvPicPr>
-          <p:cNvPr id="6" name="Image 0" descr="icon_users.png">    </p:cNvPr>
+          <p:cNvPr id="6" name="Image 0" descr="icon_users.png"/>
           <p:cNvPicPr>
             <a:picLocks noChangeAspect="1"/>
           </p:cNvPicPr>
           <p:nvPr/>
         </p:nvPicPr>
         <p:blipFill>
-          <a:blip r:embed="rId1"/>
+          <a:blip r:embed="rId3"/>
           <a:stretch>
             <a:fillRect/>
           </a:stretch>
@@ -11792,7 +12013,7 @@
           <a:bodyPr wrap="square" rtlCol="0" anchor="ctr"/>
           <a:lstStyle/>
           <a:p>
-            <a:pPr indent="0" marL="0">
+            <a:pPr marL="0" indent="0">
               <a:buNone/>
             </a:pPr>
             <a:r>
@@ -11831,11 +12052,11 @@
           <a:bodyPr wrap="square" rtlCol="0" anchor="ctr"/>
           <a:lstStyle/>
           <a:p>
-            <a:pPr indent="0" marL="0">
-              <a:buNone/>
-            </a:pPr>
-            <a:r>
-              <a:rPr lang="en-US" sz="1150" i="1" dirty="0">
+            <a:pPr marL="0" indent="0">
+              <a:buNone/>
+            </a:pPr>
+            <a:r>
+              <a:rPr lang="en-US" sz="1400" i="1" dirty="0">
                 <a:solidFill>
                   <a:srgbClr val="6B5F55"/>
                 </a:solidFill>
@@ -11845,7 +12066,7 @@
               </a:rPr>
               <a:t>Every Friday · 10:30–11:00 AM · Ford Hall 209</a:t>
             </a:r>
-            <a:endParaRPr lang="en-US" sz="1150" dirty="0"/>
+            <a:endParaRPr lang="en-US" sz="1400" dirty="0"/>
           </a:p>
         </p:txBody>
       </p:sp>
@@ -11870,11 +12091,11 @@
           <a:bodyPr wrap="square" rtlCol="0" anchor="ctr"/>
           <a:lstStyle/>
           <a:p>
-            <a:pPr indent="0" marL="0">
-              <a:buNone/>
-            </a:pPr>
-            <a:r>
-              <a:rPr lang="en-US" sz="1250" dirty="0">
+            <a:pPr marL="0" indent="0">
+              <a:buNone/>
+            </a:pPr>
+            <a:r>
+              <a:rPr lang="en-US" sz="1400" dirty="0">
                 <a:solidFill>
                   <a:srgbClr val="2A2321"/>
                 </a:solidFill>
@@ -11884,7 +12105,7 @@
               </a:rPr>
               <a:t>•  Attendance expected from everyone</a:t>
             </a:r>
-            <a:endParaRPr lang="en-US" sz="1250" dirty="0"/>
+            <a:endParaRPr lang="en-US" sz="1400" dirty="0"/>
           </a:p>
         </p:txBody>
       </p:sp>
@@ -11909,11 +12130,11 @@
           <a:bodyPr wrap="square" rtlCol="0" anchor="ctr"/>
           <a:lstStyle/>
           <a:p>
-            <a:pPr indent="0" marL="0">
-              <a:buNone/>
-            </a:pPr>
-            <a:r>
-              <a:rPr lang="en-US" sz="1250" dirty="0">
+            <a:pPr marL="0" indent="0">
+              <a:buNone/>
+            </a:pPr>
+            <a:r>
+              <a:rPr lang="en-US" sz="1400" dirty="0">
                 <a:solidFill>
                   <a:srgbClr val="2A2321"/>
                 </a:solidFill>
@@ -11923,7 +12144,7 @@
               </a:rPr>
               <a:t>•  Review the week's milestones together</a:t>
             </a:r>
-            <a:endParaRPr lang="en-US" sz="1250" dirty="0"/>
+            <a:endParaRPr lang="en-US" sz="1400" dirty="0"/>
           </a:p>
         </p:txBody>
       </p:sp>
@@ -11948,11 +12169,11 @@
           <a:bodyPr wrap="square" rtlCol="0" anchor="ctr"/>
           <a:lstStyle/>
           <a:p>
-            <a:pPr indent="0" marL="0">
-              <a:buNone/>
-            </a:pPr>
-            <a:r>
-              <a:rPr lang="en-US" sz="1250" dirty="0">
+            <a:pPr marL="0" indent="0">
+              <a:buNone/>
+            </a:pPr>
+            <a:r>
+              <a:rPr lang="en-US" sz="1400" dirty="0">
                 <a:solidFill>
                   <a:srgbClr val="2A2321"/>
                 </a:solidFill>
@@ -11962,7 +12183,7 @@
               </a:rPr>
               <a:t>•  Peer collaboration &amp; shared problem-solving</a:t>
             </a:r>
-            <a:endParaRPr lang="en-US" sz="1250" dirty="0"/>
+            <a:endParaRPr lang="en-US" sz="1400" dirty="0"/>
           </a:p>
         </p:txBody>
       </p:sp>
@@ -11987,13 +12208,20 @@
           </a:solidFill>
           <a:ln/>
           <a:effectLst>
-            <a:outerShdw sx="100000" sy="100000" kx="0" ky="0" algn="bl" rotWithShape="0" blurRad="101600" dist="38100" dir="5400000">
+            <a:outerShdw blurRad="101600" dist="38100" dir="5400000" algn="bl" rotWithShape="0">
               <a:srgbClr val="000000">
                 <a:alpha val="20000"/>
               </a:srgbClr>
             </a:outerShdw>
           </a:effectLst>
         </p:spPr>
+        <p:txBody>
+          <a:bodyPr/>
+          <a:lstStyle/>
+          <a:p>
+            <a:endParaRPr lang="en-US"/>
+          </a:p>
+        </p:txBody>
       </p:sp>
       <p:sp>
         <p:nvSpPr>
@@ -12014,17 +12242,24 @@
           </a:solidFill>
           <a:ln/>
         </p:spPr>
+        <p:txBody>
+          <a:bodyPr/>
+          <a:lstStyle/>
+          <a:p>
+            <a:endParaRPr lang="en-US"/>
+          </a:p>
+        </p:txBody>
       </p:sp>
       <p:pic>
         <p:nvPicPr>
-          <p:cNvPr id="14" name="Image 1" descr="icon_user.png">    </p:cNvPr>
+          <p:cNvPr id="14" name="Image 1" descr="icon_user.png"/>
           <p:cNvPicPr>
             <a:picLocks noChangeAspect="1"/>
           </p:cNvPicPr>
           <p:nvPr/>
         </p:nvPicPr>
         <p:blipFill>
-          <a:blip r:embed="rId2"/>
+          <a:blip r:embed="rId4"/>
           <a:stretch>
             <a:fillRect/>
           </a:stretch>
@@ -12060,7 +12295,7 @@
           <a:bodyPr wrap="square" rtlCol="0" anchor="ctr"/>
           <a:lstStyle/>
           <a:p>
-            <a:pPr indent="0" marL="0">
+            <a:pPr marL="0" indent="0">
               <a:buNone/>
             </a:pPr>
             <a:r>
@@ -12099,11 +12334,11 @@
           <a:bodyPr wrap="square" rtlCol="0" anchor="ctr"/>
           <a:lstStyle/>
           <a:p>
-            <a:pPr indent="0" marL="0">
-              <a:buNone/>
-            </a:pPr>
-            <a:r>
-              <a:rPr lang="en-US" sz="1150" i="1" dirty="0">
+            <a:pPr marL="0" indent="0">
+              <a:buNone/>
+            </a:pPr>
+            <a:r>
+              <a:rPr lang="en-US" sz="1600" i="1" dirty="0">
                 <a:solidFill>
                   <a:srgbClr val="E4D9BE"/>
                 </a:solidFill>
@@ -12113,7 +12348,7 @@
               </a:rPr>
               <a:t>15 minutes, weekly · You book it</a:t>
             </a:r>
-            <a:endParaRPr lang="en-US" sz="1150" dirty="0"/>
+            <a:endParaRPr lang="en-US" sz="1600" dirty="0"/>
           </a:p>
         </p:txBody>
       </p:sp>
@@ -12138,11 +12373,11 @@
           <a:bodyPr wrap="square" rtlCol="0" anchor="ctr"/>
           <a:lstStyle/>
           <a:p>
-            <a:pPr indent="0" marL="0">
-              <a:buNone/>
-            </a:pPr>
-            <a:r>
-              <a:rPr lang="en-US" sz="1250" dirty="0">
+            <a:pPr marL="0" indent="0">
+              <a:buNone/>
+            </a:pPr>
+            <a:r>
+              <a:rPr lang="en-US" sz="1400" dirty="0">
                 <a:solidFill>
                   <a:srgbClr val="FFFFFF"/>
                 </a:solidFill>
@@ -12152,7 +12387,7 @@
               </a:rPr>
               <a:t>•  You reserve your own slot each week</a:t>
             </a:r>
-            <a:endParaRPr lang="en-US" sz="1250" dirty="0"/>
+            <a:endParaRPr lang="en-US" sz="1400" dirty="0"/>
           </a:p>
         </p:txBody>
       </p:sp>
@@ -12177,11 +12412,11 @@
           <a:bodyPr wrap="square" rtlCol="0" anchor="ctr"/>
           <a:lstStyle/>
           <a:p>
-            <a:pPr indent="0" marL="0">
-              <a:buNone/>
-            </a:pPr>
-            <a:r>
-              <a:rPr lang="en-US" sz="1250" dirty="0">
+            <a:pPr marL="0" indent="0">
+              <a:buNone/>
+            </a:pPr>
+            <a:r>
+              <a:rPr lang="en-US" sz="1400" dirty="0">
                 <a:solidFill>
                   <a:srgbClr val="FFFFFF"/>
                 </a:solidFill>
@@ -12191,7 +12426,7 @@
               </a:rPr>
               <a:t>•  Demo your progress 1-on-1</a:t>
             </a:r>
-            <a:endParaRPr lang="en-US" sz="1250" dirty="0"/>
+            <a:endParaRPr lang="en-US" sz="1400" dirty="0"/>
           </a:p>
         </p:txBody>
       </p:sp>
@@ -12216,11 +12451,11 @@
           <a:bodyPr wrap="square" rtlCol="0" anchor="ctr"/>
           <a:lstStyle/>
           <a:p>
-            <a:pPr indent="0" marL="0">
-              <a:buNone/>
-            </a:pPr>
-            <a:r>
-              <a:rPr lang="en-US" sz="1250" dirty="0">
+            <a:pPr marL="0" indent="0">
+              <a:buNone/>
+            </a:pPr>
+            <a:r>
+              <a:rPr lang="en-US" sz="1400" dirty="0">
                 <a:solidFill>
                   <a:srgbClr val="FFFFFF"/>
                 </a:solidFill>
@@ -12230,7 +12465,7 @@
               </a:rPr>
               <a:t>•  Personalized feedback on blockers</a:t>
             </a:r>
-            <a:endParaRPr lang="en-US" sz="1250" dirty="0"/>
+            <a:endParaRPr lang="en-US" sz="1400" dirty="0"/>
           </a:p>
         </p:txBody>
       </p:sp>
@@ -12255,6 +12490,13 @@
           </a:solidFill>
           <a:ln/>
         </p:spPr>
+        <p:txBody>
+          <a:bodyPr/>
+          <a:lstStyle/>
+          <a:p>
+            <a:endParaRPr lang="en-US"/>
+          </a:p>
+        </p:txBody>
       </p:sp>
       <p:sp>
         <p:nvSpPr>
@@ -12277,11 +12519,11 @@
           <a:bodyPr wrap="square" rtlCol="0" anchor="ctr"/>
           <a:lstStyle/>
           <a:p>
-            <a:pPr indent="0" marL="0">
-              <a:buNone/>
-            </a:pPr>
-            <a:r>
-              <a:rPr lang="en-US" sz="1150" b="1" dirty="0">
+            <a:pPr marL="0" indent="0">
+              <a:buNone/>
+            </a:pPr>
+            <a:r>
+              <a:rPr lang="en-US" sz="1400" b="1" dirty="0">
                 <a:solidFill>
                   <a:srgbClr val="791716"/>
                 </a:solidFill>
@@ -12291,7 +12533,7 @@
               </a:rPr>
               <a:t>📅  Book Your Sprint Review — link on course site</a:t>
             </a:r>
-            <a:endParaRPr lang="en-US" sz="1150" dirty="0"/>
+            <a:endParaRPr lang="en-US" sz="1400" dirty="0"/>
           </a:p>
         </p:txBody>
       </p:sp>
@@ -12316,7 +12558,7 @@
           <a:bodyPr wrap="square" rtlCol="0" anchor="ctr"/>
           <a:lstStyle/>
           <a:p>
-            <a:pPr indent="0" marL="0">
+            <a:pPr marL="0" indent="0">
               <a:buNone/>
             </a:pPr>
             <a:r>
@@ -12355,7 +12597,7 @@
           <a:bodyPr wrap="square" rtlCol="0" anchor="ctr"/>
           <a:lstStyle/>
           <a:p>
-            <a:pPr algn="r" indent="0" marL="0">
+            <a:pPr marL="0" indent="0" algn="r">
               <a:buNone/>
             </a:pPr>
             <a:r>
@@ -12389,6 +12631,7 @@
         <a:solidFill>
           <a:srgbClr val="FFFFFF"/>
         </a:solidFill>
+        <a:effectLst/>
       </p:bgPr>
     </p:bg>
     <p:spTree>
@@ -12426,7 +12669,7 @@
           <a:bodyPr wrap="square" rtlCol="0" anchor="ctr"/>
           <a:lstStyle/>
           <a:p>
-            <a:pPr indent="0" marL="0">
+            <a:pPr marL="0" indent="0">
               <a:buNone/>
             </a:pPr>
             <a:r>
@@ -12465,7 +12708,7 @@
           <a:bodyPr wrap="square" rtlCol="0" anchor="ctr"/>
           <a:lstStyle/>
           <a:p>
-            <a:pPr indent="0" marL="0">
+            <a:pPr marL="0" indent="0">
               <a:buNone/>
             </a:pPr>
             <a:r>
@@ -12504,6 +12747,13 @@
           </a:solidFill>
           <a:ln/>
         </p:spPr>
+        <p:txBody>
+          <a:bodyPr/>
+          <a:lstStyle/>
+          <a:p>
+            <a:endParaRPr lang="en-US"/>
+          </a:p>
+        </p:txBody>
       </p:sp>
       <p:sp>
         <p:nvSpPr>
@@ -12524,382 +12774,17 @@
           </a:solidFill>
           <a:ln/>
         </p:spPr>
+        <p:txBody>
+          <a:bodyPr/>
+          <a:lstStyle/>
+          <a:p>
+            <a:endParaRPr lang="en-US"/>
+          </a:p>
+        </p:txBody>
       </p:sp>
       <p:pic>
         <p:nvPicPr>
-          <p:cNvPr id="6" name="Image 0" descr="icon_calendar.png">    </p:cNvPr>
-          <p:cNvPicPr>
-            <a:picLocks noChangeAspect="1"/>
-          </p:cNvPicPr>
-          <p:nvPr/>
-        </p:nvPicPr>
-        <p:blipFill>
-          <a:blip r:embed="rId1"/>
-          <a:stretch>
-            <a:fillRect/>
-          </a:stretch>
-        </p:blipFill>
-        <p:spPr>
-          <a:xfrm>
-            <a:off x="1637690" y="2392070"/>
-            <a:ext cx="427939" cy="427939"/>
-          </a:xfrm>
-          <a:prstGeom prst="rect">
-            <a:avLst/>
-          </a:prstGeom>
-        </p:spPr>
-      </p:pic>
-      <p:sp>
-        <p:nvSpPr>
-          <p:cNvPr id="7" name="Text 4"/>
-          <p:cNvSpPr/>
-          <p:nvPr/>
-        </p:nvSpPr>
-        <p:spPr>
-          <a:xfrm>
-            <a:off x="685800" y="3200400"/>
-            <a:ext cx="2331720" cy="502920"/>
-          </a:xfrm>
-          <a:prstGeom prst="rect">
-            <a:avLst/>
-          </a:prstGeom>
-          <a:noFill/>
-          <a:ln/>
-        </p:spPr>
-        <p:txBody>
-          <a:bodyPr wrap="square" rtlCol="0" anchor="ctr"/>
-          <a:lstStyle/>
-          <a:p>
-            <a:pPr algn="ctr" indent="0" marL="0">
-              <a:buNone/>
-            </a:pPr>
-            <a:r>
-              <a:rPr lang="en-US" sz="1500" b="1" dirty="0">
-                <a:solidFill>
-                  <a:srgbClr val="FFFFFF"/>
-                </a:solidFill>
-                <a:latin typeface="Cambria" pitchFamily="34" charset="0"/>
-                <a:ea typeface="Cambria" pitchFamily="34" charset="-122"/>
-                <a:cs typeface="Cambria" pitchFamily="34" charset="-120"/>
-              </a:rPr>
-              <a:t>Sprint Planning</a:t>
-            </a:r>
-            <a:endParaRPr lang="en-US" sz="1500" dirty="0"/>
-          </a:p>
-        </p:txBody>
-      </p:sp>
-      <p:sp>
-        <p:nvSpPr>
-          <p:cNvPr id="8" name="Text 5"/>
-          <p:cNvSpPr/>
-          <p:nvPr/>
-        </p:nvSpPr>
-        <p:spPr>
-          <a:xfrm>
-            <a:off x="685800" y="3703320"/>
-            <a:ext cx="2331720" cy="365760"/>
-          </a:xfrm>
-          <a:prstGeom prst="rect">
-            <a:avLst/>
-          </a:prstGeom>
-          <a:noFill/>
-          <a:ln/>
-        </p:spPr>
-        <p:txBody>
-          <a:bodyPr wrap="square" rtlCol="0" anchor="ctr"/>
-          <a:lstStyle/>
-          <a:p>
-            <a:pPr algn="ctr" indent="0" marL="0">
-              <a:buNone/>
-            </a:pPr>
-            <a:r>
-              <a:rPr lang="en-US" sz="1100" i="1" dirty="0">
-                <a:solidFill>
-                  <a:srgbClr val="E4D9BE"/>
-                </a:solidFill>
-                <a:latin typeface="Calibri" pitchFamily="34" charset="0"/>
-                <a:ea typeface="Calibri" pitchFamily="34" charset="-122"/>
-                <a:cs typeface="Calibri" pitchFamily="34" charset="-120"/>
-              </a:rPr>
-              <a:t>Weekly · 10 min</a:t>
-            </a:r>
-            <a:endParaRPr lang="en-US" sz="1100" dirty="0"/>
-          </a:p>
-        </p:txBody>
-      </p:sp>
-      <p:sp>
-        <p:nvSpPr>
-          <p:cNvPr id="9" name="Text 6"/>
-          <p:cNvSpPr/>
-          <p:nvPr/>
-        </p:nvSpPr>
-        <p:spPr>
-          <a:xfrm>
-            <a:off x="731520" y="4160520"/>
-            <a:ext cx="2240280" cy="1463040"/>
-          </a:xfrm>
-          <a:prstGeom prst="rect">
-            <a:avLst/>
-          </a:prstGeom>
-          <a:noFill/>
-          <a:ln/>
-        </p:spPr>
-        <p:txBody>
-          <a:bodyPr wrap="square" rtlCol="0" anchor="ctr"/>
-          <a:lstStyle/>
-          <a:p>
-            <a:pPr algn="ctr" indent="0" marL="0">
-              <a:lnSpc>
-                <a:spcPct val="125000"/>
-              </a:lnSpc>
-              <a:buNone/>
-            </a:pPr>
-            <a:r>
-              <a:rPr lang="en-US" sz="1100" dirty="0">
-                <a:solidFill>
-                  <a:srgbClr val="FFFFFF"/>
-                </a:solidFill>
-                <a:latin typeface="Calibri" pitchFamily="34" charset="0"/>
-                <a:ea typeface="Calibri" pitchFamily="34" charset="-122"/>
-                <a:cs typeface="Calibri" pitchFamily="34" charset="-120"/>
-              </a:rPr>
-              <a:t>Review velocity, select backlog items, commit to goals</a:t>
-            </a:r>
-            <a:endParaRPr lang="en-US" sz="1100" dirty="0"/>
-          </a:p>
-        </p:txBody>
-      </p:sp>
-      <p:sp>
-        <p:nvSpPr>
-          <p:cNvPr id="10" name="Shape 7"/>
-          <p:cNvSpPr/>
-          <p:nvPr/>
-        </p:nvSpPr>
-        <p:spPr>
-          <a:xfrm>
-            <a:off x="3383280" y="1828800"/>
-            <a:ext cx="2606040" cy="4023360"/>
-          </a:xfrm>
-          <a:prstGeom prst="roundRect">
-            <a:avLst>
-              <a:gd name="adj" fmla="val 4211"/>
-            </a:avLst>
-          </a:prstGeom>
-          <a:solidFill>
-            <a:srgbClr val="C0AC7E"/>
-          </a:solidFill>
-          <a:ln/>
-        </p:spPr>
-      </p:sp>
-      <p:sp>
-        <p:nvSpPr>
-          <p:cNvPr id="11" name="Shape 8"/>
-          <p:cNvSpPr/>
-          <p:nvPr/>
-        </p:nvSpPr>
-        <p:spPr>
-          <a:xfrm>
-            <a:off x="4274820" y="2194560"/>
-            <a:ext cx="822960" cy="822960"/>
-          </a:xfrm>
-          <a:prstGeom prst="ellipse">
-            <a:avLst/>
-          </a:prstGeom>
-          <a:solidFill>
-            <a:srgbClr val="791716"/>
-          </a:solidFill>
-          <a:ln/>
-        </p:spPr>
-      </p:sp>
-      <p:pic>
-        <p:nvPicPr>
-          <p:cNvPr id="12" name="Image 1" descr="icon_messagecircle.png">    </p:cNvPr>
-          <p:cNvPicPr>
-            <a:picLocks noChangeAspect="1"/>
-          </p:cNvPicPr>
-          <p:nvPr/>
-        </p:nvPicPr>
-        <p:blipFill>
-          <a:blip r:embed="rId2"/>
-          <a:stretch>
-            <a:fillRect/>
-          </a:stretch>
-        </p:blipFill>
-        <p:spPr>
-          <a:xfrm>
-            <a:off x="4472330" y="2392070"/>
-            <a:ext cx="427939" cy="427939"/>
-          </a:xfrm>
-          <a:prstGeom prst="rect">
-            <a:avLst/>
-          </a:prstGeom>
-        </p:spPr>
-      </p:pic>
-      <p:sp>
-        <p:nvSpPr>
-          <p:cNvPr id="13" name="Text 9"/>
-          <p:cNvSpPr/>
-          <p:nvPr/>
-        </p:nvSpPr>
-        <p:spPr>
-          <a:xfrm>
-            <a:off x="3520440" y="3200400"/>
-            <a:ext cx="2331720" cy="502920"/>
-          </a:xfrm>
-          <a:prstGeom prst="rect">
-            <a:avLst/>
-          </a:prstGeom>
-          <a:noFill/>
-          <a:ln/>
-        </p:spPr>
-        <p:txBody>
-          <a:bodyPr wrap="square" rtlCol="0" anchor="ctr"/>
-          <a:lstStyle/>
-          <a:p>
-            <a:pPr algn="ctr" indent="0" marL="0">
-              <a:buNone/>
-            </a:pPr>
-            <a:r>
-              <a:rPr lang="en-US" sz="1500" b="1" dirty="0">
-                <a:solidFill>
-                  <a:srgbClr val="3A2E14"/>
-                </a:solidFill>
-                <a:latin typeface="Cambria" pitchFamily="34" charset="0"/>
-                <a:ea typeface="Cambria" pitchFamily="34" charset="-122"/>
-                <a:cs typeface="Cambria" pitchFamily="34" charset="-120"/>
-              </a:rPr>
-              <a:t>Daily Standup</a:t>
-            </a:r>
-            <a:endParaRPr lang="en-US" sz="1500" dirty="0"/>
-          </a:p>
-        </p:txBody>
-      </p:sp>
-      <p:sp>
-        <p:nvSpPr>
-          <p:cNvPr id="14" name="Text 10"/>
-          <p:cNvSpPr/>
-          <p:nvPr/>
-        </p:nvSpPr>
-        <p:spPr>
-          <a:xfrm>
-            <a:off x="3520440" y="3703320"/>
-            <a:ext cx="2331720" cy="365760"/>
-          </a:xfrm>
-          <a:prstGeom prst="rect">
-            <a:avLst/>
-          </a:prstGeom>
-          <a:noFill/>
-          <a:ln/>
-        </p:spPr>
-        <p:txBody>
-          <a:bodyPr wrap="square" rtlCol="0" anchor="ctr"/>
-          <a:lstStyle/>
-          <a:p>
-            <a:pPr algn="ctr" indent="0" marL="0">
-              <a:buNone/>
-            </a:pPr>
-            <a:r>
-              <a:rPr lang="en-US" sz="1100" i="1" dirty="0">
-                <a:solidFill>
-                  <a:srgbClr val="791716"/>
-                </a:solidFill>
-                <a:latin typeface="Calibri" pitchFamily="34" charset="0"/>
-                <a:ea typeface="Calibri" pitchFamily="34" charset="-122"/>
-                <a:cs typeface="Calibri" pitchFamily="34" charset="-120"/>
-              </a:rPr>
-              <a:t>Async, by 10 AM</a:t>
-            </a:r>
-            <a:endParaRPr lang="en-US" sz="1100" dirty="0"/>
-          </a:p>
-        </p:txBody>
-      </p:sp>
-      <p:sp>
-        <p:nvSpPr>
-          <p:cNvPr id="15" name="Text 11"/>
-          <p:cNvSpPr/>
-          <p:nvPr/>
-        </p:nvSpPr>
-        <p:spPr>
-          <a:xfrm>
-            <a:off x="3566160" y="4160520"/>
-            <a:ext cx="2240280" cy="1463040"/>
-          </a:xfrm>
-          <a:prstGeom prst="rect">
-            <a:avLst/>
-          </a:prstGeom>
-          <a:noFill/>
-          <a:ln/>
-        </p:spPr>
-        <p:txBody>
-          <a:bodyPr wrap="square" rtlCol="0" anchor="ctr"/>
-          <a:lstStyle/>
-          <a:p>
-            <a:pPr algn="ctr" indent="0" marL="0">
-              <a:lnSpc>
-                <a:spcPct val="125000"/>
-              </a:lnSpc>
-              <a:buNone/>
-            </a:pPr>
-            <a:r>
-              <a:rPr lang="en-US" sz="1100" dirty="0">
-                <a:solidFill>
-                  <a:srgbClr val="3A2E14"/>
-                </a:solidFill>
-                <a:latin typeface="Calibri" pitchFamily="34" charset="0"/>
-                <a:ea typeface="Calibri" pitchFamily="34" charset="-122"/>
-                <a:cs typeface="Calibri" pitchFamily="34" charset="-120"/>
-              </a:rPr>
-              <a:t>Post in Discord/Slack: yesterday, today, blockers</a:t>
-            </a:r>
-            <a:endParaRPr lang="en-US" sz="1100" dirty="0"/>
-          </a:p>
-        </p:txBody>
-      </p:sp>
-      <p:sp>
-        <p:nvSpPr>
-          <p:cNvPr id="16" name="Shape 12"/>
-          <p:cNvSpPr/>
-          <p:nvPr/>
-        </p:nvSpPr>
-        <p:spPr>
-          <a:xfrm>
-            <a:off x="6217920" y="1828800"/>
-            <a:ext cx="2606040" cy="4023360"/>
-          </a:xfrm>
-          <a:prstGeom prst="roundRect">
-            <a:avLst>
-              <a:gd name="adj" fmla="val 4211"/>
-            </a:avLst>
-          </a:prstGeom>
-          <a:solidFill>
-            <a:srgbClr val="791716"/>
-          </a:solidFill>
-          <a:ln/>
-        </p:spPr>
-      </p:sp>
-      <p:sp>
-        <p:nvSpPr>
-          <p:cNvPr id="17" name="Shape 13"/>
-          <p:cNvSpPr/>
-          <p:nvPr/>
-        </p:nvSpPr>
-        <p:spPr>
-          <a:xfrm>
-            <a:off x="7109460" y="2194560"/>
-            <a:ext cx="822960" cy="822960"/>
-          </a:xfrm>
-          <a:prstGeom prst="ellipse">
-            <a:avLst/>
-          </a:prstGeom>
-          <a:solidFill>
-            <a:srgbClr val="C0AC7E"/>
-          </a:solidFill>
-          <a:ln/>
-        </p:spPr>
-      </p:sp>
-      <p:pic>
-        <p:nvPicPr>
-          <p:cNvPr id="18" name="Image 2" descr="icon_checkcircle.png">    </p:cNvPr>
+          <p:cNvPr id="6" name="Image 0" descr="icon_calendar.png"/>
           <p:cNvPicPr>
             <a:picLocks noChangeAspect="1"/>
           </p:cNvPicPr>
@@ -12913,7 +12798,7 @@
         </p:blipFill>
         <p:spPr>
           <a:xfrm>
-            <a:off x="7306970" y="2392070"/>
+            <a:off x="1637690" y="2392070"/>
             <a:ext cx="427939" cy="427939"/>
           </a:xfrm>
           <a:prstGeom prst="rect">
@@ -12923,13 +12808,13 @@
       </p:pic>
       <p:sp>
         <p:nvSpPr>
-          <p:cNvPr id="19" name="Text 14"/>
-          <p:cNvSpPr/>
-          <p:nvPr/>
-        </p:nvSpPr>
-        <p:spPr>
-          <a:xfrm>
-            <a:off x="6355080" y="3200400"/>
+          <p:cNvPr id="7" name="Text 4"/>
+          <p:cNvSpPr/>
+          <p:nvPr/>
+        </p:nvSpPr>
+        <p:spPr>
+          <a:xfrm>
+            <a:off x="685800" y="3200400"/>
             <a:ext cx="2331720" cy="502920"/>
           </a:xfrm>
           <a:prstGeom prst="rect">
@@ -12942,11 +12827,11 @@
           <a:bodyPr wrap="square" rtlCol="0" anchor="ctr"/>
           <a:lstStyle/>
           <a:p>
-            <a:pPr algn="ctr" indent="0" marL="0">
-              <a:buNone/>
-            </a:pPr>
-            <a:r>
-              <a:rPr lang="en-US" sz="1500" b="1" dirty="0">
+            <a:pPr marL="0" indent="0" algn="ctr">
+              <a:buNone/>
+            </a:pPr>
+            <a:r>
+              <a:rPr lang="en-US" b="1" dirty="0">
                 <a:solidFill>
                   <a:srgbClr val="FFFFFF"/>
                 </a:solidFill>
@@ -12954,21 +12839,21 @@
                 <a:ea typeface="Cambria" pitchFamily="34" charset="-122"/>
                 <a:cs typeface="Cambria" pitchFamily="34" charset="-120"/>
               </a:rPr>
-              <a:t>Sprint Review</a:t>
-            </a:r>
-            <a:endParaRPr lang="en-US" sz="1500" dirty="0"/>
-          </a:p>
-        </p:txBody>
-      </p:sp>
-      <p:sp>
-        <p:nvSpPr>
-          <p:cNvPr id="20" name="Text 15"/>
-          <p:cNvSpPr/>
-          <p:nvPr/>
-        </p:nvSpPr>
-        <p:spPr>
-          <a:xfrm>
-            <a:off x="6355080" y="3703320"/>
+              <a:t>Sprint Planning</a:t>
+            </a:r>
+            <a:endParaRPr lang="en-US" dirty="0"/>
+          </a:p>
+        </p:txBody>
+      </p:sp>
+      <p:sp>
+        <p:nvSpPr>
+          <p:cNvPr id="8" name="Text 5"/>
+          <p:cNvSpPr/>
+          <p:nvPr/>
+        </p:nvSpPr>
+        <p:spPr>
+          <a:xfrm>
+            <a:off x="685800" y="3703320"/>
             <a:ext cx="2331720" cy="365760"/>
           </a:xfrm>
           <a:prstGeom prst="rect">
@@ -12981,11 +12866,11 @@
           <a:bodyPr wrap="square" rtlCol="0" anchor="ctr"/>
           <a:lstStyle/>
           <a:p>
-            <a:pPr algn="ctr" indent="0" marL="0">
-              <a:buNone/>
-            </a:pPr>
-            <a:r>
-              <a:rPr lang="en-US" sz="1100" i="1" dirty="0">
+            <a:pPr marL="0" indent="0" algn="ctr">
+              <a:buNone/>
+            </a:pPr>
+            <a:r>
+              <a:rPr lang="en-US" sz="1400" i="1" dirty="0">
                 <a:solidFill>
                   <a:srgbClr val="E4D9BE"/>
                 </a:solidFill>
@@ -12993,21 +12878,21 @@
                 <a:ea typeface="Calibri" pitchFamily="34" charset="-122"/>
                 <a:cs typeface="Calibri" pitchFamily="34" charset="-120"/>
               </a:rPr>
-              <a:t>Weekly · 15 min</a:t>
-            </a:r>
-            <a:endParaRPr lang="en-US" sz="1100" dirty="0"/>
-          </a:p>
-        </p:txBody>
-      </p:sp>
-      <p:sp>
-        <p:nvSpPr>
-          <p:cNvPr id="21" name="Text 16"/>
-          <p:cNvSpPr/>
-          <p:nvPr/>
-        </p:nvSpPr>
-        <p:spPr>
-          <a:xfrm>
-            <a:off x="6400800" y="4160520"/>
+              <a:t>Weekly · 10 min</a:t>
+            </a:r>
+            <a:endParaRPr lang="en-US" sz="1400" dirty="0"/>
+          </a:p>
+        </p:txBody>
+      </p:sp>
+      <p:sp>
+        <p:nvSpPr>
+          <p:cNvPr id="9" name="Text 6"/>
+          <p:cNvSpPr/>
+          <p:nvPr/>
+        </p:nvSpPr>
+        <p:spPr>
+          <a:xfrm>
+            <a:off x="731520" y="4160520"/>
             <a:ext cx="2240280" cy="1463040"/>
           </a:xfrm>
           <a:prstGeom prst="rect">
@@ -13020,14 +12905,14 @@
           <a:bodyPr wrap="square" rtlCol="0" anchor="ctr"/>
           <a:lstStyle/>
           <a:p>
-            <a:pPr algn="ctr" indent="0" marL="0">
+            <a:pPr marL="0" indent="0" algn="ctr">
               <a:lnSpc>
                 <a:spcPct val="125000"/>
               </a:lnSpc>
               <a:buNone/>
             </a:pPr>
             <a:r>
-              <a:rPr lang="en-US" sz="1100" dirty="0">
+              <a:rPr lang="en-US" sz="1400" dirty="0">
                 <a:solidFill>
                   <a:srgbClr val="FFFFFF"/>
                 </a:solidFill>
@@ -13035,21 +12920,21 @@
                 <a:ea typeface="Calibri" pitchFamily="34" charset="-122"/>
                 <a:cs typeface="Calibri" pitchFamily="34" charset="-120"/>
               </a:rPr>
-              <a:t>Demo features, gather feedback, discuss what's left</a:t>
-            </a:r>
-            <a:endParaRPr lang="en-US" sz="1100" dirty="0"/>
-          </a:p>
-        </p:txBody>
-      </p:sp>
-      <p:sp>
-        <p:nvSpPr>
-          <p:cNvPr id="22" name="Shape 17"/>
-          <p:cNvSpPr/>
-          <p:nvPr/>
-        </p:nvSpPr>
-        <p:spPr>
-          <a:xfrm>
-            <a:off x="9052560" y="1828800"/>
+              <a:t>Review velocity, select backlog items, commit to goals</a:t>
+            </a:r>
+            <a:endParaRPr lang="en-US" sz="1400" dirty="0"/>
+          </a:p>
+        </p:txBody>
+      </p:sp>
+      <p:sp>
+        <p:nvSpPr>
+          <p:cNvPr id="10" name="Shape 7"/>
+          <p:cNvSpPr/>
+          <p:nvPr/>
+        </p:nvSpPr>
+        <p:spPr>
+          <a:xfrm>
+            <a:off x="3383280" y="1828800"/>
             <a:ext cx="2606040" cy="4023360"/>
           </a:xfrm>
           <a:prstGeom prst="roundRect">
@@ -13062,16 +12947,23 @@
           </a:solidFill>
           <a:ln/>
         </p:spPr>
-      </p:sp>
-      <p:sp>
-        <p:nvSpPr>
-          <p:cNvPr id="23" name="Shape 18"/>
-          <p:cNvSpPr/>
-          <p:nvPr/>
-        </p:nvSpPr>
-        <p:spPr>
-          <a:xfrm>
-            <a:off x="9944100" y="2194560"/>
+        <p:txBody>
+          <a:bodyPr/>
+          <a:lstStyle/>
+          <a:p>
+            <a:endParaRPr lang="en-US"/>
+          </a:p>
+        </p:txBody>
+      </p:sp>
+      <p:sp>
+        <p:nvSpPr>
+          <p:cNvPr id="11" name="Shape 8"/>
+          <p:cNvSpPr/>
+          <p:nvPr/>
+        </p:nvSpPr>
+        <p:spPr>
+          <a:xfrm>
+            <a:off x="4274820" y="2194560"/>
             <a:ext cx="822960" cy="822960"/>
           </a:xfrm>
           <a:prstGeom prst="ellipse">
@@ -13082,10 +12974,17 @@
           </a:solidFill>
           <a:ln/>
         </p:spPr>
+        <p:txBody>
+          <a:bodyPr/>
+          <a:lstStyle/>
+          <a:p>
+            <a:endParaRPr lang="en-US"/>
+          </a:p>
+        </p:txBody>
       </p:sp>
       <p:pic>
         <p:nvPicPr>
-          <p:cNvPr id="24" name="Image 3" descr="icon_rotatecw.png">    </p:cNvPr>
+          <p:cNvPr id="12" name="Image 1" descr="icon_messagecircle.png"/>
           <p:cNvPicPr>
             <a:picLocks noChangeAspect="1"/>
           </p:cNvPicPr>
@@ -13099,7 +12998,7 @@
         </p:blipFill>
         <p:spPr>
           <a:xfrm>
-            <a:off x="10141610" y="2392070"/>
+            <a:off x="4472330" y="2392070"/>
             <a:ext cx="427939" cy="427939"/>
           </a:xfrm>
           <a:prstGeom prst="rect">
@@ -13109,13 +13008,13 @@
       </p:pic>
       <p:sp>
         <p:nvSpPr>
-          <p:cNvPr id="25" name="Text 19"/>
-          <p:cNvSpPr/>
-          <p:nvPr/>
-        </p:nvSpPr>
-        <p:spPr>
-          <a:xfrm>
-            <a:off x="9189720" y="3200400"/>
+          <p:cNvPr id="13" name="Text 9"/>
+          <p:cNvSpPr/>
+          <p:nvPr/>
+        </p:nvSpPr>
+        <p:spPr>
+          <a:xfrm>
+            <a:off x="3520440" y="3200400"/>
             <a:ext cx="2331720" cy="502920"/>
           </a:xfrm>
           <a:prstGeom prst="rect">
@@ -13128,11 +13027,11 @@
           <a:bodyPr wrap="square" rtlCol="0" anchor="ctr"/>
           <a:lstStyle/>
           <a:p>
-            <a:pPr algn="ctr" indent="0" marL="0">
-              <a:buNone/>
-            </a:pPr>
-            <a:r>
-              <a:rPr lang="en-US" sz="1500" b="1" dirty="0">
+            <a:pPr marL="0" indent="0" algn="ctr">
+              <a:buNone/>
+            </a:pPr>
+            <a:r>
+              <a:rPr lang="en-US" b="1" dirty="0">
                 <a:solidFill>
                   <a:srgbClr val="3A2E14"/>
                 </a:solidFill>
@@ -13140,21 +13039,21 @@
                 <a:ea typeface="Cambria" pitchFamily="34" charset="-122"/>
                 <a:cs typeface="Cambria" pitchFamily="34" charset="-120"/>
               </a:rPr>
-              <a:t>Retrospective</a:t>
-            </a:r>
-            <a:endParaRPr lang="en-US" sz="1500" dirty="0"/>
-          </a:p>
-        </p:txBody>
-      </p:sp>
-      <p:sp>
-        <p:nvSpPr>
-          <p:cNvPr id="26" name="Text 20"/>
-          <p:cNvSpPr/>
-          <p:nvPr/>
-        </p:nvSpPr>
-        <p:spPr>
-          <a:xfrm>
-            <a:off x="9189720" y="3703320"/>
+              <a:t>Daily Standup</a:t>
+            </a:r>
+            <a:endParaRPr lang="en-US" dirty="0"/>
+          </a:p>
+        </p:txBody>
+      </p:sp>
+      <p:sp>
+        <p:nvSpPr>
+          <p:cNvPr id="14" name="Text 10"/>
+          <p:cNvSpPr/>
+          <p:nvPr/>
+        </p:nvSpPr>
+        <p:spPr>
+          <a:xfrm>
+            <a:off x="3520440" y="3703320"/>
             <a:ext cx="2331720" cy="365760"/>
           </a:xfrm>
           <a:prstGeom prst="rect">
@@ -13167,11 +13066,11 @@
           <a:bodyPr wrap="square" rtlCol="0" anchor="ctr"/>
           <a:lstStyle/>
           <a:p>
-            <a:pPr algn="ctr" indent="0" marL="0">
-              <a:buNone/>
-            </a:pPr>
-            <a:r>
-              <a:rPr lang="en-US" sz="1100" i="1" dirty="0">
+            <a:pPr marL="0" indent="0" algn="ctr">
+              <a:buNone/>
+            </a:pPr>
+            <a:r>
+              <a:rPr lang="en-US" sz="1400" i="1" dirty="0">
                 <a:solidFill>
                   <a:srgbClr val="791716"/>
                 </a:solidFill>
@@ -13179,21 +13078,21 @@
                 <a:ea typeface="Calibri" pitchFamily="34" charset="-122"/>
                 <a:cs typeface="Calibri" pitchFamily="34" charset="-120"/>
               </a:rPr>
-              <a:t>Bi-weekly · 5 min</a:t>
-            </a:r>
-            <a:endParaRPr lang="en-US" sz="1100" dirty="0"/>
-          </a:p>
-        </p:txBody>
-      </p:sp>
-      <p:sp>
-        <p:nvSpPr>
-          <p:cNvPr id="27" name="Text 21"/>
-          <p:cNvSpPr/>
-          <p:nvPr/>
-        </p:nvSpPr>
-        <p:spPr>
-          <a:xfrm>
-            <a:off x="9235440" y="4160520"/>
+              <a:t>Async, by 10 AM</a:t>
+            </a:r>
+            <a:endParaRPr lang="en-US" sz="1400" dirty="0"/>
+          </a:p>
+        </p:txBody>
+      </p:sp>
+      <p:sp>
+        <p:nvSpPr>
+          <p:cNvPr id="15" name="Text 11"/>
+          <p:cNvSpPr/>
+          <p:nvPr/>
+        </p:nvSpPr>
+        <p:spPr>
+          <a:xfrm>
+            <a:off x="3566160" y="4160520"/>
             <a:ext cx="2240280" cy="1463040"/>
           </a:xfrm>
           <a:prstGeom prst="rect">
@@ -13206,14 +13105,14 @@
           <a:bodyPr wrap="square" rtlCol="0" anchor="ctr"/>
           <a:lstStyle/>
           <a:p>
-            <a:pPr algn="ctr" indent="0" marL="0">
+            <a:pPr marL="0" indent="0" algn="ctr">
               <a:lnSpc>
                 <a:spcPct val="125000"/>
               </a:lnSpc>
               <a:buNone/>
             </a:pPr>
             <a:r>
-              <a:rPr lang="en-US" sz="1100" dirty="0">
+              <a:rPr lang="en-US" sz="1400" dirty="0">
                 <a:solidFill>
                   <a:srgbClr val="3A2E14"/>
                 </a:solidFill>
@@ -13221,45 +13120,445 @@
                 <a:ea typeface="Calibri" pitchFamily="34" charset="-122"/>
                 <a:cs typeface="Calibri" pitchFamily="34" charset="-120"/>
               </a:rPr>
-              <a:t>What went well, what to improve, action items</a:t>
-            </a:r>
-            <a:endParaRPr lang="en-US" sz="1100" dirty="0"/>
-          </a:p>
-        </p:txBody>
-      </p:sp>
-      <p:sp>
-        <p:nvSpPr>
-          <p:cNvPr id="28" name="Text 22"/>
-          <p:cNvSpPr/>
-          <p:nvPr/>
-        </p:nvSpPr>
-        <p:spPr>
-          <a:xfrm>
-            <a:off x="457200" y="6528816"/>
-            <a:ext cx="7315200" cy="274320"/>
-          </a:xfrm>
-          <a:prstGeom prst="rect">
-            <a:avLst/>
-          </a:prstGeom>
-          <a:noFill/>
-          <a:ln/>
-        </p:spPr>
-        <p:txBody>
-          <a:bodyPr wrap="square" rtlCol="0" anchor="ctr"/>
-          <a:lstStyle/>
-          <a:p>
-            <a:pPr indent="0" marL="0">
-              <a:buNone/>
-            </a:pPr>
-            <a:r>
-              <a:rPr lang="en-US" sz="1000" i="1" dirty="0">
-                <a:solidFill>
-                  <a:srgbClr val="9C8F86"/>
+              <a:t>Post in Discord/Slack: yesterday, today, blockers</a:t>
+            </a:r>
+            <a:endParaRPr lang="en-US" sz="1400" dirty="0"/>
+          </a:p>
+        </p:txBody>
+      </p:sp>
+      <p:sp>
+        <p:nvSpPr>
+          <p:cNvPr id="16" name="Shape 12"/>
+          <p:cNvSpPr/>
+          <p:nvPr/>
+        </p:nvSpPr>
+        <p:spPr>
+          <a:xfrm>
+            <a:off x="6217920" y="1828800"/>
+            <a:ext cx="2606040" cy="4023360"/>
+          </a:xfrm>
+          <a:prstGeom prst="roundRect">
+            <a:avLst>
+              <a:gd name="adj" fmla="val 4211"/>
+            </a:avLst>
+          </a:prstGeom>
+          <a:solidFill>
+            <a:srgbClr val="791716"/>
+          </a:solidFill>
+          <a:ln/>
+        </p:spPr>
+        <p:txBody>
+          <a:bodyPr/>
+          <a:lstStyle/>
+          <a:p>
+            <a:endParaRPr lang="en-US"/>
+          </a:p>
+        </p:txBody>
+      </p:sp>
+      <p:sp>
+        <p:nvSpPr>
+          <p:cNvPr id="17" name="Shape 13"/>
+          <p:cNvSpPr/>
+          <p:nvPr/>
+        </p:nvSpPr>
+        <p:spPr>
+          <a:xfrm>
+            <a:off x="7109460" y="2194560"/>
+            <a:ext cx="822960" cy="822960"/>
+          </a:xfrm>
+          <a:prstGeom prst="ellipse">
+            <a:avLst/>
+          </a:prstGeom>
+          <a:solidFill>
+            <a:srgbClr val="C0AC7E"/>
+          </a:solidFill>
+          <a:ln/>
+        </p:spPr>
+        <p:txBody>
+          <a:bodyPr/>
+          <a:lstStyle/>
+          <a:p>
+            <a:endParaRPr lang="en-US"/>
+          </a:p>
+        </p:txBody>
+      </p:sp>
+      <p:pic>
+        <p:nvPicPr>
+          <p:cNvPr id="18" name="Image 2" descr="icon_checkcircle.png"/>
+          <p:cNvPicPr>
+            <a:picLocks noChangeAspect="1"/>
+          </p:cNvPicPr>
+          <p:nvPr/>
+        </p:nvPicPr>
+        <p:blipFill>
+          <a:blip r:embed="rId5"/>
+          <a:stretch>
+            <a:fillRect/>
+          </a:stretch>
+        </p:blipFill>
+        <p:spPr>
+          <a:xfrm>
+            <a:off x="7306970" y="2392070"/>
+            <a:ext cx="427939" cy="427939"/>
+          </a:xfrm>
+          <a:prstGeom prst="rect">
+            <a:avLst/>
+          </a:prstGeom>
+        </p:spPr>
+      </p:pic>
+      <p:sp>
+        <p:nvSpPr>
+          <p:cNvPr id="19" name="Text 14"/>
+          <p:cNvSpPr/>
+          <p:nvPr/>
+        </p:nvSpPr>
+        <p:spPr>
+          <a:xfrm>
+            <a:off x="6355080" y="3200400"/>
+            <a:ext cx="2331720" cy="502920"/>
+          </a:xfrm>
+          <a:prstGeom prst="rect">
+            <a:avLst/>
+          </a:prstGeom>
+          <a:noFill/>
+          <a:ln/>
+        </p:spPr>
+        <p:txBody>
+          <a:bodyPr wrap="square" rtlCol="0" anchor="ctr"/>
+          <a:lstStyle/>
+          <a:p>
+            <a:pPr marL="0" indent="0" algn="ctr">
+              <a:buNone/>
+            </a:pPr>
+            <a:r>
+              <a:rPr lang="en-US" b="1" dirty="0">
+                <a:solidFill>
+                  <a:srgbClr val="FFFFFF"/>
+                </a:solidFill>
+                <a:latin typeface="Cambria" pitchFamily="34" charset="0"/>
+                <a:ea typeface="Cambria" pitchFamily="34" charset="-122"/>
+                <a:cs typeface="Cambria" pitchFamily="34" charset="-120"/>
+              </a:rPr>
+              <a:t>Sprint Review</a:t>
+            </a:r>
+            <a:endParaRPr lang="en-US" dirty="0"/>
+          </a:p>
+        </p:txBody>
+      </p:sp>
+      <p:sp>
+        <p:nvSpPr>
+          <p:cNvPr id="20" name="Text 15"/>
+          <p:cNvSpPr/>
+          <p:nvPr/>
+        </p:nvSpPr>
+        <p:spPr>
+          <a:xfrm>
+            <a:off x="6355080" y="3703320"/>
+            <a:ext cx="2331720" cy="365760"/>
+          </a:xfrm>
+          <a:prstGeom prst="rect">
+            <a:avLst/>
+          </a:prstGeom>
+          <a:noFill/>
+          <a:ln/>
+        </p:spPr>
+        <p:txBody>
+          <a:bodyPr wrap="square" rtlCol="0" anchor="ctr"/>
+          <a:lstStyle/>
+          <a:p>
+            <a:pPr marL="0" indent="0" algn="ctr">
+              <a:buNone/>
+            </a:pPr>
+            <a:r>
+              <a:rPr lang="en-US" sz="1400" i="1" dirty="0">
+                <a:solidFill>
+                  <a:srgbClr val="E4D9BE"/>
                 </a:solidFill>
                 <a:latin typeface="Calibri" pitchFamily="34" charset="0"/>
                 <a:ea typeface="Calibri" pitchFamily="34" charset="-122"/>
                 <a:cs typeface="Calibri" pitchFamily="34" charset="-120"/>
               </a:rPr>
+              <a:t>Weekly · 15 min</a:t>
+            </a:r>
+            <a:endParaRPr lang="en-US" sz="1400" dirty="0"/>
+          </a:p>
+        </p:txBody>
+      </p:sp>
+      <p:sp>
+        <p:nvSpPr>
+          <p:cNvPr id="21" name="Text 16"/>
+          <p:cNvSpPr/>
+          <p:nvPr/>
+        </p:nvSpPr>
+        <p:spPr>
+          <a:xfrm>
+            <a:off x="6400800" y="4160520"/>
+            <a:ext cx="2240280" cy="1463040"/>
+          </a:xfrm>
+          <a:prstGeom prst="rect">
+            <a:avLst/>
+          </a:prstGeom>
+          <a:noFill/>
+          <a:ln/>
+        </p:spPr>
+        <p:txBody>
+          <a:bodyPr wrap="square" rtlCol="0" anchor="ctr"/>
+          <a:lstStyle/>
+          <a:p>
+            <a:pPr marL="0" indent="0" algn="ctr">
+              <a:lnSpc>
+                <a:spcPct val="125000"/>
+              </a:lnSpc>
+              <a:buNone/>
+            </a:pPr>
+            <a:r>
+              <a:rPr lang="en-US" sz="1400" dirty="0">
+                <a:solidFill>
+                  <a:srgbClr val="FFFFFF"/>
+                </a:solidFill>
+                <a:latin typeface="Calibri" pitchFamily="34" charset="0"/>
+                <a:ea typeface="Calibri" pitchFamily="34" charset="-122"/>
+                <a:cs typeface="Calibri" pitchFamily="34" charset="-120"/>
+              </a:rPr>
+              <a:t>Demo features, gather feedback, discuss what's left</a:t>
+            </a:r>
+            <a:endParaRPr lang="en-US" sz="1400" dirty="0"/>
+          </a:p>
+        </p:txBody>
+      </p:sp>
+      <p:sp>
+        <p:nvSpPr>
+          <p:cNvPr id="22" name="Shape 17"/>
+          <p:cNvSpPr/>
+          <p:nvPr/>
+        </p:nvSpPr>
+        <p:spPr>
+          <a:xfrm>
+            <a:off x="9052560" y="1828800"/>
+            <a:ext cx="2606040" cy="4023360"/>
+          </a:xfrm>
+          <a:prstGeom prst="roundRect">
+            <a:avLst>
+              <a:gd name="adj" fmla="val 4211"/>
+            </a:avLst>
+          </a:prstGeom>
+          <a:solidFill>
+            <a:srgbClr val="C0AC7E"/>
+          </a:solidFill>
+          <a:ln/>
+        </p:spPr>
+        <p:txBody>
+          <a:bodyPr/>
+          <a:lstStyle/>
+          <a:p>
+            <a:endParaRPr lang="en-US"/>
+          </a:p>
+        </p:txBody>
+      </p:sp>
+      <p:sp>
+        <p:nvSpPr>
+          <p:cNvPr id="23" name="Shape 18"/>
+          <p:cNvSpPr/>
+          <p:nvPr/>
+        </p:nvSpPr>
+        <p:spPr>
+          <a:xfrm>
+            <a:off x="9944100" y="2194560"/>
+            <a:ext cx="822960" cy="822960"/>
+          </a:xfrm>
+          <a:prstGeom prst="ellipse">
+            <a:avLst/>
+          </a:prstGeom>
+          <a:solidFill>
+            <a:srgbClr val="791716"/>
+          </a:solidFill>
+          <a:ln/>
+        </p:spPr>
+        <p:txBody>
+          <a:bodyPr/>
+          <a:lstStyle/>
+          <a:p>
+            <a:endParaRPr lang="en-US"/>
+          </a:p>
+        </p:txBody>
+      </p:sp>
+      <p:pic>
+        <p:nvPicPr>
+          <p:cNvPr id="24" name="Image 3" descr="icon_rotatecw.png"/>
+          <p:cNvPicPr>
+            <a:picLocks noChangeAspect="1"/>
+          </p:cNvPicPr>
+          <p:nvPr/>
+        </p:nvPicPr>
+        <p:blipFill>
+          <a:blip r:embed="rId6"/>
+          <a:stretch>
+            <a:fillRect/>
+          </a:stretch>
+        </p:blipFill>
+        <p:spPr>
+          <a:xfrm>
+            <a:off x="10141610" y="2392070"/>
+            <a:ext cx="427939" cy="427939"/>
+          </a:xfrm>
+          <a:prstGeom prst="rect">
+            <a:avLst/>
+          </a:prstGeom>
+        </p:spPr>
+      </p:pic>
+      <p:sp>
+        <p:nvSpPr>
+          <p:cNvPr id="25" name="Text 19"/>
+          <p:cNvSpPr/>
+          <p:nvPr/>
+        </p:nvSpPr>
+        <p:spPr>
+          <a:xfrm>
+            <a:off x="9189720" y="3200400"/>
+            <a:ext cx="2331720" cy="502920"/>
+          </a:xfrm>
+          <a:prstGeom prst="rect">
+            <a:avLst/>
+          </a:prstGeom>
+          <a:noFill/>
+          <a:ln/>
+        </p:spPr>
+        <p:txBody>
+          <a:bodyPr wrap="square" rtlCol="0" anchor="ctr"/>
+          <a:lstStyle/>
+          <a:p>
+            <a:pPr marL="0" indent="0" algn="ctr">
+              <a:buNone/>
+            </a:pPr>
+            <a:r>
+              <a:rPr lang="en-US" b="1" dirty="0">
+                <a:solidFill>
+                  <a:srgbClr val="3A2E14"/>
+                </a:solidFill>
+                <a:latin typeface="Cambria" pitchFamily="34" charset="0"/>
+                <a:ea typeface="Cambria" pitchFamily="34" charset="-122"/>
+                <a:cs typeface="Cambria" pitchFamily="34" charset="-120"/>
+              </a:rPr>
+              <a:t>Retrospective</a:t>
+            </a:r>
+            <a:endParaRPr lang="en-US" dirty="0"/>
+          </a:p>
+        </p:txBody>
+      </p:sp>
+      <p:sp>
+        <p:nvSpPr>
+          <p:cNvPr id="26" name="Text 20"/>
+          <p:cNvSpPr/>
+          <p:nvPr/>
+        </p:nvSpPr>
+        <p:spPr>
+          <a:xfrm>
+            <a:off x="9189720" y="3703320"/>
+            <a:ext cx="2331720" cy="365760"/>
+          </a:xfrm>
+          <a:prstGeom prst="rect">
+            <a:avLst/>
+          </a:prstGeom>
+          <a:noFill/>
+          <a:ln/>
+        </p:spPr>
+        <p:txBody>
+          <a:bodyPr wrap="square" rtlCol="0" anchor="ctr"/>
+          <a:lstStyle/>
+          <a:p>
+            <a:pPr marL="0" indent="0" algn="ctr">
+              <a:buNone/>
+            </a:pPr>
+            <a:r>
+              <a:rPr lang="en-US" sz="1400" i="1" dirty="0">
+                <a:solidFill>
+                  <a:srgbClr val="791716"/>
+                </a:solidFill>
+                <a:latin typeface="Calibri" pitchFamily="34" charset="0"/>
+                <a:ea typeface="Calibri" pitchFamily="34" charset="-122"/>
+                <a:cs typeface="Calibri" pitchFamily="34" charset="-120"/>
+              </a:rPr>
+              <a:t>Bi-weekly · 5 min</a:t>
+            </a:r>
+            <a:endParaRPr lang="en-US" sz="1400" dirty="0"/>
+          </a:p>
+        </p:txBody>
+      </p:sp>
+      <p:sp>
+        <p:nvSpPr>
+          <p:cNvPr id="27" name="Text 21"/>
+          <p:cNvSpPr/>
+          <p:nvPr/>
+        </p:nvSpPr>
+        <p:spPr>
+          <a:xfrm>
+            <a:off x="9235440" y="4160520"/>
+            <a:ext cx="2240280" cy="1463040"/>
+          </a:xfrm>
+          <a:prstGeom prst="rect">
+            <a:avLst/>
+          </a:prstGeom>
+          <a:noFill/>
+          <a:ln/>
+        </p:spPr>
+        <p:txBody>
+          <a:bodyPr wrap="square" rtlCol="0" anchor="ctr"/>
+          <a:lstStyle/>
+          <a:p>
+            <a:pPr marL="0" indent="0" algn="ctr">
+              <a:lnSpc>
+                <a:spcPct val="125000"/>
+              </a:lnSpc>
+              <a:buNone/>
+            </a:pPr>
+            <a:r>
+              <a:rPr lang="en-US" sz="1400" dirty="0">
+                <a:solidFill>
+                  <a:srgbClr val="3A2E14"/>
+                </a:solidFill>
+                <a:latin typeface="Calibri" pitchFamily="34" charset="0"/>
+                <a:ea typeface="Calibri" pitchFamily="34" charset="-122"/>
+                <a:cs typeface="Calibri" pitchFamily="34" charset="-120"/>
+              </a:rPr>
+              <a:t>What went well, what to improve, action items</a:t>
+            </a:r>
+            <a:endParaRPr lang="en-US" sz="1400" dirty="0"/>
+          </a:p>
+        </p:txBody>
+      </p:sp>
+      <p:sp>
+        <p:nvSpPr>
+          <p:cNvPr id="28" name="Text 22"/>
+          <p:cNvSpPr/>
+          <p:nvPr/>
+        </p:nvSpPr>
+        <p:spPr>
+          <a:xfrm>
+            <a:off x="457200" y="6528816"/>
+            <a:ext cx="7315200" cy="274320"/>
+          </a:xfrm>
+          <a:prstGeom prst="rect">
+            <a:avLst/>
+          </a:prstGeom>
+          <a:noFill/>
+          <a:ln/>
+        </p:spPr>
+        <p:txBody>
+          <a:bodyPr wrap="square" rtlCol="0" anchor="ctr"/>
+          <a:lstStyle/>
+          <a:p>
+            <a:pPr marL="0" indent="0">
+              <a:buNone/>
+            </a:pPr>
+            <a:r>
+              <a:rPr lang="en-US" sz="1000" i="1" dirty="0">
+                <a:solidFill>
+                  <a:srgbClr val="9C8F86"/>
+                </a:solidFill>
+                <a:latin typeface="Calibri" pitchFamily="34" charset="0"/>
+                <a:ea typeface="Calibri" pitchFamily="34" charset="-122"/>
+                <a:cs typeface="Calibri" pitchFamily="34" charset="-120"/>
+              </a:rPr>
               <a:t>Agile Ceremonies</a:t>
             </a:r>
             <a:endParaRPr lang="en-US" sz="1000" dirty="0"/>
@@ -13287,7 +13586,7 @@
           <a:bodyPr wrap="square" rtlCol="0" anchor="ctr"/>
           <a:lstStyle/>
           <a:p>
-            <a:pPr algn="r" indent="0" marL="0">
+            <a:pPr marL="0" indent="0" algn="r">
               <a:buNone/>
             </a:pPr>
             <a:r>
@@ -13321,6 +13620,7 @@
         <a:solidFill>
           <a:srgbClr val="791716"/>
         </a:solidFill>
+        <a:effectLst/>
       </p:bgPr>
     </p:bg>
     <p:spTree>
@@ -13358,7 +13658,7 @@
           <a:bodyPr wrap="square" rtlCol="0" anchor="ctr"/>
           <a:lstStyle/>
           <a:p>
-            <a:pPr indent="0" marL="0">
+            <a:pPr marL="0" indent="0">
               <a:buNone/>
             </a:pPr>
             <a:r>
@@ -13397,7 +13697,7 @@
           <a:bodyPr wrap="square" rtlCol="0" anchor="ctr"/>
           <a:lstStyle/>
           <a:p>
-            <a:pPr indent="0" marL="0">
+            <a:pPr marL="0" indent="0">
               <a:buNone/>
             </a:pPr>
             <a:r>
@@ -13436,6 +13736,13 @@
           </a:solidFill>
           <a:ln/>
         </p:spPr>
+        <p:txBody>
+          <a:bodyPr/>
+          <a:lstStyle/>
+          <a:p>
+            <a:endParaRPr lang="en-US"/>
+          </a:p>
+        </p:txBody>
       </p:sp>
       <p:sp>
         <p:nvSpPr>
@@ -13456,17 +13763,24 @@
           </a:solidFill>
           <a:ln/>
         </p:spPr>
+        <p:txBody>
+          <a:bodyPr/>
+          <a:lstStyle/>
+          <a:p>
+            <a:endParaRPr lang="en-US"/>
+          </a:p>
+        </p:txBody>
       </p:sp>
       <p:pic>
         <p:nvPicPr>
-          <p:cNvPr id="6" name="Image 0" descr="icon_gitbranch.png">    </p:cNvPr>
+          <p:cNvPr id="6" name="Image 0" descr="icon_gitbranch.png"/>
           <p:cNvPicPr>
             <a:picLocks noChangeAspect="1"/>
           </p:cNvPicPr>
           <p:nvPr/>
         </p:nvPicPr>
         <p:blipFill>
-          <a:blip r:embed="rId1"/>
+          <a:blip r:embed="rId3"/>
           <a:stretch>
             <a:fillRect/>
           </a:stretch>
@@ -13502,7 +13816,7 @@
           <a:bodyPr wrap="square" rtlCol="0" anchor="ctr"/>
           <a:lstStyle/>
           <a:p>
-            <a:pPr indent="0" marL="0">
+            <a:pPr marL="0" indent="0">
               <a:buNone/>
             </a:pPr>
             <a:r>
@@ -13541,14 +13855,14 @@
           <a:bodyPr wrap="square" rtlCol="0" anchor="ctr"/>
           <a:lstStyle/>
           <a:p>
-            <a:pPr indent="0" marL="0">
+            <a:pPr marL="0" indent="0">
               <a:lnSpc>
                 <a:spcPct val="115000"/>
               </a:lnSpc>
               <a:buNone/>
             </a:pPr>
             <a:r>
-              <a:rPr lang="en-US" sz="1250" dirty="0">
+              <a:rPr lang="en-US" sz="1400" dirty="0">
                 <a:solidFill>
                   <a:srgbClr val="E4D9BE"/>
                 </a:solidFill>
@@ -13558,7 +13872,7 @@
               </a:rPr>
               <a:t>•  Daily commits — minimum, including doc days</a:t>
             </a:r>
-            <a:endParaRPr lang="en-US" sz="1250" dirty="0"/>
+            <a:endParaRPr lang="en-US" sz="1400" dirty="0"/>
           </a:p>
         </p:txBody>
       </p:sp>
@@ -13583,14 +13897,14 @@
           <a:bodyPr wrap="square" rtlCol="0" anchor="ctr"/>
           <a:lstStyle/>
           <a:p>
-            <a:pPr indent="0" marL="0">
+            <a:pPr marL="0" indent="0">
               <a:lnSpc>
                 <a:spcPct val="115000"/>
               </a:lnSpc>
               <a:buNone/>
             </a:pPr>
             <a:r>
-              <a:rPr lang="en-US" sz="1250" dirty="0">
+              <a:rPr lang="en-US" sz="1400" dirty="0">
                 <a:solidFill>
                   <a:srgbClr val="E4D9BE"/>
                 </a:solidFill>
@@ -13600,7 +13914,7 @@
               </a:rPr>
               <a:t>•  Conventional commits: feat:, fix:, docs:</a:t>
             </a:r>
-            <a:endParaRPr lang="en-US" sz="1250" dirty="0"/>
+            <a:endParaRPr lang="en-US" sz="1400" dirty="0"/>
           </a:p>
         </p:txBody>
       </p:sp>
@@ -13625,14 +13939,14 @@
           <a:bodyPr wrap="square" rtlCol="0" anchor="ctr"/>
           <a:lstStyle/>
           <a:p>
-            <a:pPr indent="0" marL="0">
+            <a:pPr marL="0" indent="0">
               <a:lnSpc>
                 <a:spcPct val="115000"/>
               </a:lnSpc>
               <a:buNone/>
             </a:pPr>
             <a:r>
-              <a:rPr lang="en-US" sz="1250" dirty="0">
+              <a:rPr lang="en-US" sz="1400" dirty="0">
                 <a:solidFill>
                   <a:srgbClr val="E4D9BE"/>
                 </a:solidFill>
@@ -13642,7 +13956,7 @@
               </a:rPr>
               <a:t>•  Feature-branch workflow with pull requests</a:t>
             </a:r>
-            <a:endParaRPr lang="en-US" sz="1250" dirty="0"/>
+            <a:endParaRPr lang="en-US" sz="1400" dirty="0"/>
           </a:p>
         </p:txBody>
       </p:sp>
@@ -13667,14 +13981,14 @@
           <a:bodyPr wrap="square" rtlCol="0" anchor="ctr"/>
           <a:lstStyle/>
           <a:p>
-            <a:pPr indent="0" marL="0">
+            <a:pPr marL="0" indent="0">
               <a:lnSpc>
                 <a:spcPct val="115000"/>
               </a:lnSpc>
               <a:buNone/>
             </a:pPr>
             <a:r>
-              <a:rPr lang="en-US" sz="1250" dirty="0">
+              <a:rPr lang="en-US" sz="1400" dirty="0">
                 <a:solidFill>
                   <a:srgbClr val="E4D9BE"/>
                 </a:solidFill>
@@ -13684,7 +13998,7 @@
               </a:rPr>
               <a:t>•  Main branch is protected — requires review</a:t>
             </a:r>
-            <a:endParaRPr lang="en-US" sz="1250" dirty="0"/>
+            <a:endParaRPr lang="en-US" sz="1400" dirty="0"/>
           </a:p>
         </p:txBody>
       </p:sp>
@@ -13709,6 +14023,13 @@
           </a:solidFill>
           <a:ln/>
         </p:spPr>
+        <p:txBody>
+          <a:bodyPr/>
+          <a:lstStyle/>
+          <a:p>
+            <a:endParaRPr lang="en-US"/>
+          </a:p>
+        </p:txBody>
       </p:sp>
       <p:sp>
         <p:nvSpPr>
@@ -13729,17 +14050,24 @@
           </a:solidFill>
           <a:ln/>
         </p:spPr>
+        <p:txBody>
+          <a:bodyPr/>
+          <a:lstStyle/>
+          <a:p>
+            <a:endParaRPr lang="en-US"/>
+          </a:p>
+        </p:txBody>
       </p:sp>
       <p:pic>
         <p:nvPicPr>
-          <p:cNvPr id="14" name="Image 1" descr="icon_server.png">    </p:cNvPr>
+          <p:cNvPr id="14" name="Image 1" descr="icon_server.png"/>
           <p:cNvPicPr>
             <a:picLocks noChangeAspect="1"/>
           </p:cNvPicPr>
           <p:nvPr/>
         </p:nvPicPr>
         <p:blipFill>
-          <a:blip r:embed="rId2"/>
+          <a:blip r:embed="rId4"/>
           <a:stretch>
             <a:fillRect/>
           </a:stretch>
@@ -13775,7 +14103,7 @@
           <a:bodyPr wrap="square" rtlCol="0" anchor="ctr"/>
           <a:lstStyle/>
           <a:p>
-            <a:pPr indent="0" marL="0">
+            <a:pPr marL="0" indent="0">
               <a:buNone/>
             </a:pPr>
             <a:r>
@@ -13814,11 +14142,11 @@
           <a:bodyPr wrap="square" rtlCol="0" anchor="ctr"/>
           <a:lstStyle/>
           <a:p>
-            <a:pPr indent="0" marL="0">
-              <a:buNone/>
-            </a:pPr>
-            <a:r>
-              <a:rPr lang="en-US" sz="1250" b="1" dirty="0">
+            <a:pPr marL="0" indent="0">
+              <a:buNone/>
+            </a:pPr>
+            <a:r>
+              <a:rPr lang="en-US" sz="1400" b="1" dirty="0">
                 <a:solidFill>
                   <a:srgbClr val="FFFFFF"/>
                 </a:solidFill>
@@ -13828,7 +14156,7 @@
               </a:rPr>
               <a:t>Unit tests</a:t>
             </a:r>
-            <a:endParaRPr lang="en-US" sz="1250" dirty="0"/>
+            <a:endParaRPr lang="en-US" sz="1400" dirty="0"/>
           </a:p>
         </p:txBody>
       </p:sp>
@@ -13853,11 +14181,11 @@
           <a:bodyPr wrap="square" rtlCol="0" anchor="ctr"/>
           <a:lstStyle/>
           <a:p>
-            <a:pPr algn="r" indent="0" marL="0">
-              <a:buNone/>
-            </a:pPr>
-            <a:r>
-              <a:rPr lang="en-US" sz="1200" dirty="0">
+            <a:pPr marL="0" indent="0" algn="r">
+              <a:buNone/>
+            </a:pPr>
+            <a:r>
+              <a:rPr lang="en-US" sz="1400" dirty="0">
                 <a:solidFill>
                   <a:srgbClr val="E4D9BE"/>
                 </a:solidFill>
@@ -13867,7 +14195,7 @@
               </a:rPr>
               <a:t>60% min (Sem. 2)</a:t>
             </a:r>
-            <a:endParaRPr lang="en-US" sz="1200" dirty="0"/>
+            <a:endParaRPr lang="en-US" sz="1400" dirty="0"/>
           </a:p>
         </p:txBody>
       </p:sp>
@@ -13892,11 +14220,11 @@
           <a:bodyPr wrap="square" rtlCol="0" anchor="ctr"/>
           <a:lstStyle/>
           <a:p>
-            <a:pPr indent="0" marL="0">
-              <a:buNone/>
-            </a:pPr>
-            <a:r>
-              <a:rPr lang="en-US" sz="1250" b="1" dirty="0">
+            <a:pPr marL="0" indent="0">
+              <a:buNone/>
+            </a:pPr>
+            <a:r>
+              <a:rPr lang="en-US" sz="1400" b="1" dirty="0">
                 <a:solidFill>
                   <a:srgbClr val="FFFFFF"/>
                 </a:solidFill>
@@ -13906,7 +14234,7 @@
               </a:rPr>
               <a:t>Integration tests</a:t>
             </a:r>
-            <a:endParaRPr lang="en-US" sz="1250" dirty="0"/>
+            <a:endParaRPr lang="en-US" sz="1400" dirty="0"/>
           </a:p>
         </p:txBody>
       </p:sp>
@@ -13931,11 +14259,11 @@
           <a:bodyPr wrap="square" rtlCol="0" anchor="ctr"/>
           <a:lstStyle/>
           <a:p>
-            <a:pPr algn="r" indent="0" marL="0">
-              <a:buNone/>
-            </a:pPr>
-            <a:r>
-              <a:rPr lang="en-US" sz="1200" dirty="0">
+            <a:pPr marL="0" indent="0" algn="r">
+              <a:buNone/>
+            </a:pPr>
+            <a:r>
+              <a:rPr lang="en-US" sz="1400" dirty="0">
                 <a:solidFill>
                   <a:srgbClr val="E4D9BE"/>
                 </a:solidFill>
@@ -13945,7 +14273,7 @@
               </a:rPr>
               <a:t>100% of API endpoints</a:t>
             </a:r>
-            <a:endParaRPr lang="en-US" sz="1200" dirty="0"/>
+            <a:endParaRPr lang="en-US" sz="1400" dirty="0"/>
           </a:p>
         </p:txBody>
       </p:sp>
@@ -13970,11 +14298,11 @@
           <a:bodyPr wrap="square" rtlCol="0" anchor="ctr"/>
           <a:lstStyle/>
           <a:p>
-            <a:pPr indent="0" marL="0">
-              <a:buNone/>
-            </a:pPr>
-            <a:r>
-              <a:rPr lang="en-US" sz="1250" b="1" dirty="0">
+            <a:pPr marL="0" indent="0">
+              <a:buNone/>
+            </a:pPr>
+            <a:r>
+              <a:rPr lang="en-US" sz="1400" b="1" dirty="0">
                 <a:solidFill>
                   <a:srgbClr val="FFFFFF"/>
                 </a:solidFill>
@@ -13984,7 +14312,7 @@
               </a:rPr>
               <a:t>End-to-end tests</a:t>
             </a:r>
-            <a:endParaRPr lang="en-US" sz="1250" dirty="0"/>
+            <a:endParaRPr lang="en-US" sz="1400" dirty="0"/>
           </a:p>
         </p:txBody>
       </p:sp>
@@ -14009,11 +14337,11 @@
           <a:bodyPr wrap="square" rtlCol="0" anchor="ctr"/>
           <a:lstStyle/>
           <a:p>
-            <a:pPr algn="r" indent="0" marL="0">
-              <a:buNone/>
-            </a:pPr>
-            <a:r>
-              <a:rPr lang="en-US" sz="1200" dirty="0">
+            <a:pPr marL="0" indent="0" algn="r">
+              <a:buNone/>
+            </a:pPr>
+            <a:r>
+              <a:rPr lang="en-US" sz="1400" dirty="0">
                 <a:solidFill>
                   <a:srgbClr val="E4D9BE"/>
                 </a:solidFill>
@@ -14023,7 +14351,7 @@
               </a:rPr>
               <a:t>Core user paths</a:t>
             </a:r>
-            <a:endParaRPr lang="en-US" sz="1200" dirty="0"/>
+            <a:endParaRPr lang="en-US" sz="1400" dirty="0"/>
           </a:p>
         </p:txBody>
       </p:sp>
@@ -14048,11 +14376,11 @@
           <a:bodyPr wrap="square" rtlCol="0" anchor="ctr"/>
           <a:lstStyle/>
           <a:p>
-            <a:pPr indent="0" marL="0">
-              <a:buNone/>
-            </a:pPr>
-            <a:r>
-              <a:rPr lang="en-US" sz="1250" b="1" dirty="0">
+            <a:pPr marL="0" indent="0">
+              <a:buNone/>
+            </a:pPr>
+            <a:r>
+              <a:rPr lang="en-US" sz="1400" b="1" dirty="0">
                 <a:solidFill>
                   <a:srgbClr val="FFFFFF"/>
                 </a:solidFill>
@@ -14062,7 +14390,7 @@
               </a:rPr>
               <a:t>Performance</a:t>
             </a:r>
-            <a:endParaRPr lang="en-US" sz="1250" dirty="0"/>
+            <a:endParaRPr lang="en-US" sz="1400" dirty="0"/>
           </a:p>
         </p:txBody>
       </p:sp>
@@ -14087,11 +14415,11 @@
           <a:bodyPr wrap="square" rtlCol="0" anchor="ctr"/>
           <a:lstStyle/>
           <a:p>
-            <a:pPr algn="r" indent="0" marL="0">
-              <a:buNone/>
-            </a:pPr>
-            <a:r>
-              <a:rPr lang="en-US" sz="1200" dirty="0">
+            <a:pPr marL="0" indent="0" algn="r">
+              <a:buNone/>
+            </a:pPr>
+            <a:r>
+              <a:rPr lang="en-US" sz="1400" dirty="0">
                 <a:solidFill>
                   <a:srgbClr val="E4D9BE"/>
                 </a:solidFill>
@@ -14101,7 +14429,7 @@
               </a:rPr>
               <a:t>&lt; 100ms query response</a:t>
             </a:r>
-            <a:endParaRPr lang="en-US" sz="1200" dirty="0"/>
+            <a:endParaRPr lang="en-US" sz="1400" dirty="0"/>
           </a:p>
         </p:txBody>
       </p:sp>
@@ -14126,14 +14454,14 @@
           <a:bodyPr wrap="square" rtlCol="0" anchor="ctr"/>
           <a:lstStyle/>
           <a:p>
-            <a:pPr indent="0" marL="0">
+            <a:pPr marL="0" indent="0">
               <a:lnSpc>
                 <a:spcPct val="120000"/>
               </a:lnSpc>
               <a:buNone/>
             </a:pPr>
             <a:r>
-              <a:rPr lang="en-US" sz="1150" i="1" dirty="0">
+              <a:rPr lang="en-US" sz="1400" i="1" dirty="0">
                 <a:solidFill>
                   <a:srgbClr val="E4D9BE"/>
                 </a:solidFill>
@@ -14143,7 +14471,7 @@
               </a:rPr>
               <a:t>CI/CD pipeline required — GitHub Actions, Jenkins, or CircleCI</a:t>
             </a:r>
-            <a:endParaRPr lang="en-US" sz="1150" dirty="0"/>
+            <a:endParaRPr lang="en-US" sz="1400" dirty="0"/>
           </a:p>
         </p:txBody>
       </p:sp>
@@ -14168,7 +14496,7 @@
           <a:bodyPr wrap="square" rtlCol="0" anchor="ctr"/>
           <a:lstStyle/>
           <a:p>
-            <a:pPr indent="0" marL="0">
+            <a:pPr marL="0" indent="0">
               <a:buNone/>
             </a:pPr>
             <a:r>
@@ -14207,7 +14535,7 @@
           <a:bodyPr wrap="square" rtlCol="0" anchor="ctr"/>
           <a:lstStyle/>
           <a:p>
-            <a:pPr algn="r" indent="0" marL="0">
+            <a:pPr marL="0" indent="0" algn="r">
               <a:buNone/>
             </a:pPr>
             <a:r>
@@ -14526,4 +14854,319 @@
     </a:ext>
   </a:extLst>
 </a:theme>
+</file>
+
+<file path=ppt/theme/theme2.xml><?xml version="1.0" encoding="utf-8"?>
+<a:theme xmlns:a="http://schemas.openxmlformats.org/drawingml/2006/main" name="Office Theme">
+  <a:themeElements>
+    <a:clrScheme name="Office">
+      <a:dk1>
+        <a:sysClr val="windowText" lastClr="000000"/>
+      </a:dk1>
+      <a:lt1>
+        <a:sysClr val="window" lastClr="FFFFFF"/>
+      </a:lt1>
+      <a:dk2>
+        <a:srgbClr val="0E2841"/>
+      </a:dk2>
+      <a:lt2>
+        <a:srgbClr val="E8E8E8"/>
+      </a:lt2>
+      <a:accent1>
+        <a:srgbClr val="156082"/>
+      </a:accent1>
+      <a:accent2>
+        <a:srgbClr val="E97132"/>
+      </a:accent2>
+      <a:accent3>
+        <a:srgbClr val="196B24"/>
+      </a:accent3>
+      <a:accent4>
+        <a:srgbClr val="0F9ED5"/>
+      </a:accent4>
+      <a:accent5>
+        <a:srgbClr val="A02B93"/>
+      </a:accent5>
+      <a:accent6>
+        <a:srgbClr val="4EA72E"/>
+      </a:accent6>
+      <a:hlink>
+        <a:srgbClr val="467886"/>
+      </a:hlink>
+      <a:folHlink>
+        <a:srgbClr val="96607D"/>
+      </a:folHlink>
+    </a:clrScheme>
+    <a:fontScheme name="Office">
+      <a:majorFont>
+        <a:latin typeface="Aptos Display" panose="02110004020202020204"/>
+        <a:ea typeface=""/>
+        <a:cs typeface=""/>
+        <a:font script="Jpan" typeface="游ゴシック Light"/>
+        <a:font script="Hang" typeface="맑은 고딕"/>
+        <a:font script="Hans" typeface="等线 Light"/>
+        <a:font script="Hant" typeface="新細明體"/>
+        <a:font script="Arab" typeface="Times New Roman"/>
+        <a:font script="Hebr" typeface="Times New Roman"/>
+        <a:font script="Thai" typeface="Angsana New"/>
+        <a:font script="Ethi" typeface="Nyala"/>
+        <a:font script="Beng" typeface="Vrinda"/>
+        <a:font script="Gujr" typeface="Shruti"/>
+        <a:font script="Khmr" typeface="MoolBoran"/>
+        <a:font script="Knda" typeface="Tunga"/>
+        <a:font script="Guru" typeface="Raavi"/>
+        <a:font script="Cans" typeface="Euphemia"/>
+        <a:font script="Cher" typeface="Plantagenet Cherokee"/>
+        <a:font script="Yiii" typeface="Microsoft Yi Baiti"/>
+        <a:font script="Tibt" typeface="Microsoft Himalaya"/>
+        <a:font script="Thaa" typeface="MV Boli"/>
+        <a:font script="Deva" typeface="Mangal"/>
+        <a:font script="Telu" typeface="Gautami"/>
+        <a:font script="Taml" typeface="Latha"/>
+        <a:font script="Syrc" typeface="Estrangelo Edessa"/>
+        <a:font script="Orya" typeface="Kalinga"/>
+        <a:font script="Mlym" typeface="Kartika"/>
+        <a:font script="Laoo" typeface="DokChampa"/>
+        <a:font script="Sinh" typeface="Iskoola Pota"/>
+        <a:font script="Mong" typeface="Mongolian Baiti"/>
+        <a:font script="Viet" typeface="Times New Roman"/>
+        <a:font script="Uigh" typeface="Microsoft Uighur"/>
+        <a:font script="Geor" typeface="Sylfaen"/>
+        <a:font script="Armn" typeface="Arial"/>
+        <a:font script="Bugi" typeface="Leelawadee UI"/>
+        <a:font script="Bopo" typeface="Microsoft JhengHei"/>
+        <a:font script="Java" typeface="Javanese Text"/>
+        <a:font script="Lisu" typeface="Segoe UI"/>
+        <a:font script="Mymr" typeface="Myanmar Text"/>
+        <a:font script="Nkoo" typeface="Ebrima"/>
+        <a:font script="Olck" typeface="Nirmala UI"/>
+        <a:font script="Osma" typeface="Ebrima"/>
+        <a:font script="Phag" typeface="Phagspa"/>
+        <a:font script="Syrn" typeface="Estrangelo Edessa"/>
+        <a:font script="Syrj" typeface="Estrangelo Edessa"/>
+        <a:font script="Syre" typeface="Estrangelo Edessa"/>
+        <a:font script="Sora" typeface="Nirmala UI"/>
+        <a:font script="Tale" typeface="Microsoft Tai Le"/>
+        <a:font script="Talu" typeface="Microsoft New Tai Lue"/>
+        <a:font script="Tfng" typeface="Ebrima"/>
+      </a:majorFont>
+      <a:minorFont>
+        <a:latin typeface="Aptos" panose="02110004020202020204"/>
+        <a:ea typeface=""/>
+        <a:cs typeface=""/>
+        <a:font script="Jpan" typeface="游ゴシック"/>
+        <a:font script="Hang" typeface="맑은 고딕"/>
+        <a:font script="Hans" typeface="等线"/>
+        <a:font script="Hant" typeface="新細明體"/>
+        <a:font script="Arab" typeface="Arial"/>
+        <a:font script="Hebr" typeface="Arial"/>
+        <a:font script="Thai" typeface="Cordia New"/>
+        <a:font script="Ethi" typeface="Nyala"/>
+        <a:font script="Beng" typeface="Vrinda"/>
+        <a:font script="Gujr" typeface="Shruti"/>
+        <a:font script="Khmr" typeface="DaunPenh"/>
+        <a:font script="Knda" typeface="Tunga"/>
+        <a:font script="Guru" typeface="Raavi"/>
+        <a:font script="Cans" typeface="Euphemia"/>
+        <a:font script="Cher" typeface="Plantagenet Cherokee"/>
+        <a:font script="Yiii" typeface="Microsoft Yi Baiti"/>
+        <a:font script="Tibt" typeface="Microsoft Himalaya"/>
+        <a:font script="Thaa" typeface="MV Boli"/>
+        <a:font script="Deva" typeface="Mangal"/>
+        <a:font script="Telu" typeface="Gautami"/>
+        <a:font script="Taml" typeface="Latha"/>
+        <a:font script="Syrc" typeface="Estrangelo Edessa"/>
+        <a:font script="Orya" typeface="Kalinga"/>
+        <a:font script="Mlym" typeface="Kartika"/>
+        <a:font script="Laoo" typeface="DokChampa"/>
+        <a:font script="Sinh" typeface="Iskoola Pota"/>
+        <a:font script="Mong" typeface="Mongolian Baiti"/>
+        <a:font script="Viet" typeface="Arial"/>
+        <a:font script="Uigh" typeface="Microsoft Uighur"/>
+        <a:font script="Geor" typeface="Sylfaen"/>
+        <a:font script="Armn" typeface="Arial"/>
+        <a:font script="Bugi" typeface="Leelawadee UI"/>
+        <a:font script="Bopo" typeface="Microsoft JhengHei"/>
+        <a:font script="Java" typeface="Javanese Text"/>
+        <a:font script="Lisu" typeface="Segoe UI"/>
+        <a:font script="Mymr" typeface="Myanmar Text"/>
+        <a:font script="Nkoo" typeface="Ebrima"/>
+        <a:font script="Olck" typeface="Nirmala UI"/>
+        <a:font script="Osma" typeface="Ebrima"/>
+        <a:font script="Phag" typeface="Phagspa"/>
+        <a:font script="Syrn" typeface="Estrangelo Edessa"/>
+        <a:font script="Syrj" typeface="Estrangelo Edessa"/>
+        <a:font script="Syre" typeface="Estrangelo Edessa"/>
+        <a:font script="Sora" typeface="Nirmala UI"/>
+        <a:font script="Tale" typeface="Microsoft Tai Le"/>
+        <a:font script="Talu" typeface="Microsoft New Tai Lue"/>
+        <a:font script="Tfng" typeface="Ebrima"/>
+      </a:minorFont>
+    </a:fontScheme>
+    <a:fmtScheme name="Office">
+      <a:fillStyleLst>
+        <a:solidFill>
+          <a:schemeClr val="phClr"/>
+        </a:solidFill>
+        <a:gradFill rotWithShape="1">
+          <a:gsLst>
+            <a:gs pos="0">
+              <a:schemeClr val="phClr">
+                <a:lumMod val="110000"/>
+                <a:satMod val="105000"/>
+                <a:tint val="67000"/>
+              </a:schemeClr>
+            </a:gs>
+            <a:gs pos="50000">
+              <a:schemeClr val="phClr">
+                <a:lumMod val="105000"/>
+                <a:satMod val="103000"/>
+                <a:tint val="73000"/>
+              </a:schemeClr>
+            </a:gs>
+            <a:gs pos="100000">
+              <a:schemeClr val="phClr">
+                <a:lumMod val="105000"/>
+                <a:satMod val="109000"/>
+                <a:tint val="81000"/>
+              </a:schemeClr>
+            </a:gs>
+          </a:gsLst>
+          <a:lin ang="5400000" scaled="0"/>
+        </a:gradFill>
+        <a:gradFill rotWithShape="1">
+          <a:gsLst>
+            <a:gs pos="0">
+              <a:schemeClr val="phClr">
+                <a:satMod val="103000"/>
+                <a:lumMod val="102000"/>
+                <a:tint val="94000"/>
+              </a:schemeClr>
+            </a:gs>
+            <a:gs pos="50000">
+              <a:schemeClr val="phClr">
+                <a:satMod val="110000"/>
+                <a:lumMod val="100000"/>
+                <a:shade val="100000"/>
+              </a:schemeClr>
+            </a:gs>
+            <a:gs pos="100000">
+              <a:schemeClr val="phClr">
+                <a:lumMod val="99000"/>
+                <a:satMod val="120000"/>
+                <a:shade val="78000"/>
+              </a:schemeClr>
+            </a:gs>
+          </a:gsLst>
+          <a:lin ang="5400000" scaled="0"/>
+        </a:gradFill>
+      </a:fillStyleLst>
+      <a:lnStyleLst>
+        <a:ln w="12700" cap="flat" cmpd="sng" algn="ctr">
+          <a:solidFill>
+            <a:schemeClr val="phClr"/>
+          </a:solidFill>
+          <a:prstDash val="solid"/>
+          <a:miter lim="800000"/>
+        </a:ln>
+        <a:ln w="19050" cap="flat" cmpd="sng" algn="ctr">
+          <a:solidFill>
+            <a:schemeClr val="phClr"/>
+          </a:solidFill>
+          <a:prstDash val="solid"/>
+          <a:miter lim="800000"/>
+        </a:ln>
+        <a:ln w="25400" cap="flat" cmpd="sng" algn="ctr">
+          <a:solidFill>
+            <a:schemeClr val="phClr"/>
+          </a:solidFill>
+          <a:prstDash val="solid"/>
+          <a:miter lim="800000"/>
+        </a:ln>
+      </a:lnStyleLst>
+      <a:effectStyleLst>
+        <a:effectStyle>
+          <a:effectLst/>
+        </a:effectStyle>
+        <a:effectStyle>
+          <a:effectLst/>
+        </a:effectStyle>
+        <a:effectStyle>
+          <a:effectLst>
+            <a:outerShdw blurRad="57150" dist="19050" dir="5400000" algn="ctr" rotWithShape="0">
+              <a:srgbClr val="000000">
+                <a:alpha val="63000"/>
+              </a:srgbClr>
+            </a:outerShdw>
+          </a:effectLst>
+        </a:effectStyle>
+      </a:effectStyleLst>
+      <a:bgFillStyleLst>
+        <a:solidFill>
+          <a:schemeClr val="phClr"/>
+        </a:solidFill>
+        <a:solidFill>
+          <a:schemeClr val="phClr">
+            <a:tint val="95000"/>
+            <a:satMod val="170000"/>
+          </a:schemeClr>
+        </a:solidFill>
+        <a:gradFill rotWithShape="1">
+          <a:gsLst>
+            <a:gs pos="0">
+              <a:schemeClr val="phClr">
+                <a:tint val="93000"/>
+                <a:satMod val="150000"/>
+                <a:shade val="98000"/>
+                <a:lumMod val="102000"/>
+              </a:schemeClr>
+            </a:gs>
+            <a:gs pos="50000">
+              <a:schemeClr val="phClr">
+                <a:tint val="98000"/>
+                <a:satMod val="130000"/>
+                <a:shade val="90000"/>
+                <a:lumMod val="103000"/>
+              </a:schemeClr>
+            </a:gs>
+            <a:gs pos="100000">
+              <a:schemeClr val="phClr">
+                <a:shade val="63000"/>
+                <a:satMod val="120000"/>
+              </a:schemeClr>
+            </a:gs>
+          </a:gsLst>
+          <a:lin ang="5400000" scaled="0"/>
+        </a:gradFill>
+      </a:bgFillStyleLst>
+    </a:fmtScheme>
+  </a:themeElements>
+  <a:objectDefaults>
+    <a:lnDef>
+      <a:spPr/>
+      <a:bodyPr/>
+      <a:lstStyle/>
+      <a:style>
+        <a:lnRef idx="2">
+          <a:schemeClr val="accent1"/>
+        </a:lnRef>
+        <a:fillRef idx="0">
+          <a:schemeClr val="accent1"/>
+        </a:fillRef>
+        <a:effectRef idx="1">
+          <a:schemeClr val="accent1"/>
+        </a:effectRef>
+        <a:fontRef idx="minor">
+          <a:schemeClr val="tx1"/>
+        </a:fontRef>
+      </a:style>
+    </a:lnDef>
+  </a:objectDefaults>
+  <a:extraClrSchemeLst/>
+  <a:extLst>
+    <a:ext uri="{05A4C25C-085E-4340-85A3-A5531E510DB2}">
+      <thm15:themeFamily xmlns:thm15="http://schemas.microsoft.com/office/thememl/2012/main" name="Office Theme" id="{2E142A2C-CD16-42D6-873A-C26D2A0506FA}" vid="{1BDDFF52-6CD6-40A5-AB3C-68EB2F1E4D0A}"/>
+    </a:ext>
+  </a:extLst>
+</a:theme>
 </file>